--- a/slide/TE_Classification_Presentation.pptx
+++ b/slide/TE_Classification_Presentation.pptx
@@ -5,26 +5,26 @@
     <p:sldMasterId id="2147483648" r:id="rId1"/>
   </p:sldMasterIdLst>
   <p:sldIdLst>
-    <p:sldId id="256" r:id="rId7"/>
-    <p:sldId id="257" r:id="rId8"/>
-    <p:sldId id="258" r:id="rId9"/>
-    <p:sldId id="259" r:id="rId10"/>
-    <p:sldId id="260" r:id="rId11"/>
-    <p:sldId id="261" r:id="rId12"/>
-    <p:sldId id="262" r:id="rId13"/>
-    <p:sldId id="263" r:id="rId14"/>
-    <p:sldId id="264" r:id="rId15"/>
-    <p:sldId id="265" r:id="rId16"/>
-    <p:sldId id="266" r:id="rId17"/>
-    <p:sldId id="267" r:id="rId18"/>
-    <p:sldId id="268" r:id="rId19"/>
-    <p:sldId id="269" r:id="rId20"/>
-    <p:sldId id="270" r:id="rId21"/>
-    <p:sldId id="271" r:id="rId22"/>
-    <p:sldId id="272" r:id="rId23"/>
-    <p:sldId id="273" r:id="rId24"/>
+    <p:sldId id="256" r:id="rId2"/>
+    <p:sldId id="257" r:id="rId3"/>
+    <p:sldId id="258" r:id="rId4"/>
+    <p:sldId id="259" r:id="rId5"/>
+    <p:sldId id="262" r:id="rId6"/>
+    <p:sldId id="260" r:id="rId7"/>
+    <p:sldId id="261" r:id="rId8"/>
+    <p:sldId id="263" r:id="rId9"/>
+    <p:sldId id="264" r:id="rId10"/>
+    <p:sldId id="265" r:id="rId11"/>
+    <p:sldId id="266" r:id="rId12"/>
+    <p:sldId id="267" r:id="rId13"/>
+    <p:sldId id="268" r:id="rId14"/>
+    <p:sldId id="269" r:id="rId15"/>
+    <p:sldId id="270" r:id="rId16"/>
+    <p:sldId id="271" r:id="rId17"/>
+    <p:sldId id="272" r:id="rId18"/>
+    <p:sldId id="273" r:id="rId19"/>
   </p:sldIdLst>
-  <p:sldSz cx="12188952" cy="6858000" type="screen4x3"/>
+  <p:sldSz cx="12188825" cy="6858000"/>
   <p:notesSz cx="6858000" cy="9144000"/>
   <p:defaultTextStyle>
     <a:defPPr>
@@ -121,6 +121,22 @@
       </a:defRPr>
     </a:lvl9pPr>
   </p:defaultTextStyle>
+  <p:extLst>
+    <p:ext uri="{EFAFB233-063F-42B5-8137-9DF3F51BA10A}">
+      <p15:sldGuideLst xmlns:p15="http://schemas.microsoft.com/office/powerpoint/2012/main">
+        <p15:guide id="1" orient="horz" pos="2160">
+          <p15:clr>
+            <a:srgbClr val="A4A3A4"/>
+          </p15:clr>
+        </p15:guide>
+        <p15:guide id="2" pos="2880">
+          <p15:clr>
+            <a:srgbClr val="A4A3A4"/>
+          </p15:clr>
+        </p15:guide>
+      </p15:sldGuideLst>
+    </p:ext>
+  </p:extLst>
 </p:presentation>
 </file>
 
@@ -162,10 +178,9 @@
           <a:lstStyle/>
           <a:p>
             <a:r>
-              <a:rPr lang="en-US" smtClean="0"/>
+              <a:rPr lang="en-US"/>
               <a:t>Click to edit Master title style</a:t>
             </a:r>
-            <a:endParaRPr lang="en-US"/>
           </a:p>
         </p:txBody>
       </p:sp>
@@ -281,10 +296,9 @@
           </a:lstStyle>
           <a:p>
             <a:r>
-              <a:rPr lang="en-US" smtClean="0"/>
+              <a:rPr lang="en-US"/>
               <a:t>Click to edit Master subtitle style</a:t>
             </a:r>
-            <a:endParaRPr lang="en-US"/>
           </a:p>
         </p:txBody>
       </p:sp>
@@ -305,7 +319,7 @@
           <a:p>
             <a:fld id="{5BCAD085-E8A6-8845-BD4E-CB4CCA059FC4}" type="datetimeFigureOut">
               <a:rPr lang="en-US" smtClean="0"/>
-              <a:t>1/27/13</a:t>
+              <a:t>5/1/26</a:t>
             </a:fld>
             <a:endParaRPr lang="en-US"/>
           </a:p>
@@ -399,10 +413,9 @@
           <a:lstStyle/>
           <a:p>
             <a:r>
-              <a:rPr lang="en-US" smtClean="0"/>
+              <a:rPr lang="en-US"/>
               <a:t>Click to edit Master title style</a:t>
             </a:r>
-            <a:endParaRPr lang="en-US"/>
           </a:p>
         </p:txBody>
       </p:sp>
@@ -423,38 +436,37 @@
           <a:p>
             <a:pPr lvl="0"/>
             <a:r>
-              <a:rPr lang="en-US" smtClean="0"/>
+              <a:rPr lang="en-US"/>
               <a:t>Click to edit Master text styles</a:t>
             </a:r>
           </a:p>
           <a:p>
             <a:pPr lvl="1"/>
             <a:r>
-              <a:rPr lang="en-US" smtClean="0"/>
+              <a:rPr lang="en-US"/>
               <a:t>Second level</a:t>
             </a:r>
           </a:p>
           <a:p>
             <a:pPr lvl="2"/>
             <a:r>
-              <a:rPr lang="en-US" smtClean="0"/>
+              <a:rPr lang="en-US"/>
               <a:t>Third level</a:t>
             </a:r>
           </a:p>
           <a:p>
             <a:pPr lvl="3"/>
             <a:r>
-              <a:rPr lang="en-US" smtClean="0"/>
+              <a:rPr lang="en-US"/>
               <a:t>Fourth level</a:t>
             </a:r>
           </a:p>
           <a:p>
             <a:pPr lvl="4"/>
             <a:r>
-              <a:rPr lang="en-US" smtClean="0"/>
+              <a:rPr lang="en-US"/>
               <a:t>Fifth level</a:t>
             </a:r>
-            <a:endParaRPr lang="en-US"/>
           </a:p>
         </p:txBody>
       </p:sp>
@@ -475,7 +487,7 @@
           <a:p>
             <a:fld id="{5BCAD085-E8A6-8845-BD4E-CB4CCA059FC4}" type="datetimeFigureOut">
               <a:rPr lang="en-US" smtClean="0"/>
-              <a:t>1/27/13</a:t>
+              <a:t>5/1/26</a:t>
             </a:fld>
             <a:endParaRPr lang="en-US"/>
           </a:p>
@@ -574,10 +586,9 @@
           <a:lstStyle/>
           <a:p>
             <a:r>
-              <a:rPr lang="en-US" smtClean="0"/>
+              <a:rPr lang="en-US"/>
               <a:t>Click to edit Master title style</a:t>
             </a:r>
-            <a:endParaRPr lang="en-US"/>
           </a:p>
         </p:txBody>
       </p:sp>
@@ -603,38 +614,37 @@
           <a:p>
             <a:pPr lvl="0"/>
             <a:r>
-              <a:rPr lang="en-US" smtClean="0"/>
+              <a:rPr lang="en-US"/>
               <a:t>Click to edit Master text styles</a:t>
             </a:r>
           </a:p>
           <a:p>
             <a:pPr lvl="1"/>
             <a:r>
-              <a:rPr lang="en-US" smtClean="0"/>
+              <a:rPr lang="en-US"/>
               <a:t>Second level</a:t>
             </a:r>
           </a:p>
           <a:p>
             <a:pPr lvl="2"/>
             <a:r>
-              <a:rPr lang="en-US" smtClean="0"/>
+              <a:rPr lang="en-US"/>
               <a:t>Third level</a:t>
             </a:r>
           </a:p>
           <a:p>
             <a:pPr lvl="3"/>
             <a:r>
-              <a:rPr lang="en-US" smtClean="0"/>
+              <a:rPr lang="en-US"/>
               <a:t>Fourth level</a:t>
             </a:r>
           </a:p>
           <a:p>
             <a:pPr lvl="4"/>
             <a:r>
-              <a:rPr lang="en-US" smtClean="0"/>
+              <a:rPr lang="en-US"/>
               <a:t>Fifth level</a:t>
             </a:r>
-            <a:endParaRPr lang="en-US"/>
           </a:p>
         </p:txBody>
       </p:sp>
@@ -655,7 +665,7 @@
           <a:p>
             <a:fld id="{5BCAD085-E8A6-8845-BD4E-CB4CCA059FC4}" type="datetimeFigureOut">
               <a:rPr lang="en-US" smtClean="0"/>
-              <a:t>1/27/13</a:t>
+              <a:t>5/1/26</a:t>
             </a:fld>
             <a:endParaRPr lang="en-US"/>
           </a:p>
@@ -749,10 +759,9 @@
           <a:lstStyle/>
           <a:p>
             <a:r>
-              <a:rPr lang="en-US" smtClean="0"/>
+              <a:rPr lang="en-US"/>
               <a:t>Click to edit Master title style</a:t>
             </a:r>
-            <a:endParaRPr lang="en-US"/>
           </a:p>
         </p:txBody>
       </p:sp>
@@ -773,38 +782,37 @@
           <a:p>
             <a:pPr lvl="0"/>
             <a:r>
-              <a:rPr lang="en-US" smtClean="0"/>
+              <a:rPr lang="en-US"/>
               <a:t>Click to edit Master text styles</a:t>
             </a:r>
           </a:p>
           <a:p>
             <a:pPr lvl="1"/>
             <a:r>
-              <a:rPr lang="en-US" smtClean="0"/>
+              <a:rPr lang="en-US"/>
               <a:t>Second level</a:t>
             </a:r>
           </a:p>
           <a:p>
             <a:pPr lvl="2"/>
             <a:r>
-              <a:rPr lang="en-US" smtClean="0"/>
+              <a:rPr lang="en-US"/>
               <a:t>Third level</a:t>
             </a:r>
           </a:p>
           <a:p>
             <a:pPr lvl="3"/>
             <a:r>
-              <a:rPr lang="en-US" smtClean="0"/>
+              <a:rPr lang="en-US"/>
               <a:t>Fourth level</a:t>
             </a:r>
           </a:p>
           <a:p>
             <a:pPr lvl="4"/>
             <a:r>
-              <a:rPr lang="en-US" smtClean="0"/>
+              <a:rPr lang="en-US"/>
               <a:t>Fifth level</a:t>
             </a:r>
-            <a:endParaRPr lang="en-US"/>
           </a:p>
         </p:txBody>
       </p:sp>
@@ -825,7 +833,7 @@
           <a:p>
             <a:fld id="{5BCAD085-E8A6-8845-BD4E-CB4CCA059FC4}" type="datetimeFigureOut">
               <a:rPr lang="en-US" smtClean="0"/>
-              <a:t>1/27/13</a:t>
+              <a:t>5/1/26</a:t>
             </a:fld>
             <a:endParaRPr lang="en-US"/>
           </a:p>
@@ -928,10 +936,9 @@
           </a:lstStyle>
           <a:p>
             <a:r>
-              <a:rPr lang="en-US" smtClean="0"/>
+              <a:rPr lang="en-US"/>
               <a:t>Click to edit Master title style</a:t>
             </a:r>
-            <a:endParaRPr lang="en-US"/>
           </a:p>
         </p:txBody>
       </p:sp>
@@ -1048,7 +1055,7 @@
           <a:p>
             <a:pPr lvl="0"/>
             <a:r>
-              <a:rPr lang="en-US" smtClean="0"/>
+              <a:rPr lang="en-US"/>
               <a:t>Click to edit Master text styles</a:t>
             </a:r>
           </a:p>
@@ -1071,7 +1078,7 @@
           <a:p>
             <a:fld id="{5BCAD085-E8A6-8845-BD4E-CB4CCA059FC4}" type="datetimeFigureOut">
               <a:rPr lang="en-US" smtClean="0"/>
-              <a:t>1/27/13</a:t>
+              <a:t>5/1/26</a:t>
             </a:fld>
             <a:endParaRPr lang="en-US"/>
           </a:p>
@@ -1165,10 +1172,9 @@
           <a:lstStyle/>
           <a:p>
             <a:r>
-              <a:rPr lang="en-US" smtClean="0"/>
+              <a:rPr lang="en-US"/>
               <a:t>Click to edit Master title style</a:t>
             </a:r>
-            <a:endParaRPr lang="en-US"/>
           </a:p>
         </p:txBody>
       </p:sp>
@@ -1222,38 +1228,37 @@
           <a:p>
             <a:pPr lvl="0"/>
             <a:r>
-              <a:rPr lang="en-US" smtClean="0"/>
+              <a:rPr lang="en-US"/>
               <a:t>Click to edit Master text styles</a:t>
             </a:r>
           </a:p>
           <a:p>
             <a:pPr lvl="1"/>
             <a:r>
-              <a:rPr lang="en-US" smtClean="0"/>
+              <a:rPr lang="en-US"/>
               <a:t>Second level</a:t>
             </a:r>
           </a:p>
           <a:p>
             <a:pPr lvl="2"/>
             <a:r>
-              <a:rPr lang="en-US" smtClean="0"/>
+              <a:rPr lang="en-US"/>
               <a:t>Third level</a:t>
             </a:r>
           </a:p>
           <a:p>
             <a:pPr lvl="3"/>
             <a:r>
-              <a:rPr lang="en-US" smtClean="0"/>
+              <a:rPr lang="en-US"/>
               <a:t>Fourth level</a:t>
             </a:r>
           </a:p>
           <a:p>
             <a:pPr lvl="4"/>
             <a:r>
-              <a:rPr lang="en-US" smtClean="0"/>
+              <a:rPr lang="en-US"/>
               <a:t>Fifth level</a:t>
             </a:r>
-            <a:endParaRPr lang="en-US"/>
           </a:p>
         </p:txBody>
       </p:sp>
@@ -1307,38 +1312,37 @@
           <a:p>
             <a:pPr lvl="0"/>
             <a:r>
-              <a:rPr lang="en-US" smtClean="0"/>
+              <a:rPr lang="en-US"/>
               <a:t>Click to edit Master text styles</a:t>
             </a:r>
           </a:p>
           <a:p>
             <a:pPr lvl="1"/>
             <a:r>
-              <a:rPr lang="en-US" smtClean="0"/>
+              <a:rPr lang="en-US"/>
               <a:t>Second level</a:t>
             </a:r>
           </a:p>
           <a:p>
             <a:pPr lvl="2"/>
             <a:r>
-              <a:rPr lang="en-US" smtClean="0"/>
+              <a:rPr lang="en-US"/>
               <a:t>Third level</a:t>
             </a:r>
           </a:p>
           <a:p>
             <a:pPr lvl="3"/>
             <a:r>
-              <a:rPr lang="en-US" smtClean="0"/>
+              <a:rPr lang="en-US"/>
               <a:t>Fourth level</a:t>
             </a:r>
           </a:p>
           <a:p>
             <a:pPr lvl="4"/>
             <a:r>
-              <a:rPr lang="en-US" smtClean="0"/>
+              <a:rPr lang="en-US"/>
               <a:t>Fifth level</a:t>
             </a:r>
-            <a:endParaRPr lang="en-US"/>
           </a:p>
         </p:txBody>
       </p:sp>
@@ -1359,7 +1363,7 @@
           <a:p>
             <a:fld id="{5BCAD085-E8A6-8845-BD4E-CB4CCA059FC4}" type="datetimeFigureOut">
               <a:rPr lang="en-US" smtClean="0"/>
-              <a:t>1/27/13</a:t>
+              <a:t>5/1/26</a:t>
             </a:fld>
             <a:endParaRPr lang="en-US"/>
           </a:p>
@@ -1457,10 +1461,9 @@
           </a:lstStyle>
           <a:p>
             <a:r>
-              <a:rPr lang="en-US" smtClean="0"/>
+              <a:rPr lang="en-US"/>
               <a:t>Click to edit Master title style</a:t>
             </a:r>
-            <a:endParaRPr lang="en-US"/>
           </a:p>
         </p:txBody>
       </p:sp>
@@ -1523,7 +1526,7 @@
           <a:p>
             <a:pPr lvl="0"/>
             <a:r>
-              <a:rPr lang="en-US" smtClean="0"/>
+              <a:rPr lang="en-US"/>
               <a:t>Click to edit Master text styles</a:t>
             </a:r>
           </a:p>
@@ -1579,38 +1582,37 @@
           <a:p>
             <a:pPr lvl="0"/>
             <a:r>
-              <a:rPr lang="en-US" smtClean="0"/>
+              <a:rPr lang="en-US"/>
               <a:t>Click to edit Master text styles</a:t>
             </a:r>
           </a:p>
           <a:p>
             <a:pPr lvl="1"/>
             <a:r>
-              <a:rPr lang="en-US" smtClean="0"/>
+              <a:rPr lang="en-US"/>
               <a:t>Second level</a:t>
             </a:r>
           </a:p>
           <a:p>
             <a:pPr lvl="2"/>
             <a:r>
-              <a:rPr lang="en-US" smtClean="0"/>
+              <a:rPr lang="en-US"/>
               <a:t>Third level</a:t>
             </a:r>
           </a:p>
           <a:p>
             <a:pPr lvl="3"/>
             <a:r>
-              <a:rPr lang="en-US" smtClean="0"/>
+              <a:rPr lang="en-US"/>
               <a:t>Fourth level</a:t>
             </a:r>
           </a:p>
           <a:p>
             <a:pPr lvl="4"/>
             <a:r>
-              <a:rPr lang="en-US" smtClean="0"/>
+              <a:rPr lang="en-US"/>
               <a:t>Fifth level</a:t>
             </a:r>
-            <a:endParaRPr lang="en-US"/>
           </a:p>
         </p:txBody>
       </p:sp>
@@ -1673,7 +1675,7 @@
           <a:p>
             <a:pPr lvl="0"/>
             <a:r>
-              <a:rPr lang="en-US" smtClean="0"/>
+              <a:rPr lang="en-US"/>
               <a:t>Click to edit Master text styles</a:t>
             </a:r>
           </a:p>
@@ -1729,38 +1731,37 @@
           <a:p>
             <a:pPr lvl="0"/>
             <a:r>
-              <a:rPr lang="en-US" smtClean="0"/>
+              <a:rPr lang="en-US"/>
               <a:t>Click to edit Master text styles</a:t>
             </a:r>
           </a:p>
           <a:p>
             <a:pPr lvl="1"/>
             <a:r>
-              <a:rPr lang="en-US" smtClean="0"/>
+              <a:rPr lang="en-US"/>
               <a:t>Second level</a:t>
             </a:r>
           </a:p>
           <a:p>
             <a:pPr lvl="2"/>
             <a:r>
-              <a:rPr lang="en-US" smtClean="0"/>
+              <a:rPr lang="en-US"/>
               <a:t>Third level</a:t>
             </a:r>
           </a:p>
           <a:p>
             <a:pPr lvl="3"/>
             <a:r>
-              <a:rPr lang="en-US" smtClean="0"/>
+              <a:rPr lang="en-US"/>
               <a:t>Fourth level</a:t>
             </a:r>
           </a:p>
           <a:p>
             <a:pPr lvl="4"/>
             <a:r>
-              <a:rPr lang="en-US" smtClean="0"/>
+              <a:rPr lang="en-US"/>
               <a:t>Fifth level</a:t>
             </a:r>
-            <a:endParaRPr lang="en-US"/>
           </a:p>
         </p:txBody>
       </p:sp>
@@ -1781,7 +1782,7 @@
           <a:p>
             <a:fld id="{5BCAD085-E8A6-8845-BD4E-CB4CCA059FC4}" type="datetimeFigureOut">
               <a:rPr lang="en-US" smtClean="0"/>
-              <a:t>1/27/13</a:t>
+              <a:t>5/1/26</a:t>
             </a:fld>
             <a:endParaRPr lang="en-US"/>
           </a:p>
@@ -1875,10 +1876,9 @@
           <a:lstStyle/>
           <a:p>
             <a:r>
-              <a:rPr lang="en-US" smtClean="0"/>
+              <a:rPr lang="en-US"/>
               <a:t>Click to edit Master title style</a:t>
             </a:r>
-            <a:endParaRPr lang="en-US"/>
           </a:p>
         </p:txBody>
       </p:sp>
@@ -1899,7 +1899,7 @@
           <a:p>
             <a:fld id="{5BCAD085-E8A6-8845-BD4E-CB4CCA059FC4}" type="datetimeFigureOut">
               <a:rPr lang="en-US" smtClean="0"/>
-              <a:t>1/27/13</a:t>
+              <a:t>5/1/26</a:t>
             </a:fld>
             <a:endParaRPr lang="en-US"/>
           </a:p>
@@ -1994,7 +1994,7 @@
           <a:p>
             <a:fld id="{5BCAD085-E8A6-8845-BD4E-CB4CCA059FC4}" type="datetimeFigureOut">
               <a:rPr lang="en-US" smtClean="0"/>
-              <a:t>1/27/13</a:t>
+              <a:t>5/1/26</a:t>
             </a:fld>
             <a:endParaRPr lang="en-US"/>
           </a:p>
@@ -2097,10 +2097,9 @@
           </a:lstStyle>
           <a:p>
             <a:r>
-              <a:rPr lang="en-US" smtClean="0"/>
+              <a:rPr lang="en-US"/>
               <a:t>Click to edit Master title style</a:t>
             </a:r>
-            <a:endParaRPr lang="en-US"/>
           </a:p>
         </p:txBody>
       </p:sp>
@@ -2154,38 +2153,37 @@
           <a:p>
             <a:pPr lvl="0"/>
             <a:r>
-              <a:rPr lang="en-US" smtClean="0"/>
+              <a:rPr lang="en-US"/>
               <a:t>Click to edit Master text styles</a:t>
             </a:r>
           </a:p>
           <a:p>
             <a:pPr lvl="1"/>
             <a:r>
-              <a:rPr lang="en-US" smtClean="0"/>
+              <a:rPr lang="en-US"/>
               <a:t>Second level</a:t>
             </a:r>
           </a:p>
           <a:p>
             <a:pPr lvl="2"/>
             <a:r>
-              <a:rPr lang="en-US" smtClean="0"/>
+              <a:rPr lang="en-US"/>
               <a:t>Third level</a:t>
             </a:r>
           </a:p>
           <a:p>
             <a:pPr lvl="3"/>
             <a:r>
-              <a:rPr lang="en-US" smtClean="0"/>
+              <a:rPr lang="en-US"/>
               <a:t>Fourth level</a:t>
             </a:r>
           </a:p>
           <a:p>
             <a:pPr lvl="4"/>
             <a:r>
-              <a:rPr lang="en-US" smtClean="0"/>
+              <a:rPr lang="en-US"/>
               <a:t>Fifth level</a:t>
             </a:r>
-            <a:endParaRPr lang="en-US"/>
           </a:p>
         </p:txBody>
       </p:sp>
@@ -2248,7 +2246,7 @@
           <a:p>
             <a:pPr lvl="0"/>
             <a:r>
-              <a:rPr lang="en-US" smtClean="0"/>
+              <a:rPr lang="en-US"/>
               <a:t>Click to edit Master text styles</a:t>
             </a:r>
           </a:p>
@@ -2271,7 +2269,7 @@
           <a:p>
             <a:fld id="{5BCAD085-E8A6-8845-BD4E-CB4CCA059FC4}" type="datetimeFigureOut">
               <a:rPr lang="en-US" smtClean="0"/>
-              <a:t>1/27/13</a:t>
+              <a:t>5/1/26</a:t>
             </a:fld>
             <a:endParaRPr lang="en-US"/>
           </a:p>
@@ -2374,10 +2372,9 @@
           </a:lstStyle>
           <a:p>
             <a:r>
-              <a:rPr lang="en-US" smtClean="0"/>
+              <a:rPr lang="en-US"/>
               <a:t>Click to edit Master title style</a:t>
             </a:r>
-            <a:endParaRPr lang="en-US"/>
           </a:p>
         </p:txBody>
       </p:sp>
@@ -2501,7 +2498,7 @@
           <a:p>
             <a:pPr lvl="0"/>
             <a:r>
-              <a:rPr lang="en-US" smtClean="0"/>
+              <a:rPr lang="en-US"/>
               <a:t>Click to edit Master text styles</a:t>
             </a:r>
           </a:p>
@@ -2524,7 +2521,7 @@
           <a:p>
             <a:fld id="{5BCAD085-E8A6-8845-BD4E-CB4CCA059FC4}" type="datetimeFigureOut">
               <a:rPr lang="en-US" smtClean="0"/>
-              <a:t>1/27/13</a:t>
+              <a:t>5/1/26</a:t>
             </a:fld>
             <a:endParaRPr lang="en-US"/>
           </a:p>
@@ -2633,10 +2630,9 @@
           <a:lstStyle/>
           <a:p>
             <a:r>
-              <a:rPr lang="en-US" smtClean="0"/>
+              <a:rPr lang="en-US"/>
               <a:t>Click to edit Master title style</a:t>
             </a:r>
-            <a:endParaRPr lang="en-US"/>
           </a:p>
         </p:txBody>
       </p:sp>
@@ -2667,38 +2663,37 @@
           <a:p>
             <a:pPr lvl="0"/>
             <a:r>
-              <a:rPr lang="en-US" smtClean="0"/>
+              <a:rPr lang="en-US"/>
               <a:t>Click to edit Master text styles</a:t>
             </a:r>
           </a:p>
           <a:p>
             <a:pPr lvl="1"/>
             <a:r>
-              <a:rPr lang="en-US" smtClean="0"/>
+              <a:rPr lang="en-US"/>
               <a:t>Second level</a:t>
             </a:r>
           </a:p>
           <a:p>
             <a:pPr lvl="2"/>
             <a:r>
-              <a:rPr lang="en-US" smtClean="0"/>
+              <a:rPr lang="en-US"/>
               <a:t>Third level</a:t>
             </a:r>
           </a:p>
           <a:p>
             <a:pPr lvl="3"/>
             <a:r>
-              <a:rPr lang="en-US" smtClean="0"/>
+              <a:rPr lang="en-US"/>
               <a:t>Fourth level</a:t>
             </a:r>
           </a:p>
           <a:p>
             <a:pPr lvl="4"/>
             <a:r>
-              <a:rPr lang="en-US" smtClean="0"/>
+              <a:rPr lang="en-US"/>
               <a:t>Fifth level</a:t>
             </a:r>
-            <a:endParaRPr lang="en-US"/>
           </a:p>
         </p:txBody>
       </p:sp>
@@ -2737,7 +2732,7 @@
           <a:p>
             <a:fld id="{5BCAD085-E8A6-8845-BD4E-CB4CCA059FC4}" type="datetimeFigureOut">
               <a:rPr lang="en-US" smtClean="0"/>
-              <a:t>1/27/13</a:t>
+              <a:t>5/1/26</a:t>
             </a:fld>
             <a:endParaRPr lang="en-US"/>
           </a:p>
@@ -3096,7 +3091,7 @@
 </file>
 
 <file path=ppt/slides/slide1.xml><?xml version="1.0" encoding="utf-8"?>
-<p:sld xmlns:a="http://schemas.openxmlformats.org/drawingml/2006/main" xmlns:p="http://schemas.openxmlformats.org/presentationml/2006/main" xmlns:r="http://schemas.openxmlformats.org/officeDocument/2006/relationships">
+<p:sld xmlns:a="http://schemas.openxmlformats.org/drawingml/2006/main" xmlns:r="http://schemas.openxmlformats.org/officeDocument/2006/relationships" xmlns:p="http://schemas.openxmlformats.org/presentationml/2006/main">
   <p:cSld>
     <p:spTree>
       <p:nvGrpSpPr>
@@ -3104,7 +3099,14 @@
         <p:cNvGrpSpPr/>
         <p:nvPr/>
       </p:nvGrpSpPr>
-      <p:grpSpPr/>
+      <p:grpSpPr>
+        <a:xfrm>
+          <a:off x="0" y="0"/>
+          <a:ext cx="0" cy="0"/>
+          <a:chOff x="0" y="0"/>
+          <a:chExt cx="0" cy="0"/>
+        </a:xfrm>
+      </p:grpSpPr>
       <p:sp>
         <p:nvSpPr>
           <p:cNvPr id="2" name="Rectangle 1"/>
@@ -3113,7 +3115,7 @@
         </p:nvSpPr>
         <p:spPr>
           <a:xfrm>
-            <a:off x="0" y="0"/>
+            <a:off x="0" y="338328"/>
             <a:ext cx="12188952" cy="6858000"/>
           </a:xfrm>
           <a:prstGeom prst="rect">
@@ -3145,6 +3147,7 @@
           <a:lstStyle/>
           <a:p>
             <a:pPr algn="ctr"/>
+            <a:endParaRPr/>
           </a:p>
         </p:txBody>
       </p:sp>
@@ -3188,6 +3191,7 @@
           <a:lstStyle/>
           <a:p>
             <a:pPr algn="ctr"/>
+            <a:endParaRPr/>
           </a:p>
         </p:txBody>
       </p:sp>
@@ -3231,6 +3235,7 @@
           <a:lstStyle/>
           <a:p>
             <a:pPr algn="ctr"/>
+            <a:endParaRPr/>
           </a:p>
         </p:txBody>
       </p:sp>
@@ -3313,22 +3318,22 @@
         <p:spPr>
           <a:xfrm>
             <a:off x="914400" y="4663440"/>
-            <a:ext cx="10360152" cy="1463040"/>
-          </a:xfrm>
-          <a:prstGeom prst="rect">
-            <a:avLst/>
-          </a:prstGeom>
-          <a:noFill/>
-        </p:spPr>
-        <p:txBody>
-          <a:bodyPr wrap="square">
-            <a:spAutoFit/>
-          </a:bodyPr>
-          <a:lstStyle/>
-          <a:p>
-            <a:pPr algn="ctr"/>
-            <a:r>
-              <a:rPr sz="1600" b="0">
+            <a:ext cx="10360152" cy="1077218"/>
+          </a:xfrm>
+          <a:prstGeom prst="rect">
+            <a:avLst/>
+          </a:prstGeom>
+          <a:noFill/>
+        </p:spPr>
+        <p:txBody>
+          <a:bodyPr wrap="square">
+            <a:spAutoFit/>
+          </a:bodyPr>
+          <a:lstStyle/>
+          <a:p>
+            <a:pPr algn="ctr"/>
+            <a:r>
+              <a:rPr sz="1600" b="0" dirty="0">
                 <a:solidFill>
                   <a:srgbClr val="FFFFFF"/>
                 </a:solidFill>
@@ -3337,8 +3342,23 @@
               <a:t>Yingrui Yang
 Supervisor: Prof. Richard Durbin
 Day-to-day: Pio Sierra, Hadi Khan
-Department of Genetics, University of Cambridge  |  2025</a:t>
-            </a:r>
+Department of Genetics, University of Cambridge  |  </a:t>
+            </a:r>
+            <a:r>
+              <a:rPr lang="en-GB" sz="1600" b="0" dirty="0">
+                <a:solidFill>
+                  <a:srgbClr val="FFFFFF"/>
+                </a:solidFill>
+                <a:latin typeface="Calibri"/>
+              </a:rPr>
+              <a:t>2026</a:t>
+            </a:r>
+            <a:endParaRPr sz="1600" b="0" dirty="0">
+              <a:solidFill>
+                <a:srgbClr val="FFFFFF"/>
+              </a:solidFill>
+              <a:latin typeface="Calibri"/>
+            </a:endParaRPr>
           </a:p>
         </p:txBody>
       </p:sp>
@@ -3382,6 +3402,7 @@
           <a:lstStyle/>
           <a:p>
             <a:pPr algn="ctr"/>
+            <a:endParaRPr/>
           </a:p>
         </p:txBody>
       </p:sp>
@@ -3394,7 +3415,7 @@
         <p:spPr>
           <a:xfrm>
             <a:off x="228600" y="6510528"/>
-            <a:ext cx="10515600" cy="310896"/>
+            <a:ext cx="10515600" cy="230832"/>
           </a:xfrm>
           <a:prstGeom prst="rect">
             <a:avLst/>
@@ -3409,14 +3430,29 @@
           <a:p>
             <a:pPr algn="l"/>
             <a:r>
-              <a:rPr sz="900" b="0">
+              <a:rPr sz="900" b="0" dirty="0">
                 <a:solidFill>
                   <a:srgbClr val="FFFFFF"/>
                 </a:solidFill>
                 <a:latin typeface="Calibri"/>
               </a:rPr>
-              <a:t>Machine Learning a TE Classifier  |  Yingrui Yang  |  Cambridge Genetics 2025</a:t>
-            </a:r>
+              <a:t>Machine Learning a TE Classifier  |  Yingrui Yang  |  Cambridge Genetics </a:t>
+            </a:r>
+            <a:r>
+              <a:rPr lang="en-GB" sz="900" b="0" dirty="0">
+                <a:solidFill>
+                  <a:srgbClr val="FFFFFF"/>
+                </a:solidFill>
+                <a:latin typeface="Calibri"/>
+              </a:rPr>
+              <a:t>2026</a:t>
+            </a:r>
+            <a:endParaRPr sz="900" b="0" dirty="0">
+              <a:solidFill>
+                <a:srgbClr val="FFFFFF"/>
+              </a:solidFill>
+              <a:latin typeface="Calibri"/>
+            </a:endParaRPr>
           </a:p>
         </p:txBody>
       </p:sp>
@@ -3464,7 +3500,7 @@
 </file>
 
 <file path=ppt/slides/slide10.xml><?xml version="1.0" encoding="utf-8"?>
-<p:sld xmlns:a="http://schemas.openxmlformats.org/drawingml/2006/main" xmlns:p="http://schemas.openxmlformats.org/presentationml/2006/main" xmlns:r="http://schemas.openxmlformats.org/officeDocument/2006/relationships">
+<p:sld xmlns:a="http://schemas.openxmlformats.org/drawingml/2006/main" xmlns:r="http://schemas.openxmlformats.org/officeDocument/2006/relationships" xmlns:p="http://schemas.openxmlformats.org/presentationml/2006/main">
   <p:cSld>
     <p:spTree>
       <p:nvGrpSpPr>
@@ -3472,7 +3508,14 @@
         <p:cNvGrpSpPr/>
         <p:nvPr/>
       </p:nvGrpSpPr>
-      <p:grpSpPr/>
+      <p:grpSpPr>
+        <a:xfrm>
+          <a:off x="0" y="0"/>
+          <a:ext cx="0" cy="0"/>
+          <a:chOff x="0" y="0"/>
+          <a:chExt cx="0" cy="0"/>
+        </a:xfrm>
+      </p:grpSpPr>
       <p:sp>
         <p:nvSpPr>
           <p:cNvPr id="2" name="Rectangle 1"/>
@@ -3513,6 +3556,7 @@
           <a:lstStyle/>
           <a:p>
             <a:pPr algn="ctr"/>
+            <a:endParaRPr/>
           </a:p>
         </p:txBody>
       </p:sp>
@@ -3626,6 +3670,7 @@
           <a:lstStyle/>
           <a:p>
             <a:pPr algn="ctr"/>
+            <a:endParaRPr/>
           </a:p>
         </p:txBody>
       </p:sp>
@@ -3669,6 +3714,7 @@
           <a:lstStyle/>
           <a:p>
             <a:pPr algn="ctr"/>
+            <a:endParaRPr/>
           </a:p>
         </p:txBody>
       </p:sp>
@@ -3681,7 +3727,7 @@
         <p:spPr>
           <a:xfrm>
             <a:off x="228600" y="6510528"/>
-            <a:ext cx="10515600" cy="310896"/>
+            <a:ext cx="10515600" cy="230832"/>
           </a:xfrm>
           <a:prstGeom prst="rect">
             <a:avLst/>
@@ -3696,14 +3742,29 @@
           <a:p>
             <a:pPr algn="l"/>
             <a:r>
-              <a:rPr sz="900" b="0">
+              <a:rPr sz="900" b="0" dirty="0">
                 <a:solidFill>
                   <a:srgbClr val="FFFFFF"/>
                 </a:solidFill>
                 <a:latin typeface="Calibri"/>
               </a:rPr>
-              <a:t>Machine Learning a TE Classifier  |  Yingrui Yang  |  Cambridge Genetics 2025</a:t>
-            </a:r>
+              <a:t>Machine Learning a TE Classifier  |  Yingrui Yang  |  Cambridge Genetics </a:t>
+            </a:r>
+            <a:r>
+              <a:rPr lang="en-GB" sz="900" b="0" dirty="0">
+                <a:solidFill>
+                  <a:srgbClr val="FFFFFF"/>
+                </a:solidFill>
+                <a:latin typeface="Calibri"/>
+              </a:rPr>
+              <a:t>2026</a:t>
+            </a:r>
+            <a:endParaRPr sz="900" b="0" dirty="0">
+              <a:solidFill>
+                <a:srgbClr val="FFFFFF"/>
+              </a:solidFill>
+              <a:latin typeface="Calibri"/>
+            </a:endParaRPr>
           </a:p>
         </p:txBody>
       </p:sp>
@@ -4086,7 +4147,7 @@
 </file>
 
 <file path=ppt/slides/slide11.xml><?xml version="1.0" encoding="utf-8"?>
-<p:sld xmlns:a="http://schemas.openxmlformats.org/drawingml/2006/main" xmlns:p="http://schemas.openxmlformats.org/presentationml/2006/main" xmlns:r="http://schemas.openxmlformats.org/officeDocument/2006/relationships">
+<p:sld xmlns:a="http://schemas.openxmlformats.org/drawingml/2006/main" xmlns:r="http://schemas.openxmlformats.org/officeDocument/2006/relationships" xmlns:p="http://schemas.openxmlformats.org/presentationml/2006/main">
   <p:cSld>
     <p:spTree>
       <p:nvGrpSpPr>
@@ -4094,7 +4155,14 @@
         <p:cNvGrpSpPr/>
         <p:nvPr/>
       </p:nvGrpSpPr>
-      <p:grpSpPr/>
+      <p:grpSpPr>
+        <a:xfrm>
+          <a:off x="0" y="0"/>
+          <a:ext cx="0" cy="0"/>
+          <a:chOff x="0" y="0"/>
+          <a:chExt cx="0" cy="0"/>
+        </a:xfrm>
+      </p:grpSpPr>
       <p:sp>
         <p:nvSpPr>
           <p:cNvPr id="2" name="Rectangle 1"/>
@@ -4135,6 +4203,7 @@
           <a:lstStyle/>
           <a:p>
             <a:pPr algn="ctr"/>
+            <a:endParaRPr/>
           </a:p>
         </p:txBody>
       </p:sp>
@@ -4248,6 +4317,7 @@
           <a:lstStyle/>
           <a:p>
             <a:pPr algn="ctr"/>
+            <a:endParaRPr/>
           </a:p>
         </p:txBody>
       </p:sp>
@@ -4291,6 +4361,7 @@
           <a:lstStyle/>
           <a:p>
             <a:pPr algn="ctr"/>
+            <a:endParaRPr/>
           </a:p>
         </p:txBody>
       </p:sp>
@@ -4303,7 +4374,7 @@
         <p:spPr>
           <a:xfrm>
             <a:off x="228600" y="6510528"/>
-            <a:ext cx="10515600" cy="310896"/>
+            <a:ext cx="10515600" cy="230832"/>
           </a:xfrm>
           <a:prstGeom prst="rect">
             <a:avLst/>
@@ -4318,14 +4389,29 @@
           <a:p>
             <a:pPr algn="l"/>
             <a:r>
-              <a:rPr sz="900" b="0">
+              <a:rPr sz="900" b="0" dirty="0">
                 <a:solidFill>
                   <a:srgbClr val="FFFFFF"/>
                 </a:solidFill>
                 <a:latin typeface="Calibri"/>
               </a:rPr>
-              <a:t>Machine Learning a TE Classifier  |  Yingrui Yang  |  Cambridge Genetics 2025</a:t>
-            </a:r>
+              <a:t>Machine Learning a TE Classifier  |  Yingrui Yang  |  Cambridge Genetics </a:t>
+            </a:r>
+            <a:r>
+              <a:rPr lang="en-GB" sz="900" b="0" dirty="0">
+                <a:solidFill>
+                  <a:srgbClr val="FFFFFF"/>
+                </a:solidFill>
+                <a:latin typeface="Calibri"/>
+              </a:rPr>
+              <a:t>2026</a:t>
+            </a:r>
+            <a:endParaRPr sz="900" b="0" dirty="0">
+              <a:solidFill>
+                <a:srgbClr val="FFFFFF"/>
+              </a:solidFill>
+              <a:latin typeface="Calibri"/>
+            </a:endParaRPr>
           </a:p>
         </p:txBody>
       </p:sp>
@@ -4439,6 +4525,7 @@
           <a:lstStyle/>
           <a:p>
             <a:pPr algn="ctr"/>
+            <a:endParaRPr/>
           </a:p>
         </p:txBody>
       </p:sp>
@@ -4517,6 +4604,7 @@
           <a:lstStyle/>
           <a:p>
             <a:pPr algn="ctr"/>
+            <a:endParaRPr/>
           </a:p>
         </p:txBody>
       </p:sp>
@@ -4595,6 +4683,7 @@
           <a:lstStyle/>
           <a:p>
             <a:pPr algn="ctr"/>
+            <a:endParaRPr/>
           </a:p>
         </p:txBody>
       </p:sp>
@@ -4673,6 +4762,7 @@
           <a:lstStyle/>
           <a:p>
             <a:pPr algn="ctr"/>
+            <a:endParaRPr/>
           </a:p>
         </p:txBody>
       </p:sp>
@@ -4751,6 +4841,7 @@
           <a:lstStyle/>
           <a:p>
             <a:pPr algn="ctr"/>
+            <a:endParaRPr/>
           </a:p>
         </p:txBody>
       </p:sp>
@@ -4829,6 +4920,7 @@
           <a:lstStyle/>
           <a:p>
             <a:pPr algn="ctr"/>
+            <a:endParaRPr/>
           </a:p>
         </p:txBody>
       </p:sp>
@@ -4907,6 +4999,7 @@
           <a:lstStyle/>
           <a:p>
             <a:pPr algn="ctr"/>
+            <a:endParaRPr/>
           </a:p>
         </p:txBody>
       </p:sp>
@@ -4986,6 +5079,7 @@
           <a:lstStyle/>
           <a:p>
             <a:pPr algn="ctr"/>
+            <a:endParaRPr/>
           </a:p>
         </p:txBody>
       </p:sp>
@@ -5064,6 +5158,7 @@
           <a:lstStyle/>
           <a:p>
             <a:pPr algn="ctr"/>
+            <a:endParaRPr/>
           </a:p>
         </p:txBody>
       </p:sp>
@@ -5142,6 +5237,7 @@
           <a:lstStyle/>
           <a:p>
             <a:pPr algn="ctr"/>
+            <a:endParaRPr/>
           </a:p>
         </p:txBody>
       </p:sp>
@@ -5220,6 +5316,7 @@
           <a:lstStyle/>
           <a:p>
             <a:pPr algn="ctr"/>
+            <a:endParaRPr/>
           </a:p>
         </p:txBody>
       </p:sp>
@@ -5298,6 +5395,7 @@
           <a:lstStyle/>
           <a:p>
             <a:pPr algn="ctr"/>
+            <a:endParaRPr/>
           </a:p>
         </p:txBody>
       </p:sp>
@@ -5376,6 +5474,7 @@
           <a:lstStyle/>
           <a:p>
             <a:pPr algn="ctr"/>
+            <a:endParaRPr/>
           </a:p>
         </p:txBody>
       </p:sp>
@@ -5454,6 +5553,7 @@
           <a:lstStyle/>
           <a:p>
             <a:pPr algn="ctr"/>
+            <a:endParaRPr/>
           </a:p>
         </p:txBody>
       </p:sp>
@@ -5532,6 +5632,7 @@
           <a:lstStyle/>
           <a:p>
             <a:pPr algn="ctr"/>
+            <a:endParaRPr/>
           </a:p>
         </p:txBody>
       </p:sp>
@@ -5610,6 +5711,7 @@
           <a:lstStyle/>
           <a:p>
             <a:pPr algn="ctr"/>
+            <a:endParaRPr/>
           </a:p>
         </p:txBody>
       </p:sp>
@@ -5688,6 +5790,7 @@
           <a:lstStyle/>
           <a:p>
             <a:pPr algn="ctr"/>
+            <a:endParaRPr/>
           </a:p>
         </p:txBody>
       </p:sp>
@@ -5766,6 +5869,7 @@
           <a:lstStyle/>
           <a:p>
             <a:pPr algn="ctr"/>
+            <a:endParaRPr/>
           </a:p>
         </p:txBody>
       </p:sp>
@@ -5844,6 +5948,7 @@
           <a:lstStyle/>
           <a:p>
             <a:pPr algn="ctr"/>
+            <a:endParaRPr/>
           </a:p>
         </p:txBody>
       </p:sp>
@@ -5922,6 +6027,7 @@
           <a:lstStyle/>
           <a:p>
             <a:pPr algn="ctr"/>
+            <a:endParaRPr/>
           </a:p>
         </p:txBody>
       </p:sp>
@@ -6000,6 +6106,7 @@
           <a:lstStyle/>
           <a:p>
             <a:pPr algn="ctr"/>
+            <a:endParaRPr/>
           </a:p>
         </p:txBody>
       </p:sp>
@@ -6078,6 +6185,7 @@
           <a:lstStyle/>
           <a:p>
             <a:pPr algn="ctr"/>
+            <a:endParaRPr/>
           </a:p>
         </p:txBody>
       </p:sp>
@@ -6156,6 +6264,7 @@
           <a:lstStyle/>
           <a:p>
             <a:pPr algn="ctr"/>
+            <a:endParaRPr/>
           </a:p>
         </p:txBody>
       </p:sp>
@@ -6234,6 +6343,7 @@
           <a:lstStyle/>
           <a:p>
             <a:pPr algn="ctr"/>
+            <a:endParaRPr/>
           </a:p>
         </p:txBody>
       </p:sp>
@@ -6312,6 +6422,7 @@
           <a:lstStyle/>
           <a:p>
             <a:pPr algn="ctr"/>
+            <a:endParaRPr/>
           </a:p>
         </p:txBody>
       </p:sp>
@@ -6390,6 +6501,7 @@
           <a:lstStyle/>
           <a:p>
             <a:pPr algn="ctr"/>
+            <a:endParaRPr/>
           </a:p>
         </p:txBody>
       </p:sp>
@@ -6468,6 +6580,7 @@
           <a:lstStyle/>
           <a:p>
             <a:pPr algn="ctr"/>
+            <a:endParaRPr/>
           </a:p>
         </p:txBody>
       </p:sp>
@@ -6546,6 +6659,7 @@
           <a:lstStyle/>
           <a:p>
             <a:pPr algn="ctr"/>
+            <a:endParaRPr/>
           </a:p>
         </p:txBody>
       </p:sp>
@@ -6624,6 +6738,7 @@
           <a:lstStyle/>
           <a:p>
             <a:pPr algn="ctr"/>
+            <a:endParaRPr/>
           </a:p>
         </p:txBody>
       </p:sp>
@@ -6702,6 +6817,7 @@
           <a:lstStyle/>
           <a:p>
             <a:pPr algn="ctr"/>
+            <a:endParaRPr/>
           </a:p>
         </p:txBody>
       </p:sp>
@@ -6780,6 +6896,7 @@
           <a:lstStyle/>
           <a:p>
             <a:pPr algn="ctr"/>
+            <a:endParaRPr/>
           </a:p>
         </p:txBody>
       </p:sp>
@@ -6858,6 +6975,7 @@
           <a:lstStyle/>
           <a:p>
             <a:pPr algn="ctr"/>
+            <a:endParaRPr/>
           </a:p>
         </p:txBody>
       </p:sp>
@@ -6936,6 +7054,7 @@
           <a:lstStyle/>
           <a:p>
             <a:pPr algn="ctr"/>
+            <a:endParaRPr/>
           </a:p>
         </p:txBody>
       </p:sp>
@@ -7014,6 +7133,7 @@
           <a:lstStyle/>
           <a:p>
             <a:pPr algn="ctr"/>
+            <a:endParaRPr/>
           </a:p>
         </p:txBody>
       </p:sp>
@@ -7092,6 +7212,7 @@
           <a:lstStyle/>
           <a:p>
             <a:pPr algn="ctr"/>
+            <a:endParaRPr/>
           </a:p>
         </p:txBody>
       </p:sp>
@@ -7170,6 +7291,7 @@
           <a:lstStyle/>
           <a:p>
             <a:pPr algn="ctr"/>
+            <a:endParaRPr/>
           </a:p>
         </p:txBody>
       </p:sp>
@@ -7259,8 +7381,8 @@
         </p:blipFill>
         <p:spPr>
           <a:xfrm>
-            <a:off x="6903720" y="1298448"/>
-            <a:ext cx="4937760" cy="4389120"/>
+            <a:off x="6931025" y="1947672"/>
+            <a:ext cx="4937760" cy="1847088"/>
           </a:xfrm>
           <a:prstGeom prst="rect">
             <a:avLst/>
@@ -7276,7 +7398,7 @@
 </file>
 
 <file path=ppt/slides/slide12.xml><?xml version="1.0" encoding="utf-8"?>
-<p:sld xmlns:a="http://schemas.openxmlformats.org/drawingml/2006/main" xmlns:p="http://schemas.openxmlformats.org/presentationml/2006/main" xmlns:r="http://schemas.openxmlformats.org/officeDocument/2006/relationships">
+<p:sld xmlns:a="http://schemas.openxmlformats.org/drawingml/2006/main" xmlns:r="http://schemas.openxmlformats.org/officeDocument/2006/relationships" xmlns:p="http://schemas.openxmlformats.org/presentationml/2006/main">
   <p:cSld>
     <p:spTree>
       <p:nvGrpSpPr>
@@ -7284,7 +7406,14 @@
         <p:cNvGrpSpPr/>
         <p:nvPr/>
       </p:nvGrpSpPr>
-      <p:grpSpPr/>
+      <p:grpSpPr>
+        <a:xfrm>
+          <a:off x="0" y="0"/>
+          <a:ext cx="0" cy="0"/>
+          <a:chOff x="0" y="0"/>
+          <a:chExt cx="0" cy="0"/>
+        </a:xfrm>
+      </p:grpSpPr>
       <p:sp>
         <p:nvSpPr>
           <p:cNvPr id="2" name="Rectangle 1"/>
@@ -7325,6 +7454,7 @@
           <a:lstStyle/>
           <a:p>
             <a:pPr algn="ctr"/>
+            <a:endParaRPr/>
           </a:p>
         </p:txBody>
       </p:sp>
@@ -7438,6 +7568,7 @@
           <a:lstStyle/>
           <a:p>
             <a:pPr algn="ctr"/>
+            <a:endParaRPr/>
           </a:p>
         </p:txBody>
       </p:sp>
@@ -7481,6 +7612,7 @@
           <a:lstStyle/>
           <a:p>
             <a:pPr algn="ctr"/>
+            <a:endParaRPr/>
           </a:p>
         </p:txBody>
       </p:sp>
@@ -7493,7 +7625,7 @@
         <p:spPr>
           <a:xfrm>
             <a:off x="228600" y="6510528"/>
-            <a:ext cx="10515600" cy="310896"/>
+            <a:ext cx="10515600" cy="230832"/>
           </a:xfrm>
           <a:prstGeom prst="rect">
             <a:avLst/>
@@ -7508,14 +7640,29 @@
           <a:p>
             <a:pPr algn="l"/>
             <a:r>
-              <a:rPr sz="900" b="0">
+              <a:rPr sz="900" b="0" dirty="0">
                 <a:solidFill>
                   <a:srgbClr val="FFFFFF"/>
                 </a:solidFill>
                 <a:latin typeface="Calibri"/>
               </a:rPr>
-              <a:t>Machine Learning a TE Classifier  |  Yingrui Yang  |  Cambridge Genetics 2025</a:t>
-            </a:r>
+              <a:t>Machine Learning a TE Classifier  |  Yingrui Yang  |  Cambridge Genetics </a:t>
+            </a:r>
+            <a:r>
+              <a:rPr lang="en-GB" sz="900" b="0" dirty="0">
+                <a:solidFill>
+                  <a:srgbClr val="FFFFFF"/>
+                </a:solidFill>
+                <a:latin typeface="Calibri"/>
+              </a:rPr>
+              <a:t>2026</a:t>
+            </a:r>
+            <a:endParaRPr sz="900" b="0" dirty="0">
+              <a:solidFill>
+                <a:srgbClr val="FFFFFF"/>
+              </a:solidFill>
+              <a:latin typeface="Calibri"/>
+            </a:endParaRPr>
           </a:p>
         </p:txBody>
       </p:sp>
@@ -7629,6 +7776,7 @@
           <a:lstStyle/>
           <a:p>
             <a:pPr algn="ctr"/>
+            <a:endParaRPr/>
           </a:p>
         </p:txBody>
       </p:sp>
@@ -7707,6 +7855,7 @@
           <a:lstStyle/>
           <a:p>
             <a:pPr algn="ctr"/>
+            <a:endParaRPr/>
           </a:p>
         </p:txBody>
       </p:sp>
@@ -7785,6 +7934,7 @@
           <a:lstStyle/>
           <a:p>
             <a:pPr algn="ctr"/>
+            <a:endParaRPr/>
           </a:p>
         </p:txBody>
       </p:sp>
@@ -7863,6 +8013,7 @@
           <a:lstStyle/>
           <a:p>
             <a:pPr algn="ctr"/>
+            <a:endParaRPr/>
           </a:p>
         </p:txBody>
       </p:sp>
@@ -7941,6 +8092,7 @@
           <a:lstStyle/>
           <a:p>
             <a:pPr algn="ctr"/>
+            <a:endParaRPr/>
           </a:p>
         </p:txBody>
       </p:sp>
@@ -8019,6 +8171,7 @@
           <a:lstStyle/>
           <a:p>
             <a:pPr algn="ctr"/>
+            <a:endParaRPr/>
           </a:p>
         </p:txBody>
       </p:sp>
@@ -8097,6 +8250,7 @@
           <a:lstStyle/>
           <a:p>
             <a:pPr algn="ctr"/>
+            <a:endParaRPr/>
           </a:p>
         </p:txBody>
       </p:sp>
@@ -8175,6 +8329,7 @@
           <a:lstStyle/>
           <a:p>
             <a:pPr algn="ctr"/>
+            <a:endParaRPr/>
           </a:p>
         </p:txBody>
       </p:sp>
@@ -8253,6 +8408,7 @@
           <a:lstStyle/>
           <a:p>
             <a:pPr algn="ctr"/>
+            <a:endParaRPr/>
           </a:p>
         </p:txBody>
       </p:sp>
@@ -8331,6 +8487,7 @@
           <a:lstStyle/>
           <a:p>
             <a:pPr algn="ctr"/>
+            <a:endParaRPr/>
           </a:p>
         </p:txBody>
       </p:sp>
@@ -8409,6 +8566,7 @@
           <a:lstStyle/>
           <a:p>
             <a:pPr algn="ctr"/>
+            <a:endParaRPr/>
           </a:p>
         </p:txBody>
       </p:sp>
@@ -8487,6 +8645,7 @@
           <a:lstStyle/>
           <a:p>
             <a:pPr algn="ctr"/>
+            <a:endParaRPr/>
           </a:p>
         </p:txBody>
       </p:sp>
@@ -8565,6 +8724,7 @@
           <a:lstStyle/>
           <a:p>
             <a:pPr algn="ctr"/>
+            <a:endParaRPr/>
           </a:p>
         </p:txBody>
       </p:sp>
@@ -8643,6 +8803,7 @@
           <a:lstStyle/>
           <a:p>
             <a:pPr algn="ctr"/>
+            <a:endParaRPr/>
           </a:p>
         </p:txBody>
       </p:sp>
@@ -8721,6 +8882,7 @@
           <a:lstStyle/>
           <a:p>
             <a:pPr algn="ctr"/>
+            <a:endParaRPr/>
           </a:p>
         </p:txBody>
       </p:sp>
@@ -8799,6 +8961,7 @@
           <a:lstStyle/>
           <a:p>
             <a:pPr algn="ctr"/>
+            <a:endParaRPr/>
           </a:p>
         </p:txBody>
       </p:sp>
@@ -8877,6 +9040,7 @@
           <a:lstStyle/>
           <a:p>
             <a:pPr algn="ctr"/>
+            <a:endParaRPr/>
           </a:p>
         </p:txBody>
       </p:sp>
@@ -8955,6 +9119,7 @@
           <a:lstStyle/>
           <a:p>
             <a:pPr algn="ctr"/>
+            <a:endParaRPr/>
           </a:p>
         </p:txBody>
       </p:sp>
@@ -9033,6 +9198,7 @@
           <a:lstStyle/>
           <a:p>
             <a:pPr algn="ctr"/>
+            <a:endParaRPr/>
           </a:p>
         </p:txBody>
       </p:sp>
@@ -9111,6 +9277,7 @@
           <a:lstStyle/>
           <a:p>
             <a:pPr algn="ctr"/>
+            <a:endParaRPr/>
           </a:p>
         </p:txBody>
       </p:sp>
@@ -9224,6 +9391,7 @@
           <a:lstStyle/>
           <a:p>
             <a:pPr algn="ctr"/>
+            <a:endParaRPr/>
           </a:p>
         </p:txBody>
       </p:sp>
@@ -9302,6 +9470,7 @@
           <a:lstStyle/>
           <a:p>
             <a:pPr algn="ctr"/>
+            <a:endParaRPr/>
           </a:p>
         </p:txBody>
       </p:sp>
@@ -9380,6 +9549,7 @@
           <a:lstStyle/>
           <a:p>
             <a:pPr algn="ctr"/>
+            <a:endParaRPr/>
           </a:p>
         </p:txBody>
       </p:sp>
@@ -9458,6 +9628,7 @@
           <a:lstStyle/>
           <a:p>
             <a:pPr algn="ctr"/>
+            <a:endParaRPr/>
           </a:p>
         </p:txBody>
       </p:sp>
@@ -9536,6 +9707,7 @@
           <a:lstStyle/>
           <a:p>
             <a:pPr algn="ctr"/>
+            <a:endParaRPr/>
           </a:p>
         </p:txBody>
       </p:sp>
@@ -9614,6 +9786,7 @@
           <a:lstStyle/>
           <a:p>
             <a:pPr algn="ctr"/>
+            <a:endParaRPr/>
           </a:p>
         </p:txBody>
       </p:sp>
@@ -9692,6 +9865,7 @@
           <a:lstStyle/>
           <a:p>
             <a:pPr algn="ctr"/>
+            <a:endParaRPr/>
           </a:p>
         </p:txBody>
       </p:sp>
@@ -9770,6 +9944,7 @@
           <a:lstStyle/>
           <a:p>
             <a:pPr algn="ctr"/>
+            <a:endParaRPr/>
           </a:p>
         </p:txBody>
       </p:sp>
@@ -9848,6 +10023,7 @@
           <a:lstStyle/>
           <a:p>
             <a:pPr algn="ctr"/>
+            <a:endParaRPr/>
           </a:p>
         </p:txBody>
       </p:sp>
@@ -9926,6 +10102,7 @@
           <a:lstStyle/>
           <a:p>
             <a:pPr algn="ctr"/>
+            <a:endParaRPr/>
           </a:p>
         </p:txBody>
       </p:sp>
@@ -10004,6 +10181,7 @@
           <a:lstStyle/>
           <a:p>
             <a:pPr algn="ctr"/>
+            <a:endParaRPr/>
           </a:p>
         </p:txBody>
       </p:sp>
@@ -10082,6 +10260,7 @@
           <a:lstStyle/>
           <a:p>
             <a:pPr algn="ctr"/>
+            <a:endParaRPr/>
           </a:p>
         </p:txBody>
       </p:sp>
@@ -10160,6 +10339,7 @@
           <a:lstStyle/>
           <a:p>
             <a:pPr algn="ctr"/>
+            <a:endParaRPr/>
           </a:p>
         </p:txBody>
       </p:sp>
@@ -10238,6 +10418,7 @@
           <a:lstStyle/>
           <a:p>
             <a:pPr algn="ctr"/>
+            <a:endParaRPr/>
           </a:p>
         </p:txBody>
       </p:sp>
@@ -10316,6 +10497,7 @@
           <a:lstStyle/>
           <a:p>
             <a:pPr algn="ctr"/>
+            <a:endParaRPr/>
           </a:p>
         </p:txBody>
       </p:sp>
@@ -10394,6 +10576,7 @@
           <a:lstStyle/>
           <a:p>
             <a:pPr algn="ctr"/>
+            <a:endParaRPr/>
           </a:p>
         </p:txBody>
       </p:sp>
@@ -10472,6 +10655,7 @@
           <a:lstStyle/>
           <a:p>
             <a:pPr algn="ctr"/>
+            <a:endParaRPr/>
           </a:p>
         </p:txBody>
       </p:sp>
@@ -10550,6 +10734,7 @@
           <a:lstStyle/>
           <a:p>
             <a:pPr algn="ctr"/>
+            <a:endParaRPr/>
           </a:p>
         </p:txBody>
       </p:sp>
@@ -10628,6 +10813,7 @@
           <a:lstStyle/>
           <a:p>
             <a:pPr algn="ctr"/>
+            <a:endParaRPr/>
           </a:p>
         </p:txBody>
       </p:sp>
@@ -10706,6 +10892,7 @@
           <a:lstStyle/>
           <a:p>
             <a:pPr algn="ctr"/>
+            <a:endParaRPr/>
           </a:p>
         </p:txBody>
       </p:sp>
@@ -10784,6 +10971,7 @@
           <a:lstStyle/>
           <a:p>
             <a:pPr algn="ctr"/>
+            <a:endParaRPr/>
           </a:p>
         </p:txBody>
       </p:sp>
@@ -10862,6 +11050,7 @@
           <a:lstStyle/>
           <a:p>
             <a:pPr algn="ctr"/>
+            <a:endParaRPr/>
           </a:p>
         </p:txBody>
       </p:sp>
@@ -10940,6 +11129,7 @@
           <a:lstStyle/>
           <a:p>
             <a:pPr algn="ctr"/>
+            <a:endParaRPr/>
           </a:p>
         </p:txBody>
       </p:sp>
@@ -11018,6 +11208,7 @@
           <a:lstStyle/>
           <a:p>
             <a:pPr algn="ctr"/>
+            <a:endParaRPr/>
           </a:p>
         </p:txBody>
       </p:sp>
@@ -11096,6 +11287,7 @@
           <a:lstStyle/>
           <a:p>
             <a:pPr algn="ctr"/>
+            <a:endParaRPr/>
           </a:p>
         </p:txBody>
       </p:sp>
@@ -11174,6 +11366,7 @@
           <a:lstStyle/>
           <a:p>
             <a:pPr algn="ctr"/>
+            <a:endParaRPr/>
           </a:p>
         </p:txBody>
       </p:sp>
@@ -11252,6 +11445,7 @@
           <a:lstStyle/>
           <a:p>
             <a:pPr algn="ctr"/>
+            <a:endParaRPr/>
           </a:p>
         </p:txBody>
       </p:sp>
@@ -11341,8 +11535,8 @@
         </p:blipFill>
         <p:spPr>
           <a:xfrm>
-            <a:off x="8321040" y="1298448"/>
-            <a:ext cx="3566160" cy="4663440"/>
+            <a:off x="7287216" y="1409239"/>
+            <a:ext cx="4316818" cy="1881538"/>
           </a:xfrm>
           <a:prstGeom prst="rect">
             <a:avLst/>
@@ -11358,7 +11552,7 @@
 </file>
 
 <file path=ppt/slides/slide13.xml><?xml version="1.0" encoding="utf-8"?>
-<p:sld xmlns:a="http://schemas.openxmlformats.org/drawingml/2006/main" xmlns:p="http://schemas.openxmlformats.org/presentationml/2006/main" xmlns:r="http://schemas.openxmlformats.org/officeDocument/2006/relationships">
+<p:sld xmlns:a="http://schemas.openxmlformats.org/drawingml/2006/main" xmlns:r="http://schemas.openxmlformats.org/officeDocument/2006/relationships" xmlns:p="http://schemas.openxmlformats.org/presentationml/2006/main">
   <p:cSld>
     <p:spTree>
       <p:nvGrpSpPr>
@@ -11366,7 +11560,14 @@
         <p:cNvGrpSpPr/>
         <p:nvPr/>
       </p:nvGrpSpPr>
-      <p:grpSpPr/>
+      <p:grpSpPr>
+        <a:xfrm>
+          <a:off x="0" y="0"/>
+          <a:ext cx="0" cy="0"/>
+          <a:chOff x="0" y="0"/>
+          <a:chExt cx="0" cy="0"/>
+        </a:xfrm>
+      </p:grpSpPr>
       <p:sp>
         <p:nvSpPr>
           <p:cNvPr id="2" name="Rectangle 1"/>
@@ -11407,6 +11608,7 @@
           <a:lstStyle/>
           <a:p>
             <a:pPr algn="ctr"/>
+            <a:endParaRPr/>
           </a:p>
         </p:txBody>
       </p:sp>
@@ -11520,6 +11722,7 @@
           <a:lstStyle/>
           <a:p>
             <a:pPr algn="ctr"/>
+            <a:endParaRPr/>
           </a:p>
         </p:txBody>
       </p:sp>
@@ -11563,6 +11766,7 @@
           <a:lstStyle/>
           <a:p>
             <a:pPr algn="ctr"/>
+            <a:endParaRPr/>
           </a:p>
         </p:txBody>
       </p:sp>
@@ -11575,7 +11779,7 @@
         <p:spPr>
           <a:xfrm>
             <a:off x="228600" y="6510528"/>
-            <a:ext cx="10515600" cy="310896"/>
+            <a:ext cx="10515600" cy="230832"/>
           </a:xfrm>
           <a:prstGeom prst="rect">
             <a:avLst/>
@@ -11590,14 +11794,29 @@
           <a:p>
             <a:pPr algn="l"/>
             <a:r>
-              <a:rPr sz="900" b="0">
+              <a:rPr sz="900" b="0" dirty="0">
                 <a:solidFill>
                   <a:srgbClr val="FFFFFF"/>
                 </a:solidFill>
                 <a:latin typeface="Calibri"/>
               </a:rPr>
-              <a:t>Machine Learning a TE Classifier  |  Yingrui Yang  |  Cambridge Genetics 2025</a:t>
-            </a:r>
+              <a:t>Machine Learning a TE Classifier  |  Yingrui Yang  |  Cambridge Genetics </a:t>
+            </a:r>
+            <a:r>
+              <a:rPr lang="en-GB" sz="900" b="0" dirty="0">
+                <a:solidFill>
+                  <a:srgbClr val="FFFFFF"/>
+                </a:solidFill>
+                <a:latin typeface="Calibri"/>
+              </a:rPr>
+              <a:t>2026</a:t>
+            </a:r>
+            <a:endParaRPr sz="900" b="0" dirty="0">
+              <a:solidFill>
+                <a:srgbClr val="FFFFFF"/>
+              </a:solidFill>
+              <a:latin typeface="Calibri"/>
+            </a:endParaRPr>
           </a:p>
         </p:txBody>
       </p:sp>
@@ -11921,7 +12140,7 @@
 </file>
 
 <file path=ppt/slides/slide14.xml><?xml version="1.0" encoding="utf-8"?>
-<p:sld xmlns:a="http://schemas.openxmlformats.org/drawingml/2006/main" xmlns:p="http://schemas.openxmlformats.org/presentationml/2006/main" xmlns:r="http://schemas.openxmlformats.org/officeDocument/2006/relationships">
+<p:sld xmlns:a="http://schemas.openxmlformats.org/drawingml/2006/main" xmlns:r="http://schemas.openxmlformats.org/officeDocument/2006/relationships" xmlns:p="http://schemas.openxmlformats.org/presentationml/2006/main">
   <p:cSld>
     <p:spTree>
       <p:nvGrpSpPr>
@@ -11929,7 +12148,14 @@
         <p:cNvGrpSpPr/>
         <p:nvPr/>
       </p:nvGrpSpPr>
-      <p:grpSpPr/>
+      <p:grpSpPr>
+        <a:xfrm>
+          <a:off x="0" y="0"/>
+          <a:ext cx="0" cy="0"/>
+          <a:chOff x="0" y="0"/>
+          <a:chExt cx="0" cy="0"/>
+        </a:xfrm>
+      </p:grpSpPr>
       <p:sp>
         <p:nvSpPr>
           <p:cNvPr id="2" name="Rectangle 1"/>
@@ -11970,6 +12196,7 @@
           <a:lstStyle/>
           <a:p>
             <a:pPr algn="ctr"/>
+            <a:endParaRPr/>
           </a:p>
         </p:txBody>
       </p:sp>
@@ -12083,6 +12310,7 @@
           <a:lstStyle/>
           <a:p>
             <a:pPr algn="ctr"/>
+            <a:endParaRPr/>
           </a:p>
         </p:txBody>
       </p:sp>
@@ -12126,6 +12354,7 @@
           <a:lstStyle/>
           <a:p>
             <a:pPr algn="ctr"/>
+            <a:endParaRPr/>
           </a:p>
         </p:txBody>
       </p:sp>
@@ -12138,7 +12367,7 @@
         <p:spPr>
           <a:xfrm>
             <a:off x="228600" y="6510528"/>
-            <a:ext cx="10515600" cy="310896"/>
+            <a:ext cx="10515600" cy="230832"/>
           </a:xfrm>
           <a:prstGeom prst="rect">
             <a:avLst/>
@@ -12153,14 +12382,29 @@
           <a:p>
             <a:pPr algn="l"/>
             <a:r>
-              <a:rPr sz="900" b="0">
+              <a:rPr sz="900" b="0" dirty="0">
                 <a:solidFill>
                   <a:srgbClr val="FFFFFF"/>
                 </a:solidFill>
                 <a:latin typeface="Calibri"/>
               </a:rPr>
-              <a:t>Machine Learning a TE Classifier  |  Yingrui Yang  |  Cambridge Genetics 2025</a:t>
-            </a:r>
+              <a:t>Machine Learning a TE Classifier  |  Yingrui Yang  |  Cambridge Genetics </a:t>
+            </a:r>
+            <a:r>
+              <a:rPr lang="en-GB" sz="900" b="0" dirty="0">
+                <a:solidFill>
+                  <a:srgbClr val="FFFFFF"/>
+                </a:solidFill>
+                <a:latin typeface="Calibri"/>
+              </a:rPr>
+              <a:t>2026</a:t>
+            </a:r>
+            <a:endParaRPr sz="900" b="0" dirty="0">
+              <a:solidFill>
+                <a:srgbClr val="FFFFFF"/>
+              </a:solidFill>
+              <a:latin typeface="Calibri"/>
+            </a:endParaRPr>
           </a:p>
         </p:txBody>
       </p:sp>
@@ -12465,7 +12709,7 @@
 </file>
 
 <file path=ppt/slides/slide15.xml><?xml version="1.0" encoding="utf-8"?>
-<p:sld xmlns:a="http://schemas.openxmlformats.org/drawingml/2006/main" xmlns:p="http://schemas.openxmlformats.org/presentationml/2006/main" xmlns:r="http://schemas.openxmlformats.org/officeDocument/2006/relationships">
+<p:sld xmlns:a="http://schemas.openxmlformats.org/drawingml/2006/main" xmlns:r="http://schemas.openxmlformats.org/officeDocument/2006/relationships" xmlns:p="http://schemas.openxmlformats.org/presentationml/2006/main">
   <p:cSld>
     <p:spTree>
       <p:nvGrpSpPr>
@@ -12473,7 +12717,14 @@
         <p:cNvGrpSpPr/>
         <p:nvPr/>
       </p:nvGrpSpPr>
-      <p:grpSpPr/>
+      <p:grpSpPr>
+        <a:xfrm>
+          <a:off x="0" y="0"/>
+          <a:ext cx="0" cy="0"/>
+          <a:chOff x="0" y="0"/>
+          <a:chExt cx="0" cy="0"/>
+        </a:xfrm>
+      </p:grpSpPr>
       <p:sp>
         <p:nvSpPr>
           <p:cNvPr id="2" name="Rectangle 1"/>
@@ -12514,6 +12765,7 @@
           <a:lstStyle/>
           <a:p>
             <a:pPr algn="ctr"/>
+            <a:endParaRPr/>
           </a:p>
         </p:txBody>
       </p:sp>
@@ -12627,6 +12879,7 @@
           <a:lstStyle/>
           <a:p>
             <a:pPr algn="ctr"/>
+            <a:endParaRPr/>
           </a:p>
         </p:txBody>
       </p:sp>
@@ -12670,6 +12923,7 @@
           <a:lstStyle/>
           <a:p>
             <a:pPr algn="ctr"/>
+            <a:endParaRPr/>
           </a:p>
         </p:txBody>
       </p:sp>
@@ -12682,7 +12936,7 @@
         <p:spPr>
           <a:xfrm>
             <a:off x="228600" y="6510528"/>
-            <a:ext cx="10515600" cy="310896"/>
+            <a:ext cx="10515600" cy="230832"/>
           </a:xfrm>
           <a:prstGeom prst="rect">
             <a:avLst/>
@@ -12697,14 +12951,29 @@
           <a:p>
             <a:pPr algn="l"/>
             <a:r>
-              <a:rPr sz="900" b="0">
+              <a:rPr sz="900" b="0" dirty="0">
                 <a:solidFill>
                   <a:srgbClr val="FFFFFF"/>
                 </a:solidFill>
                 <a:latin typeface="Calibri"/>
               </a:rPr>
-              <a:t>Machine Learning a TE Classifier  |  Yingrui Yang  |  Cambridge Genetics 2025</a:t>
-            </a:r>
+              <a:t>Machine Learning a TE Classifier  |  Yingrui Yang  |  Cambridge Genetics </a:t>
+            </a:r>
+            <a:r>
+              <a:rPr lang="en-GB" sz="900" b="0" dirty="0">
+                <a:solidFill>
+                  <a:srgbClr val="FFFFFF"/>
+                </a:solidFill>
+                <a:latin typeface="Calibri"/>
+              </a:rPr>
+              <a:t>2026</a:t>
+            </a:r>
+            <a:endParaRPr sz="900" b="0" dirty="0">
+              <a:solidFill>
+                <a:srgbClr val="FFFFFF"/>
+              </a:solidFill>
+              <a:latin typeface="Calibri"/>
+            </a:endParaRPr>
           </a:p>
         </p:txBody>
       </p:sp>
@@ -13033,7 +13302,7 @@
 </file>
 
 <file path=ppt/slides/slide16.xml><?xml version="1.0" encoding="utf-8"?>
-<p:sld xmlns:a="http://schemas.openxmlformats.org/drawingml/2006/main" xmlns:p="http://schemas.openxmlformats.org/presentationml/2006/main" xmlns:r="http://schemas.openxmlformats.org/officeDocument/2006/relationships">
+<p:sld xmlns:a="http://schemas.openxmlformats.org/drawingml/2006/main" xmlns:r="http://schemas.openxmlformats.org/officeDocument/2006/relationships" xmlns:p="http://schemas.openxmlformats.org/presentationml/2006/main">
   <p:cSld>
     <p:spTree>
       <p:nvGrpSpPr>
@@ -13041,7 +13310,14 @@
         <p:cNvGrpSpPr/>
         <p:nvPr/>
       </p:nvGrpSpPr>
-      <p:grpSpPr/>
+      <p:grpSpPr>
+        <a:xfrm>
+          <a:off x="0" y="0"/>
+          <a:ext cx="0" cy="0"/>
+          <a:chOff x="0" y="0"/>
+          <a:chExt cx="0" cy="0"/>
+        </a:xfrm>
+      </p:grpSpPr>
       <p:sp>
         <p:nvSpPr>
           <p:cNvPr id="2" name="Rectangle 1"/>
@@ -13082,6 +13358,7 @@
           <a:lstStyle/>
           <a:p>
             <a:pPr algn="ctr"/>
+            <a:endParaRPr/>
           </a:p>
         </p:txBody>
       </p:sp>
@@ -13160,6 +13437,7 @@
           <a:lstStyle/>
           <a:p>
             <a:pPr algn="ctr"/>
+            <a:endParaRPr/>
           </a:p>
         </p:txBody>
       </p:sp>
@@ -13203,6 +13481,7 @@
           <a:lstStyle/>
           <a:p>
             <a:pPr algn="ctr"/>
+            <a:endParaRPr/>
           </a:p>
         </p:txBody>
       </p:sp>
@@ -13215,7 +13494,7 @@
         <p:spPr>
           <a:xfrm>
             <a:off x="228600" y="6510528"/>
-            <a:ext cx="10515600" cy="310896"/>
+            <a:ext cx="10515600" cy="230832"/>
           </a:xfrm>
           <a:prstGeom prst="rect">
             <a:avLst/>
@@ -13230,14 +13509,29 @@
           <a:p>
             <a:pPr algn="l"/>
             <a:r>
-              <a:rPr sz="900" b="0">
+              <a:rPr sz="900" b="0" dirty="0">
                 <a:solidFill>
                   <a:srgbClr val="FFFFFF"/>
                 </a:solidFill>
                 <a:latin typeface="Calibri"/>
               </a:rPr>
-              <a:t>Machine Learning a TE Classifier  |  Yingrui Yang  |  Cambridge Genetics 2025</a:t>
-            </a:r>
+              <a:t>Machine Learning a TE Classifier  |  Yingrui Yang  |  Cambridge Genetics </a:t>
+            </a:r>
+            <a:r>
+              <a:rPr lang="en-GB" sz="900" b="0" dirty="0">
+                <a:solidFill>
+                  <a:srgbClr val="FFFFFF"/>
+                </a:solidFill>
+                <a:latin typeface="Calibri"/>
+              </a:rPr>
+              <a:t>2026</a:t>
+            </a:r>
+            <a:endParaRPr sz="900" b="0" dirty="0">
+              <a:solidFill>
+                <a:srgbClr val="FFFFFF"/>
+              </a:solidFill>
+              <a:latin typeface="Calibri"/>
+            </a:endParaRPr>
           </a:p>
         </p:txBody>
       </p:sp>
@@ -13316,6 +13610,7 @@
           <a:lstStyle/>
           <a:p>
             <a:pPr algn="ctr"/>
+            <a:endParaRPr/>
           </a:p>
         </p:txBody>
       </p:sp>
@@ -13429,6 +13724,7 @@
           <a:lstStyle/>
           <a:p>
             <a:pPr algn="ctr"/>
+            <a:endParaRPr/>
           </a:p>
         </p:txBody>
       </p:sp>
@@ -13542,6 +13838,7 @@
           <a:lstStyle/>
           <a:p>
             <a:pPr algn="ctr"/>
+            <a:endParaRPr/>
           </a:p>
         </p:txBody>
       </p:sp>
@@ -13655,6 +13952,7 @@
           <a:lstStyle/>
           <a:p>
             <a:pPr algn="ctr"/>
+            <a:endParaRPr/>
           </a:p>
         </p:txBody>
       </p:sp>
@@ -13737,7 +14035,7 @@
 </file>
 
 <file path=ppt/slides/slide17.xml><?xml version="1.0" encoding="utf-8"?>
-<p:sld xmlns:a="http://schemas.openxmlformats.org/drawingml/2006/main" xmlns:p="http://schemas.openxmlformats.org/presentationml/2006/main" xmlns:r="http://schemas.openxmlformats.org/officeDocument/2006/relationships">
+<p:sld xmlns:a="http://schemas.openxmlformats.org/drawingml/2006/main" xmlns:r="http://schemas.openxmlformats.org/officeDocument/2006/relationships" xmlns:p="http://schemas.openxmlformats.org/presentationml/2006/main">
   <p:cSld>
     <p:spTree>
       <p:nvGrpSpPr>
@@ -13745,7 +14043,14 @@
         <p:cNvGrpSpPr/>
         <p:nvPr/>
       </p:nvGrpSpPr>
-      <p:grpSpPr/>
+      <p:grpSpPr>
+        <a:xfrm>
+          <a:off x="0" y="0"/>
+          <a:ext cx="0" cy="0"/>
+          <a:chOff x="0" y="0"/>
+          <a:chExt cx="0" cy="0"/>
+        </a:xfrm>
+      </p:grpSpPr>
       <p:sp>
         <p:nvSpPr>
           <p:cNvPr id="2" name="Rectangle 1"/>
@@ -13786,6 +14091,7 @@
           <a:lstStyle/>
           <a:p>
             <a:pPr algn="ctr"/>
+            <a:endParaRPr/>
           </a:p>
         </p:txBody>
       </p:sp>
@@ -13864,6 +14170,7 @@
           <a:lstStyle/>
           <a:p>
             <a:pPr algn="ctr"/>
+            <a:endParaRPr/>
           </a:p>
         </p:txBody>
       </p:sp>
@@ -13907,6 +14214,7 @@
           <a:lstStyle/>
           <a:p>
             <a:pPr algn="ctr"/>
+            <a:endParaRPr/>
           </a:p>
         </p:txBody>
       </p:sp>
@@ -13919,7 +14227,7 @@
         <p:spPr>
           <a:xfrm>
             <a:off x="228600" y="6510528"/>
-            <a:ext cx="10515600" cy="310896"/>
+            <a:ext cx="10515600" cy="230832"/>
           </a:xfrm>
           <a:prstGeom prst="rect">
             <a:avLst/>
@@ -13934,14 +14242,29 @@
           <a:p>
             <a:pPr algn="l"/>
             <a:r>
-              <a:rPr sz="900" b="0">
+              <a:rPr sz="900" b="0" dirty="0">
                 <a:solidFill>
                   <a:srgbClr val="FFFFFF"/>
                 </a:solidFill>
                 <a:latin typeface="Calibri"/>
               </a:rPr>
-              <a:t>Machine Learning a TE Classifier  |  Yingrui Yang  |  Cambridge Genetics 2025</a:t>
-            </a:r>
+              <a:t>Machine Learning a TE Classifier  |  Yingrui Yang  |  Cambridge Genetics </a:t>
+            </a:r>
+            <a:r>
+              <a:rPr lang="en-GB" sz="900" b="0" dirty="0">
+                <a:solidFill>
+                  <a:srgbClr val="FFFFFF"/>
+                </a:solidFill>
+                <a:latin typeface="Calibri"/>
+              </a:rPr>
+              <a:t>2026</a:t>
+            </a:r>
+            <a:endParaRPr sz="900" b="0" dirty="0">
+              <a:solidFill>
+                <a:srgbClr val="FFFFFF"/>
+              </a:solidFill>
+              <a:latin typeface="Calibri"/>
+            </a:endParaRPr>
           </a:p>
         </p:txBody>
       </p:sp>
@@ -14295,7 +14618,7 @@
 </file>
 
 <file path=ppt/slides/slide18.xml><?xml version="1.0" encoding="utf-8"?>
-<p:sld xmlns:a="http://schemas.openxmlformats.org/drawingml/2006/main" xmlns:p="http://schemas.openxmlformats.org/presentationml/2006/main" xmlns:r="http://schemas.openxmlformats.org/officeDocument/2006/relationships">
+<p:sld xmlns:a="http://schemas.openxmlformats.org/drawingml/2006/main" xmlns:r="http://schemas.openxmlformats.org/officeDocument/2006/relationships" xmlns:p="http://schemas.openxmlformats.org/presentationml/2006/main">
   <p:cSld>
     <p:spTree>
       <p:nvGrpSpPr>
@@ -14303,7 +14626,14 @@
         <p:cNvGrpSpPr/>
         <p:nvPr/>
       </p:nvGrpSpPr>
-      <p:grpSpPr/>
+      <p:grpSpPr>
+        <a:xfrm>
+          <a:off x="0" y="0"/>
+          <a:ext cx="0" cy="0"/>
+          <a:chOff x="0" y="0"/>
+          <a:chExt cx="0" cy="0"/>
+        </a:xfrm>
+      </p:grpSpPr>
       <p:sp>
         <p:nvSpPr>
           <p:cNvPr id="2" name="Rectangle 1"/>
@@ -14344,6 +14674,7 @@
           <a:lstStyle/>
           <a:p>
             <a:pPr algn="ctr"/>
+            <a:endParaRPr/>
           </a:p>
         </p:txBody>
       </p:sp>
@@ -14387,6 +14718,7 @@
           <a:lstStyle/>
           <a:p>
             <a:pPr algn="ctr"/>
+            <a:endParaRPr/>
           </a:p>
         </p:txBody>
       </p:sp>
@@ -14462,48 +14794,13 @@
       </p:sp>
       <p:sp>
         <p:nvSpPr>
-          <p:cNvPr id="6" name="TextBox 5"/>
-          <p:cNvSpPr txBox="1"/>
-          <p:nvPr/>
-        </p:nvSpPr>
-        <p:spPr>
-          <a:xfrm>
-            <a:off x="1371600" y="3383280"/>
-            <a:ext cx="9445752" cy="2011680"/>
-          </a:xfrm>
-          <a:prstGeom prst="rect">
-            <a:avLst/>
-          </a:prstGeom>
-          <a:noFill/>
-        </p:spPr>
-        <p:txBody>
-          <a:bodyPr wrap="square">
-            <a:spAutoFit/>
-          </a:bodyPr>
-          <a:lstStyle/>
-          <a:p>
-            <a:pPr algn="ctr"/>
-            <a:r>
-              <a:rPr sz="1400" b="0">
-                <a:solidFill>
-                  <a:srgbClr val="FFFFFF"/>
-                </a:solidFill>
-                <a:latin typeface="Calibri"/>
-              </a:rPr>
-              <a:t>I thank Prof. Richard Durbin for supervision and critical feedback. I am grateful to Pio Sierra and Hadi Khan for daily guidance and access to the Pantera TE catalogue. Computational resources: CSD3 (Cambridge Service for Data Driven Discovery). Data: Vertebrate Genomes Project (VGP). All models implemented in PyTorch 2.0+.</a:t>
-            </a:r>
-          </a:p>
-        </p:txBody>
-      </p:sp>
-      <p:sp>
-        <p:nvSpPr>
           <p:cNvPr id="7" name="TextBox 6"/>
           <p:cNvSpPr txBox="1"/>
           <p:nvPr/>
         </p:nvSpPr>
         <p:spPr>
           <a:xfrm>
-            <a:off x="914400" y="5577840"/>
+            <a:off x="914336" y="4822928"/>
             <a:ext cx="10360152" cy="457200"/>
           </a:xfrm>
           <a:prstGeom prst="rect">
@@ -14519,7 +14816,7 @@
           <a:p>
             <a:pPr algn="ctr"/>
             <a:r>
-              <a:rPr sz="2200" b="1">
+              <a:rPr sz="2200" b="1" dirty="0">
                 <a:solidFill>
                   <a:srgbClr val="F0AB00"/>
                 </a:solidFill>
@@ -14570,6 +14867,7 @@
           <a:lstStyle/>
           <a:p>
             <a:pPr algn="ctr"/>
+            <a:endParaRPr/>
           </a:p>
         </p:txBody>
       </p:sp>
@@ -14582,7 +14880,7 @@
         <p:spPr>
           <a:xfrm>
             <a:off x="228600" y="6510528"/>
-            <a:ext cx="10515600" cy="310896"/>
+            <a:ext cx="10515600" cy="230832"/>
           </a:xfrm>
           <a:prstGeom prst="rect">
             <a:avLst/>
@@ -14597,14 +14895,29 @@
           <a:p>
             <a:pPr algn="l"/>
             <a:r>
-              <a:rPr sz="900" b="0">
+              <a:rPr sz="900" b="0" dirty="0">
                 <a:solidFill>
                   <a:srgbClr val="FFFFFF"/>
                 </a:solidFill>
                 <a:latin typeface="Calibri"/>
               </a:rPr>
-              <a:t>Machine Learning a TE Classifier  |  Yingrui Yang  |  Cambridge Genetics 2025</a:t>
-            </a:r>
+              <a:t>Machine Learning a TE Classifier  |  Yingrui Yang  |  Cambridge Genetics </a:t>
+            </a:r>
+            <a:r>
+              <a:rPr lang="en-GB" sz="900" b="0" dirty="0">
+                <a:solidFill>
+                  <a:srgbClr val="FFFFFF"/>
+                </a:solidFill>
+                <a:latin typeface="Calibri"/>
+              </a:rPr>
+              <a:t>2026</a:t>
+            </a:r>
+            <a:endParaRPr sz="900" b="0" dirty="0">
+              <a:solidFill>
+                <a:srgbClr val="FFFFFF"/>
+              </a:solidFill>
+              <a:latin typeface="Calibri"/>
+            </a:endParaRPr>
           </a:p>
         </p:txBody>
       </p:sp>
@@ -14652,7 +14965,7 @@
 </file>
 
 <file path=ppt/slides/slide2.xml><?xml version="1.0" encoding="utf-8"?>
-<p:sld xmlns:a="http://schemas.openxmlformats.org/drawingml/2006/main" xmlns:p="http://schemas.openxmlformats.org/presentationml/2006/main" xmlns:r="http://schemas.openxmlformats.org/officeDocument/2006/relationships">
+<p:sld xmlns:a="http://schemas.openxmlformats.org/drawingml/2006/main" xmlns:r="http://schemas.openxmlformats.org/officeDocument/2006/relationships" xmlns:p="http://schemas.openxmlformats.org/presentationml/2006/main">
   <p:cSld>
     <p:spTree>
       <p:nvGrpSpPr>
@@ -14660,7 +14973,14 @@
         <p:cNvGrpSpPr/>
         <p:nvPr/>
       </p:nvGrpSpPr>
-      <p:grpSpPr/>
+      <p:grpSpPr>
+        <a:xfrm>
+          <a:off x="0" y="0"/>
+          <a:ext cx="0" cy="0"/>
+          <a:chOff x="0" y="0"/>
+          <a:chExt cx="0" cy="0"/>
+        </a:xfrm>
+      </p:grpSpPr>
       <p:sp>
         <p:nvSpPr>
           <p:cNvPr id="2" name="Rectangle 1"/>
@@ -14701,6 +15021,7 @@
           <a:lstStyle/>
           <a:p>
             <a:pPr algn="ctr"/>
+            <a:endParaRPr/>
           </a:p>
         </p:txBody>
       </p:sp>
@@ -14779,6 +15100,7 @@
           <a:lstStyle/>
           <a:p>
             <a:pPr algn="ctr"/>
+            <a:endParaRPr/>
           </a:p>
         </p:txBody>
       </p:sp>
@@ -14822,6 +15144,7 @@
           <a:lstStyle/>
           <a:p>
             <a:pPr algn="ctr"/>
+            <a:endParaRPr/>
           </a:p>
         </p:txBody>
       </p:sp>
@@ -14834,7 +15157,7 @@
         <p:spPr>
           <a:xfrm>
             <a:off x="228600" y="6510528"/>
-            <a:ext cx="10515600" cy="310896"/>
+            <a:ext cx="10515600" cy="230832"/>
           </a:xfrm>
           <a:prstGeom prst="rect">
             <a:avLst/>
@@ -14849,14 +15172,29 @@
           <a:p>
             <a:pPr algn="l"/>
             <a:r>
-              <a:rPr sz="900" b="0">
+              <a:rPr sz="900" b="0" dirty="0">
                 <a:solidFill>
                   <a:srgbClr val="FFFFFF"/>
                 </a:solidFill>
                 <a:latin typeface="Calibri"/>
               </a:rPr>
-              <a:t>Machine Learning a TE Classifier  |  Yingrui Yang  |  Cambridge Genetics 2025</a:t>
-            </a:r>
+              <a:t>Machine Learning a TE Classifier  |  Yingrui Yang  |  Cambridge Genetics </a:t>
+            </a:r>
+            <a:r>
+              <a:rPr lang="en-GB" sz="900" b="0" dirty="0">
+                <a:solidFill>
+                  <a:srgbClr val="FFFFFF"/>
+                </a:solidFill>
+                <a:latin typeface="Calibri"/>
+              </a:rPr>
+              <a:t>2026</a:t>
+            </a:r>
+            <a:endParaRPr sz="900" b="0" dirty="0">
+              <a:solidFill>
+                <a:srgbClr val="FFFFFF"/>
+              </a:solidFill>
+              <a:latin typeface="Calibri"/>
+            </a:endParaRPr>
           </a:p>
         </p:txBody>
       </p:sp>
@@ -14903,8 +15241,8 @@
         </p:nvSpPr>
         <p:spPr>
           <a:xfrm>
-            <a:off x="320040" y="1298448"/>
-            <a:ext cx="5669280" cy="5102352"/>
+            <a:off x="320040" y="1457936"/>
+            <a:ext cx="5669280" cy="4381520"/>
           </a:xfrm>
           <a:prstGeom prst="rect">
             <a:avLst/>
@@ -14926,7 +15264,7 @@
               </a:spcBef>
             </a:pPr>
             <a:r>
-              <a:rPr sz="1600">
+              <a:rPr sz="1600" dirty="0">
                 <a:solidFill>
                   <a:srgbClr val="3F4444"/>
                 </a:solidFill>
@@ -14945,7 +15283,7 @@
               </a:spcBef>
             </a:pPr>
             <a:r>
-              <a:rPr sz="1600">
+              <a:rPr sz="1600" dirty="0">
                 <a:solidFill>
                   <a:srgbClr val="3F4444"/>
                 </a:solidFill>
@@ -14964,7 +15302,7 @@
               </a:spcBef>
             </a:pPr>
             <a:r>
-              <a:rPr sz="1600">
+              <a:rPr sz="1600" dirty="0">
                 <a:solidFill>
                   <a:srgbClr val="3F4444"/>
                 </a:solidFill>
@@ -14983,7 +15321,7 @@
               </a:spcBef>
             </a:pPr>
             <a:r>
-              <a:rPr sz="1600">
+              <a:rPr sz="1600" dirty="0">
                 <a:solidFill>
                   <a:srgbClr val="3F4444"/>
                 </a:solidFill>
@@ -15002,7 +15340,7 @@
               </a:spcBef>
             </a:pPr>
             <a:r>
-              <a:rPr sz="1600">
+              <a:rPr sz="1600" dirty="0">
                 <a:solidFill>
                   <a:srgbClr val="3F4444"/>
                 </a:solidFill>
@@ -15021,7 +15359,7 @@
               </a:spcBef>
             </a:pPr>
             <a:r>
-              <a:rPr sz="1600">
+              <a:rPr sz="1600" dirty="0">
                 <a:solidFill>
                   <a:srgbClr val="3F4444"/>
                 </a:solidFill>
@@ -15029,30 +15367,137 @@
               </a:rPr>
               <a:t>▪ Stage 1 — Label Validation (v3, v4, v4.1)</a:t>
             </a:r>
-          </a:p>
-        </p:txBody>
-      </p:sp>
-      <p:sp>
-        <p:nvSpPr>
-          <p:cNvPr id="9" name="TextBox 8"/>
-          <p:cNvSpPr txBox="1"/>
-          <p:nvPr/>
-        </p:nvSpPr>
-        <p:spPr>
-          <a:xfrm>
-            <a:off x="6217920" y="1298448"/>
-            <a:ext cx="5669280" cy="5102352"/>
-          </a:xfrm>
-          <a:prstGeom prst="rect">
-            <a:avLst/>
-          </a:prstGeom>
-          <a:noFill/>
-        </p:spPr>
-        <p:txBody>
-          <a:bodyPr wrap="square">
-            <a:spAutoFit/>
-          </a:bodyPr>
-          <a:lstStyle/>
+            <a:endParaRPr lang="en-US" sz="1600" dirty="0">
+              <a:solidFill>
+                <a:srgbClr val="3F4444"/>
+              </a:solidFill>
+              <a:latin typeface="Calibri"/>
+            </a:endParaRPr>
+          </a:p>
+          <a:p>
+            <a:pPr>
+              <a:lnSpc>
+                <a:spcPct val="130000"/>
+              </a:lnSpc>
+              <a:spcBef>
+                <a:spcPts val="80"/>
+              </a:spcBef>
+            </a:pPr>
+            <a:r>
+              <a:rPr lang="en-GB" sz="1600" dirty="0">
+                <a:solidFill>
+                  <a:srgbClr val="3F4444"/>
+                </a:solidFill>
+              </a:rPr>
+              <a:t>▪ Stage 2 — Species-Disjoint Protocol (v4.3)</a:t>
+            </a:r>
+          </a:p>
+          <a:p>
+            <a:pPr>
+              <a:lnSpc>
+                <a:spcPct val="130000"/>
+              </a:lnSpc>
+              <a:spcBef>
+                <a:spcPts val="80"/>
+              </a:spcBef>
+            </a:pPr>
+            <a:r>
+              <a:rPr lang="en-GB" sz="1600" dirty="0">
+                <a:solidFill>
+                  <a:srgbClr val="3F4444"/>
+                </a:solidFill>
+              </a:rPr>
+              <a:t>▪ k-</a:t>
+            </a:r>
+            <a:r>
+              <a:rPr lang="en-GB" sz="1600" dirty="0" err="1">
+                <a:solidFill>
+                  <a:srgbClr val="3F4444"/>
+                </a:solidFill>
+              </a:rPr>
+              <a:t>mer</a:t>
+            </a:r>
+            <a:r>
+              <a:rPr lang="en-GB" sz="1600" dirty="0">
+                <a:solidFill>
+                  <a:srgbClr val="3F4444"/>
+                </a:solidFill>
+              </a:rPr>
+              <a:t> Baseline &amp; Attention Gating</a:t>
+            </a:r>
+          </a:p>
+          <a:p>
+            <a:pPr>
+              <a:lnSpc>
+                <a:spcPct val="130000"/>
+              </a:lnSpc>
+              <a:spcBef>
+                <a:spcPts val="80"/>
+              </a:spcBef>
+            </a:pPr>
+            <a:r>
+              <a:rPr lang="en-GB" sz="1600" dirty="0">
+                <a:solidFill>
+                  <a:srgbClr val="3F4444"/>
+                </a:solidFill>
+              </a:rPr>
+              <a:t>▪ Stage 3 — Single-Fold Inner Split</a:t>
+            </a:r>
+          </a:p>
+          <a:p>
+            <a:pPr>
+              <a:lnSpc>
+                <a:spcPct val="130000"/>
+              </a:lnSpc>
+              <a:spcBef>
+                <a:spcPts val="80"/>
+              </a:spcBef>
+            </a:pPr>
+            <a:r>
+              <a:rPr lang="en-GB" sz="1600" dirty="0">
+                <a:solidFill>
+                  <a:srgbClr val="3F4444"/>
+                </a:solidFill>
+              </a:rPr>
+              <a:t>▪ Mini-Benchmark: Cross-Species Transfer</a:t>
+            </a:r>
+          </a:p>
+          <a:p>
+            <a:pPr>
+              <a:lnSpc>
+                <a:spcPct val="130000"/>
+              </a:lnSpc>
+              <a:spcBef>
+                <a:spcPts val="80"/>
+              </a:spcBef>
+            </a:pPr>
+            <a:r>
+              <a:rPr lang="en-GB" sz="1600" dirty="0">
+                <a:solidFill>
+                  <a:srgbClr val="3F4444"/>
+                </a:solidFill>
+              </a:rPr>
+              <a:t>▪ Interpretability: Saliency &amp; Clustering (v5)</a:t>
+            </a:r>
+          </a:p>
+          <a:p>
+            <a:pPr>
+              <a:lnSpc>
+                <a:spcPct val="130000"/>
+              </a:lnSpc>
+              <a:spcBef>
+                <a:spcPts val="80"/>
+              </a:spcBef>
+            </a:pPr>
+            <a:r>
+              <a:rPr lang="en-GB" sz="1600" dirty="0">
+                <a:solidFill>
+                  <a:srgbClr val="3F4444"/>
+                </a:solidFill>
+              </a:rPr>
+              <a:t>▪ Summary, Limitations &amp; Future Directions</a:t>
+            </a:r>
+          </a:p>
           <a:p>
             <a:pPr algn="l">
               <a:lnSpc>
@@ -15062,153 +15507,12 @@
                 <a:spcPts val="80"/>
               </a:spcBef>
             </a:pPr>
-            <a:r>
-              <a:rPr sz="1600">
-                <a:solidFill>
-                  <a:srgbClr val="3F4444"/>
-                </a:solidFill>
-                <a:latin typeface="Calibri"/>
-              </a:rPr>
-              <a:t>▪ Stage 2 — Species-Disjoint Protocol (v4.3)</a:t>
-            </a:r>
-          </a:p>
-          <a:p>
-            <a:pPr algn="l">
-              <a:lnSpc>
-                <a:spcPct val="130000"/>
-              </a:lnSpc>
-              <a:spcBef>
-                <a:spcPts val="80"/>
-              </a:spcBef>
-            </a:pPr>
-            <a:r>
-              <a:rPr sz="1600">
-                <a:solidFill>
-                  <a:srgbClr val="3F4444"/>
-                </a:solidFill>
-                <a:latin typeface="Calibri"/>
-              </a:rPr>
-              <a:t>▪ k-mer Baseline &amp; Attention Gating</a:t>
-            </a:r>
-          </a:p>
-          <a:p>
-            <a:pPr algn="l">
-              <a:lnSpc>
-                <a:spcPct val="130000"/>
-              </a:lnSpc>
-              <a:spcBef>
-                <a:spcPts val="80"/>
-              </a:spcBef>
-            </a:pPr>
-            <a:r>
-              <a:rPr sz="1600">
-                <a:solidFill>
-                  <a:srgbClr val="3F4444"/>
-                </a:solidFill>
-                <a:latin typeface="Calibri"/>
-              </a:rPr>
-              <a:t>▪ Stage 3 — Single-Fold Inner Split</a:t>
-            </a:r>
-          </a:p>
-          <a:p>
-            <a:pPr algn="l">
-              <a:lnSpc>
-                <a:spcPct val="130000"/>
-              </a:lnSpc>
-              <a:spcBef>
-                <a:spcPts val="80"/>
-              </a:spcBef>
-            </a:pPr>
-            <a:r>
-              <a:rPr sz="1600">
-                <a:solidFill>
-                  <a:srgbClr val="3F4444"/>
-                </a:solidFill>
-                <a:latin typeface="Calibri"/>
-              </a:rPr>
-              <a:t>▪ Mini-Benchmark: Cross-Species Transfer</a:t>
-            </a:r>
-          </a:p>
-          <a:p>
-            <a:pPr algn="l">
-              <a:lnSpc>
-                <a:spcPct val="130000"/>
-              </a:lnSpc>
-              <a:spcBef>
-                <a:spcPts val="80"/>
-              </a:spcBef>
-            </a:pPr>
-            <a:r>
-              <a:rPr sz="1600">
-                <a:solidFill>
-                  <a:srgbClr val="3F4444"/>
-                </a:solidFill>
-                <a:latin typeface="Calibri"/>
-              </a:rPr>
-              <a:t>▪ Interpretability: Saliency &amp; Clustering (v5)</a:t>
-            </a:r>
-          </a:p>
-          <a:p>
-            <a:pPr algn="l">
-              <a:lnSpc>
-                <a:spcPct val="130000"/>
-              </a:lnSpc>
-              <a:spcBef>
-                <a:spcPts val="80"/>
-              </a:spcBef>
-            </a:pPr>
-            <a:r>
-              <a:rPr sz="1600">
-                <a:solidFill>
-                  <a:srgbClr val="3F4444"/>
-                </a:solidFill>
-                <a:latin typeface="Calibri"/>
-              </a:rPr>
-              <a:t>▪ Summary, Limitations &amp; Future Directions</a:t>
-            </a:r>
-          </a:p>
-        </p:txBody>
-      </p:sp>
-      <p:sp>
-        <p:nvSpPr>
-          <p:cNvPr id="10" name="Rectangle 9"/>
-          <p:cNvSpPr/>
-          <p:nvPr/>
-        </p:nvSpPr>
-        <p:spPr>
-          <a:xfrm>
-            <a:off x="6080760" y="1298448"/>
-            <a:ext cx="27432" cy="5102352"/>
-          </a:xfrm>
-          <a:prstGeom prst="rect">
-            <a:avLst/>
-          </a:prstGeom>
-          <a:solidFill>
-            <a:srgbClr val="68D2DF"/>
-          </a:solidFill>
-          <a:ln>
-            <a:noFill/>
-          </a:ln>
-        </p:spPr>
-        <p:style>
-          <a:lnRef idx="1">
-            <a:schemeClr val="accent1"/>
-          </a:lnRef>
-          <a:fillRef idx="3">
-            <a:schemeClr val="accent1"/>
-          </a:fillRef>
-          <a:effectRef idx="2">
-            <a:schemeClr val="accent1"/>
-          </a:effectRef>
-          <a:fontRef idx="minor">
-            <a:schemeClr val="lt1"/>
-          </a:fontRef>
-        </p:style>
-        <p:txBody>
-          <a:bodyPr rtlCol="0" anchor="ctr"/>
-          <a:lstStyle/>
-          <a:p>
-            <a:pPr algn="ctr"/>
+            <a:endParaRPr sz="1600" dirty="0">
+              <a:solidFill>
+                <a:srgbClr val="3F4444"/>
+              </a:solidFill>
+              <a:latin typeface="Calibri"/>
+            </a:endParaRPr>
           </a:p>
         </p:txBody>
       </p:sp>
@@ -15221,7 +15525,7 @@
 </file>
 
 <file path=ppt/slides/slide3.xml><?xml version="1.0" encoding="utf-8"?>
-<p:sld xmlns:a="http://schemas.openxmlformats.org/drawingml/2006/main" xmlns:p="http://schemas.openxmlformats.org/presentationml/2006/main" xmlns:r="http://schemas.openxmlformats.org/officeDocument/2006/relationships">
+<p:sld xmlns:a="http://schemas.openxmlformats.org/drawingml/2006/main" xmlns:r="http://schemas.openxmlformats.org/officeDocument/2006/relationships" xmlns:p="http://schemas.openxmlformats.org/presentationml/2006/main">
   <p:cSld>
     <p:spTree>
       <p:nvGrpSpPr>
@@ -15229,7 +15533,14 @@
         <p:cNvGrpSpPr/>
         <p:nvPr/>
       </p:nvGrpSpPr>
-      <p:grpSpPr/>
+      <p:grpSpPr>
+        <a:xfrm>
+          <a:off x="0" y="0"/>
+          <a:ext cx="0" cy="0"/>
+          <a:chOff x="0" y="0"/>
+          <a:chExt cx="0" cy="0"/>
+        </a:xfrm>
+      </p:grpSpPr>
       <p:sp>
         <p:nvSpPr>
           <p:cNvPr id="2" name="Rectangle 1"/>
@@ -15270,6 +15581,7 @@
           <a:lstStyle/>
           <a:p>
             <a:pPr algn="ctr"/>
+            <a:endParaRPr/>
           </a:p>
         </p:txBody>
       </p:sp>
@@ -15383,6 +15695,7 @@
           <a:lstStyle/>
           <a:p>
             <a:pPr algn="ctr"/>
+            <a:endParaRPr/>
           </a:p>
         </p:txBody>
       </p:sp>
@@ -15426,6 +15739,7 @@
           <a:lstStyle/>
           <a:p>
             <a:pPr algn="ctr"/>
+            <a:endParaRPr/>
           </a:p>
         </p:txBody>
       </p:sp>
@@ -15438,7 +15752,7 @@
         <p:spPr>
           <a:xfrm>
             <a:off x="228600" y="6510528"/>
-            <a:ext cx="10515600" cy="310896"/>
+            <a:ext cx="10515600" cy="230832"/>
           </a:xfrm>
           <a:prstGeom prst="rect">
             <a:avLst/>
@@ -15453,14 +15767,29 @@
           <a:p>
             <a:pPr algn="l"/>
             <a:r>
-              <a:rPr sz="900" b="0">
+              <a:rPr sz="900" b="0" dirty="0">
                 <a:solidFill>
                   <a:srgbClr val="FFFFFF"/>
                 </a:solidFill>
                 <a:latin typeface="Calibri"/>
               </a:rPr>
-              <a:t>Machine Learning a TE Classifier  |  Yingrui Yang  |  Cambridge Genetics 2025</a:t>
-            </a:r>
+              <a:t>Machine Learning a TE Classifier  |  Yingrui Yang  |  Cambridge Genetics </a:t>
+            </a:r>
+            <a:r>
+              <a:rPr lang="en-GB" sz="900" b="0" dirty="0">
+                <a:solidFill>
+                  <a:srgbClr val="FFFFFF"/>
+                </a:solidFill>
+                <a:latin typeface="Calibri"/>
+              </a:rPr>
+              <a:t>2026</a:t>
+            </a:r>
+            <a:endParaRPr sz="900" b="0" dirty="0">
+              <a:solidFill>
+                <a:srgbClr val="FFFFFF"/>
+              </a:solidFill>
+              <a:latin typeface="Calibri"/>
+            </a:endParaRPr>
           </a:p>
         </p:txBody>
       </p:sp>
@@ -15507,7 +15836,7 @@
         </p:nvSpPr>
         <p:spPr>
           <a:xfrm>
-            <a:off x="320040" y="1298448"/>
+            <a:off x="320040" y="1490472"/>
             <a:ext cx="7132320" cy="1097280"/>
           </a:xfrm>
           <a:prstGeom prst="rect">
@@ -15523,7 +15852,7 @@
           <a:p>
             <a:pPr algn="l"/>
             <a:r>
-              <a:rPr sz="1300" b="0">
+              <a:rPr sz="1300" b="0" dirty="0">
                 <a:solidFill>
                   <a:srgbClr val="555555"/>
                 </a:solidFill>
@@ -15600,7 +15929,7 @@
               </a:spcBef>
             </a:pPr>
             <a:r>
-              <a:rPr sz="1500">
+              <a:rPr sz="1500" dirty="0">
                 <a:solidFill>
                   <a:srgbClr val="3F4444"/>
                 </a:solidFill>
@@ -15619,13 +15948,31 @@
               </a:spcBef>
             </a:pPr>
             <a:r>
-              <a:rPr sz="1500">
+              <a:rPr sz="1500" dirty="0">
                 <a:solidFill>
                   <a:srgbClr val="3F4444"/>
                 </a:solidFill>
                 <a:latin typeface="Calibri"/>
               </a:rPr>
-              <a:t>▪ Autonomous elements encode mobilisation enzymes (transposase / reverse transcriptase)</a:t>
+              <a:t>▪ Autonomous elements encode </a:t>
+            </a:r>
+            <a:r>
+              <a:rPr sz="1500" dirty="0" err="1">
+                <a:solidFill>
+                  <a:srgbClr val="3F4444"/>
+                </a:solidFill>
+                <a:latin typeface="Calibri"/>
+              </a:rPr>
+              <a:t>mobilisation</a:t>
+            </a:r>
+            <a:r>
+              <a:rPr sz="1500" dirty="0">
+                <a:solidFill>
+                  <a:srgbClr val="3F4444"/>
+                </a:solidFill>
+                <a:latin typeface="Calibri"/>
+              </a:rPr>
+              <a:t> enzymes (transposase / reverse transcriptase)</a:t>
             </a:r>
           </a:p>
           <a:p>
@@ -15638,13 +15985,31 @@
               </a:spcBef>
             </a:pPr>
             <a:r>
-              <a:rPr sz="1500">
+              <a:rPr sz="1500" dirty="0">
                 <a:solidFill>
                   <a:srgbClr val="3F4444"/>
                 </a:solidFill>
                 <a:latin typeface="Calibri"/>
               </a:rPr>
-              <a:t>▪ Non-autonomous elements parasitise the machinery of an active driver element</a:t>
+              <a:t>▪ Non-autonomous elements </a:t>
+            </a:r>
+            <a:r>
+              <a:rPr sz="1500" dirty="0" err="1">
+                <a:solidFill>
+                  <a:srgbClr val="3F4444"/>
+                </a:solidFill>
+                <a:latin typeface="Calibri"/>
+              </a:rPr>
+              <a:t>parasitise</a:t>
+            </a:r>
+            <a:r>
+              <a:rPr sz="1500" dirty="0">
+                <a:solidFill>
+                  <a:srgbClr val="3F4444"/>
+                </a:solidFill>
+                <a:latin typeface="Calibri"/>
+              </a:rPr>
+              <a:t> the machinery of an active driver element</a:t>
             </a:r>
           </a:p>
         </p:txBody>
@@ -15797,7 +16162,7 @@
 </file>
 
 <file path=ppt/slides/slide4.xml><?xml version="1.0" encoding="utf-8"?>
-<p:sld xmlns:a="http://schemas.openxmlformats.org/drawingml/2006/main" xmlns:p="http://schemas.openxmlformats.org/presentationml/2006/main" xmlns:r="http://schemas.openxmlformats.org/officeDocument/2006/relationships">
+<p:sld xmlns:a="http://schemas.openxmlformats.org/drawingml/2006/main" xmlns:r="http://schemas.openxmlformats.org/officeDocument/2006/relationships" xmlns:p="http://schemas.openxmlformats.org/presentationml/2006/main">
   <p:cSld>
     <p:spTree>
       <p:nvGrpSpPr>
@@ -15805,7 +16170,14 @@
         <p:cNvGrpSpPr/>
         <p:nvPr/>
       </p:nvGrpSpPr>
-      <p:grpSpPr/>
+      <p:grpSpPr>
+        <a:xfrm>
+          <a:off x="0" y="0"/>
+          <a:ext cx="0" cy="0"/>
+          <a:chOff x="0" y="0"/>
+          <a:chExt cx="0" cy="0"/>
+        </a:xfrm>
+      </p:grpSpPr>
       <p:sp>
         <p:nvSpPr>
           <p:cNvPr id="2" name="Rectangle 1"/>
@@ -15846,6 +16218,7 @@
           <a:lstStyle/>
           <a:p>
             <a:pPr algn="ctr"/>
+            <a:endParaRPr/>
           </a:p>
         </p:txBody>
       </p:sp>
@@ -15959,6 +16332,7 @@
           <a:lstStyle/>
           <a:p>
             <a:pPr algn="ctr"/>
+            <a:endParaRPr/>
           </a:p>
         </p:txBody>
       </p:sp>
@@ -16002,6 +16376,7 @@
           <a:lstStyle/>
           <a:p>
             <a:pPr algn="ctr"/>
+            <a:endParaRPr/>
           </a:p>
         </p:txBody>
       </p:sp>
@@ -16014,7 +16389,7 @@
         <p:spPr>
           <a:xfrm>
             <a:off x="228600" y="6510528"/>
-            <a:ext cx="10515600" cy="310896"/>
+            <a:ext cx="10515600" cy="230832"/>
           </a:xfrm>
           <a:prstGeom prst="rect">
             <a:avLst/>
@@ -16029,14 +16404,29 @@
           <a:p>
             <a:pPr algn="l"/>
             <a:r>
-              <a:rPr sz="900" b="0">
+              <a:rPr sz="900" b="0" dirty="0">
                 <a:solidFill>
                   <a:srgbClr val="FFFFFF"/>
                 </a:solidFill>
                 <a:latin typeface="Calibri"/>
               </a:rPr>
-              <a:t>Machine Learning a TE Classifier  |  Yingrui Yang  |  Cambridge Genetics 2025</a:t>
-            </a:r>
+              <a:t>Machine Learning a TE Classifier  |  Yingrui Yang  |  Cambridge Genetics </a:t>
+            </a:r>
+            <a:r>
+              <a:rPr lang="en-GB" sz="900" b="0" dirty="0">
+                <a:solidFill>
+                  <a:srgbClr val="FFFFFF"/>
+                </a:solidFill>
+                <a:latin typeface="Calibri"/>
+              </a:rPr>
+              <a:t>2026</a:t>
+            </a:r>
+            <a:endParaRPr sz="900" b="0" dirty="0">
+              <a:solidFill>
+                <a:srgbClr val="FFFFFF"/>
+              </a:solidFill>
+              <a:latin typeface="Calibri"/>
+            </a:endParaRPr>
           </a:p>
         </p:txBody>
       </p:sp>
@@ -16084,7 +16474,7 @@
         <p:spPr>
           <a:xfrm>
             <a:off x="320040" y="1298448"/>
-            <a:ext cx="6949440" cy="2286000"/>
+            <a:ext cx="6949440" cy="1705403"/>
           </a:xfrm>
           <a:prstGeom prst="rect">
             <a:avLst/>
@@ -16106,14 +16496,20 @@
               </a:spcBef>
             </a:pPr>
             <a:r>
-              <a:rPr sz="1600">
+              <a:rPr sz="1600" dirty="0">
                 <a:solidFill>
                   <a:srgbClr val="3F4444"/>
                 </a:solidFill>
                 <a:latin typeface="Calibri"/>
               </a:rPr>
-              <a:t>▪ Identifies TE families from insertions absent in some haplotypes — no reference library bias</a:t>
-            </a:r>
+              <a:t>▪ Identifies TE families from insertions absent in some haplotypes</a:t>
+            </a:r>
+            <a:endParaRPr lang="en-US" sz="1600" dirty="0">
+              <a:solidFill>
+                <a:srgbClr val="3F4444"/>
+              </a:solidFill>
+              <a:latin typeface="Calibri"/>
+            </a:endParaRPr>
           </a:p>
           <a:p>
             <a:pPr algn="l">
@@ -16125,7 +16521,7 @@
               </a:spcBef>
             </a:pPr>
             <a:r>
-              <a:rPr sz="1600">
+              <a:rPr sz="1600" dirty="0">
                 <a:solidFill>
                   <a:srgbClr val="3F4444"/>
                 </a:solidFill>
@@ -16144,13 +16540,22 @@
               </a:spcBef>
             </a:pPr>
             <a:r>
-              <a:rPr sz="1600">
+              <a:rPr sz="1600" dirty="0">
                 <a:solidFill>
                   <a:srgbClr val="3F4444"/>
                 </a:solidFill>
                 <a:latin typeface="Calibri"/>
               </a:rPr>
-              <a:t>▪ 135,751 sequences from 512 unique vertebrate species → the training corpus for this project</a:t>
+              <a:t>▪ 135,751 sequences</a:t>
+            </a:r>
+            <a:r>
+              <a:rPr lang="en-GB" sz="1600" dirty="0">
+                <a:solidFill>
+                  <a:srgbClr val="3F4444"/>
+                </a:solidFill>
+                <a:latin typeface="Calibri"/>
+              </a:rPr>
+              <a:t> from 509 unique species</a:t>
             </a:r>
           </a:p>
           <a:p>
@@ -16163,7 +16568,7 @@
               </a:spcBef>
             </a:pPr>
             <a:r>
-              <a:rPr sz="1600">
+              <a:rPr lang="en-GB" sz="1600" dirty="0">
                 <a:solidFill>
                   <a:srgbClr val="3F4444"/>
                 </a:solidFill>
@@ -16214,6 +16619,7 @@
           <a:lstStyle/>
           <a:p>
             <a:pPr algn="ctr"/>
+            <a:endParaRPr/>
           </a:p>
         </p:txBody>
       </p:sp>
@@ -16365,7 +16771,7 @@
 </file>
 
 <file path=ppt/slides/slide5.xml><?xml version="1.0" encoding="utf-8"?>
-<p:sld xmlns:a="http://schemas.openxmlformats.org/drawingml/2006/main" xmlns:p="http://schemas.openxmlformats.org/presentationml/2006/main" xmlns:r="http://schemas.openxmlformats.org/officeDocument/2006/relationships">
+<p:sld xmlns:a="http://schemas.openxmlformats.org/drawingml/2006/main" xmlns:r="http://schemas.openxmlformats.org/officeDocument/2006/relationships" xmlns:p="http://schemas.openxmlformats.org/presentationml/2006/main">
   <p:cSld>
     <p:spTree>
       <p:nvGrpSpPr>
@@ -16373,7 +16779,14 @@
         <p:cNvGrpSpPr/>
         <p:nvPr/>
       </p:nvGrpSpPr>
-      <p:grpSpPr/>
+      <p:grpSpPr>
+        <a:xfrm>
+          <a:off x="0" y="0"/>
+          <a:ext cx="0" cy="0"/>
+          <a:chOff x="0" y="0"/>
+          <a:chExt cx="0" cy="0"/>
+        </a:xfrm>
+      </p:grpSpPr>
       <p:sp>
         <p:nvSpPr>
           <p:cNvPr id="2" name="Rectangle 1"/>
@@ -16414,6 +16827,7 @@
           <a:lstStyle/>
           <a:p>
             <a:pPr algn="ctr"/>
+            <a:endParaRPr/>
           </a:p>
         </p:txBody>
       </p:sp>
@@ -16447,14 +16861,49 @@
                 </a:solidFill>
                 <a:latin typeface="Calibri"/>
               </a:rPr>
-              <a:t>Project Goals</a:t>
-            </a:r>
-          </a:p>
-        </p:txBody>
-      </p:sp>
-      <p:sp>
-        <p:nvSpPr>
-          <p:cNvPr id="4" name="Rectangle 3"/>
+              <a:t>Three-Stage Evaluation Protocol</a:t>
+            </a:r>
+          </a:p>
+        </p:txBody>
+      </p:sp>
+      <p:sp>
+        <p:nvSpPr>
+          <p:cNvPr id="4" name="TextBox 3"/>
+          <p:cNvSpPr txBox="1"/>
+          <p:nvPr/>
+        </p:nvSpPr>
+        <p:spPr>
+          <a:xfrm>
+            <a:off x="320040" y="804672"/>
+            <a:ext cx="11430000" cy="329184"/>
+          </a:xfrm>
+          <a:prstGeom prst="rect">
+            <a:avLst/>
+          </a:prstGeom>
+          <a:noFill/>
+        </p:spPr>
+        <p:txBody>
+          <a:bodyPr wrap="square">
+            <a:spAutoFit/>
+          </a:bodyPr>
+          <a:lstStyle/>
+          <a:p>
+            <a:pPr algn="l"/>
+            <a:r>
+              <a:rPr sz="1300" b="0">
+                <a:solidFill>
+                  <a:srgbClr val="68D2DF"/>
+                </a:solidFill>
+                <a:latin typeface="Calibri"/>
+              </a:rPr>
+              <a:t>Progressively stricter data splits — separating architecture effects from evaluation artefacts</a:t>
+            </a:r>
+          </a:p>
+        </p:txBody>
+      </p:sp>
+      <p:sp>
+        <p:nvSpPr>
+          <p:cNvPr id="5" name="Rectangle 4"/>
           <p:cNvSpPr/>
           <p:nvPr/>
         </p:nvSpPr>
@@ -16492,12 +16941,13 @@
           <a:lstStyle/>
           <a:p>
             <a:pPr algn="ctr"/>
-          </a:p>
-        </p:txBody>
-      </p:sp>
-      <p:sp>
-        <p:nvSpPr>
-          <p:cNvPr id="5" name="Rectangle 4"/>
+            <a:endParaRPr/>
+          </a:p>
+        </p:txBody>
+      </p:sp>
+      <p:sp>
+        <p:nvSpPr>
+          <p:cNvPr id="6" name="Rectangle 5"/>
           <p:cNvSpPr/>
           <p:nvPr/>
         </p:nvSpPr>
@@ -16535,19 +16985,20 @@
           <a:lstStyle/>
           <a:p>
             <a:pPr algn="ctr"/>
-          </a:p>
-        </p:txBody>
-      </p:sp>
-      <p:sp>
-        <p:nvSpPr>
-          <p:cNvPr id="6" name="TextBox 5"/>
+            <a:endParaRPr/>
+          </a:p>
+        </p:txBody>
+      </p:sp>
+      <p:sp>
+        <p:nvSpPr>
+          <p:cNvPr id="7" name="TextBox 6"/>
           <p:cNvSpPr txBox="1"/>
           <p:nvPr/>
         </p:nvSpPr>
         <p:spPr>
           <a:xfrm>
             <a:off x="228600" y="6510528"/>
-            <a:ext cx="10515600" cy="310896"/>
+            <a:ext cx="10515600" cy="230832"/>
           </a:xfrm>
           <a:prstGeom prst="rect">
             <a:avLst/>
@@ -16562,20 +17013,35 @@
           <a:p>
             <a:pPr algn="l"/>
             <a:r>
-              <a:rPr sz="900" b="0">
+              <a:rPr sz="900" b="0" dirty="0">
                 <a:solidFill>
                   <a:srgbClr val="FFFFFF"/>
                 </a:solidFill>
                 <a:latin typeface="Calibri"/>
               </a:rPr>
-              <a:t>Machine Learning a TE Classifier  |  Yingrui Yang  |  Cambridge Genetics 2025</a:t>
-            </a:r>
-          </a:p>
-        </p:txBody>
-      </p:sp>
-      <p:sp>
-        <p:nvSpPr>
-          <p:cNvPr id="7" name="TextBox 6"/>
+              <a:t>Machine Learning a TE Classifier  |  Yingrui Yang  |  Cambridge Genetics </a:t>
+            </a:r>
+            <a:r>
+              <a:rPr lang="en-GB" sz="900" b="0" dirty="0">
+                <a:solidFill>
+                  <a:srgbClr val="FFFFFF"/>
+                </a:solidFill>
+                <a:latin typeface="Calibri"/>
+              </a:rPr>
+              <a:t>2026</a:t>
+            </a:r>
+            <a:endParaRPr sz="900" b="0" dirty="0">
+              <a:solidFill>
+                <a:srgbClr val="FFFFFF"/>
+              </a:solidFill>
+              <a:latin typeface="Calibri"/>
+            </a:endParaRPr>
+          </a:p>
+        </p:txBody>
+      </p:sp>
+      <p:sp>
+        <p:nvSpPr>
+          <p:cNvPr id="8" name="TextBox 7"/>
           <p:cNvSpPr txBox="1"/>
           <p:nvPr/>
         </p:nvSpPr>
@@ -16603,163 +17069,7 @@
                 </a:solidFill>
                 <a:latin typeface="Calibri"/>
               </a:rPr>
-              <a:t>5</a:t>
-            </a:r>
-          </a:p>
-        </p:txBody>
-      </p:sp>
-      <p:sp>
-        <p:nvSpPr>
-          <p:cNvPr id="8" name="TextBox 7"/>
-          <p:cNvSpPr txBox="1"/>
-          <p:nvPr/>
-        </p:nvSpPr>
-        <p:spPr>
-          <a:xfrm>
-            <a:off x="320040" y="1389888"/>
-            <a:ext cx="11548872" cy="4023360"/>
-          </a:xfrm>
-          <a:prstGeom prst="rect">
-            <a:avLst/>
-          </a:prstGeom>
-          <a:noFill/>
-        </p:spPr>
-        <p:txBody>
-          <a:bodyPr wrap="square">
-            <a:spAutoFit/>
-          </a:bodyPr>
-          <a:lstStyle/>
-          <a:p>
-            <a:pPr algn="l">
-              <a:lnSpc>
-                <a:spcPct val="140000"/>
-              </a:lnSpc>
-              <a:spcBef>
-                <a:spcPts val="100"/>
-              </a:spcBef>
-            </a:pPr>
-            <a:r>
-              <a:rPr sz="1800">
-                <a:solidFill>
-                  <a:srgbClr val="3F4444"/>
-                </a:solidFill>
-                <a:latin typeface="Calibri"/>
-              </a:rPr>
-              <a:t>▪ Build machine learning models to classify TE sequences collected by Pantera</a:t>
-            </a:r>
-          </a:p>
-          <a:p>
-            <a:pPr algn="l">
-              <a:lnSpc>
-                <a:spcPct val="140000"/>
-              </a:lnSpc>
-              <a:spcBef>
-                <a:spcPts val="100"/>
-              </a:spcBef>
-            </a:pPr>
-            <a:r>
-              <a:rPr sz="1800">
-                <a:solidFill>
-                  <a:srgbClr val="3F4444"/>
-                </a:solidFill>
-                <a:latin typeface="Calibri"/>
-              </a:rPr>
-              <a:t>▪ Implement CNN to capture local sequence motifs (TIR signals, internal repeats) via one-hot encoding</a:t>
-            </a:r>
-          </a:p>
-          <a:p>
-            <a:pPr algn="l">
-              <a:lnSpc>
-                <a:spcPct val="140000"/>
-              </a:lnSpc>
-              <a:spcBef>
-                <a:spcPts val="100"/>
-              </a:spcBef>
-            </a:pPr>
-            <a:r>
-              <a:rPr sz="1800">
-                <a:solidFill>
-                  <a:srgbClr val="3F4444"/>
-                </a:solidFill>
-                <a:latin typeface="Calibri"/>
-              </a:rPr>
-              <a:t>▪ Implement k-mer GNN to exploit global compositional patterns across the sequence</a:t>
-            </a:r>
-          </a:p>
-          <a:p>
-            <a:pPr algn="l">
-              <a:lnSpc>
-                <a:spcPct val="140000"/>
-              </a:lnSpc>
-              <a:spcBef>
-                <a:spcPts val="100"/>
-              </a:spcBef>
-            </a:pPr>
-            <a:r>
-              <a:rPr sz="1800">
-                <a:solidFill>
-                  <a:srgbClr val="3F4444"/>
-                </a:solidFill>
-                <a:latin typeface="Calibri"/>
-              </a:rPr>
-              <a:t>▪ Incorporate attention-based fusion to balance both modalities adaptively per input</a:t>
-            </a:r>
-          </a:p>
-          <a:p>
-            <a:pPr algn="l">
-              <a:lnSpc>
-                <a:spcPct val="140000"/>
-              </a:lnSpc>
-              <a:spcBef>
-                <a:spcPts val="100"/>
-              </a:spcBef>
-            </a:pPr>
-            <a:r>
-              <a:rPr sz="1800">
-                <a:solidFill>
-                  <a:srgbClr val="3F4444"/>
-                </a:solidFill>
-                <a:latin typeface="Calibri"/>
-              </a:rPr>
-              <a:t>▪ Design hierarchical classification heads (top-level class + superfamily) mirroring TE biology</a:t>
-            </a:r>
-          </a:p>
-          <a:p>
-            <a:pPr algn="l">
-              <a:lnSpc>
-                <a:spcPct val="140000"/>
-              </a:lnSpc>
-              <a:spcBef>
-                <a:spcPts val="100"/>
-              </a:spcBef>
-            </a:pPr>
-            <a:r>
-              <a:rPr sz="1800">
-                <a:solidFill>
-                  <a:srgbClr val="3F4444"/>
-                </a:solidFill>
-                <a:latin typeface="Calibri"/>
-              </a:rPr>
-              <a:t>▪ Evaluate cross-species generalisation with a species-disjoint mini-benchmark (3 amniote genomes)</a:t>
-            </a:r>
-          </a:p>
-          <a:p>
-            <a:pPr algn="l">
-              <a:lnSpc>
-                <a:spcPct val="140000"/>
-              </a:lnSpc>
-              <a:spcBef>
-                <a:spcPts val="100"/>
-              </a:spcBef>
-            </a:pPr>
-            <a:r>
-              <a:rPr sz="1800">
-                <a:solidFill>
-                  <a:srgbClr val="3F4444"/>
-                </a:solidFill>
-                <a:latin typeface="Calibri"/>
-              </a:rPr>
-              <a:t>▪ Use interpretability tools (saliency, contrastive clustering) to probe learned representations</a:t>
+              <a:t>7</a:t>
             </a:r>
           </a:p>
         </p:txBody>
@@ -16772,14 +17082,14 @@
         </p:nvSpPr>
         <p:spPr>
           <a:xfrm>
-            <a:off x="0" y="5852160"/>
-            <a:ext cx="12188952" cy="621792"/>
+            <a:off x="320040" y="1298448"/>
+            <a:ext cx="3611880" cy="4206240"/>
           </a:xfrm>
           <a:prstGeom prst="rect">
             <a:avLst/>
           </a:prstGeom>
           <a:solidFill>
-            <a:srgbClr val="FFF5E0"/>
+            <a:srgbClr val="E8F4FF"/>
           </a:solidFill>
           <a:ln>
             <a:noFill/>
@@ -16804,6 +17114,7 @@
           <a:lstStyle/>
           <a:p>
             <a:pPr algn="ctr"/>
+            <a:endParaRPr/>
           </a:p>
         </p:txBody>
       </p:sp>
@@ -16815,8 +17126,88 @@
         </p:nvSpPr>
         <p:spPr>
           <a:xfrm>
-            <a:off x="320040" y="5925312"/>
-            <a:ext cx="11548872" cy="512064"/>
+            <a:off x="429768" y="1371600"/>
+            <a:ext cx="3392424" cy="548640"/>
+          </a:xfrm>
+          <a:prstGeom prst="rect">
+            <a:avLst/>
+          </a:prstGeom>
+          <a:noFill/>
+        </p:spPr>
+        <p:txBody>
+          <a:bodyPr wrap="square">
+            <a:spAutoFit/>
+          </a:bodyPr>
+          <a:lstStyle/>
+          <a:p>
+            <a:pPr algn="ctr"/>
+            <a:r>
+              <a:rPr sz="1400" b="1">
+                <a:solidFill>
+                  <a:srgbClr val="003865"/>
+                </a:solidFill>
+                <a:latin typeface="Calibri"/>
+              </a:rPr>
+              <a:t>Stage 1
+Label Validation</a:t>
+            </a:r>
+          </a:p>
+        </p:txBody>
+      </p:sp>
+      <p:sp>
+        <p:nvSpPr>
+          <p:cNvPr id="11" name="Rectangle 10"/>
+          <p:cNvSpPr/>
+          <p:nvPr/>
+        </p:nvSpPr>
+        <p:spPr>
+          <a:xfrm>
+            <a:off x="320040" y="1938528"/>
+            <a:ext cx="3611880" cy="27432"/>
+          </a:xfrm>
+          <a:prstGeom prst="rect">
+            <a:avLst/>
+          </a:prstGeom>
+          <a:solidFill>
+            <a:srgbClr val="003865"/>
+          </a:solidFill>
+          <a:ln>
+            <a:noFill/>
+          </a:ln>
+        </p:spPr>
+        <p:style>
+          <a:lnRef idx="1">
+            <a:schemeClr val="accent1"/>
+          </a:lnRef>
+          <a:fillRef idx="3">
+            <a:schemeClr val="accent1"/>
+          </a:fillRef>
+          <a:effectRef idx="2">
+            <a:schemeClr val="accent1"/>
+          </a:effectRef>
+          <a:fontRef idx="minor">
+            <a:schemeClr val="lt1"/>
+          </a:fontRef>
+        </p:style>
+        <p:txBody>
+          <a:bodyPr rtlCol="0" anchor="ctr"/>
+          <a:lstStyle/>
+          <a:p>
+            <a:pPr algn="ctr"/>
+            <a:endParaRPr/>
+          </a:p>
+        </p:txBody>
+      </p:sp>
+      <p:sp>
+        <p:nvSpPr>
+          <p:cNvPr id="12" name="TextBox 11"/>
+          <p:cNvSpPr txBox="1"/>
+          <p:nvPr/>
+        </p:nvSpPr>
+        <p:spPr>
+          <a:xfrm>
+            <a:off x="429768" y="2048256"/>
+            <a:ext cx="3392424" cy="237744"/>
           </a:xfrm>
           <a:prstGeom prst="rect">
             <a:avLst/>
@@ -16831,13 +17222,1563 @@
           <a:p>
             <a:pPr algn="l"/>
             <a:r>
-              <a:rPr sz="1400" b="0">
+              <a:rPr sz="1100" b="1">
                 <a:solidFill>
                   <a:srgbClr val="3F4444"/>
                 </a:solidFill>
                 <a:latin typeface="Calibri"/>
               </a:rPr>
-              <a:t>Stretch: apply unsupervised / generative models to discover novel TE families and link non-autonomous elements to drivers.</a:t>
+              <a:t>Models:</a:t>
+            </a:r>
+          </a:p>
+        </p:txBody>
+      </p:sp>
+      <p:sp>
+        <p:nvSpPr>
+          <p:cNvPr id="13" name="TextBox 12"/>
+          <p:cNvSpPr txBox="1"/>
+          <p:nvPr/>
+        </p:nvSpPr>
+        <p:spPr>
+          <a:xfrm>
+            <a:off x="502920" y="2286000"/>
+            <a:ext cx="3319272" cy="493776"/>
+          </a:xfrm>
+          <a:prstGeom prst="rect">
+            <a:avLst/>
+          </a:prstGeom>
+          <a:noFill/>
+        </p:spPr>
+        <p:txBody>
+          <a:bodyPr wrap="square">
+            <a:spAutoFit/>
+          </a:bodyPr>
+          <a:lstStyle/>
+          <a:p>
+            <a:pPr algn="l"/>
+            <a:r>
+              <a:rPr sz="1100" b="0">
+                <a:solidFill>
+                  <a:srgbClr val="3F4444"/>
+                </a:solidFill>
+                <a:latin typeface="Calibri"/>
+              </a:rPr>
+              <a:t>v3, v4, v4.1</a:t>
+            </a:r>
+          </a:p>
+        </p:txBody>
+      </p:sp>
+      <p:sp>
+        <p:nvSpPr>
+          <p:cNvPr id="14" name="TextBox 13"/>
+          <p:cNvSpPr txBox="1"/>
+          <p:nvPr/>
+        </p:nvSpPr>
+        <p:spPr>
+          <a:xfrm>
+            <a:off x="429768" y="2779776"/>
+            <a:ext cx="3392424" cy="237744"/>
+          </a:xfrm>
+          <a:prstGeom prst="rect">
+            <a:avLst/>
+          </a:prstGeom>
+          <a:noFill/>
+        </p:spPr>
+        <p:txBody>
+          <a:bodyPr wrap="square">
+            <a:spAutoFit/>
+          </a:bodyPr>
+          <a:lstStyle/>
+          <a:p>
+            <a:pPr algn="l"/>
+            <a:r>
+              <a:rPr sz="1100" b="1">
+                <a:solidFill>
+                  <a:srgbClr val="3F4444"/>
+                </a:solidFill>
+                <a:latin typeface="Calibri"/>
+              </a:rPr>
+              <a:t>Outer split:</a:t>
+            </a:r>
+          </a:p>
+        </p:txBody>
+      </p:sp>
+      <p:sp>
+        <p:nvSpPr>
+          <p:cNvPr id="15" name="TextBox 14"/>
+          <p:cNvSpPr txBox="1"/>
+          <p:nvPr/>
+        </p:nvSpPr>
+        <p:spPr>
+          <a:xfrm>
+            <a:off x="502920" y="3017520"/>
+            <a:ext cx="3319272" cy="493776"/>
+          </a:xfrm>
+          <a:prstGeom prst="rect">
+            <a:avLst/>
+          </a:prstGeom>
+          <a:noFill/>
+        </p:spPr>
+        <p:txBody>
+          <a:bodyPr wrap="square">
+            <a:spAutoFit/>
+          </a:bodyPr>
+          <a:lstStyle/>
+          <a:p>
+            <a:pPr algn="l"/>
+            <a:r>
+              <a:rPr sz="1100" b="0">
+                <a:solidFill>
+                  <a:srgbClr val="3F4444"/>
+                </a:solidFill>
+                <a:latin typeface="Calibri"/>
+              </a:rPr>
+              <a:t>Sequence-level shuffle
+80/20 ratio</a:t>
+            </a:r>
+          </a:p>
+        </p:txBody>
+      </p:sp>
+      <p:sp>
+        <p:nvSpPr>
+          <p:cNvPr id="16" name="TextBox 15"/>
+          <p:cNvSpPr txBox="1"/>
+          <p:nvPr/>
+        </p:nvSpPr>
+        <p:spPr>
+          <a:xfrm>
+            <a:off x="429768" y="3511296"/>
+            <a:ext cx="3392424" cy="237744"/>
+          </a:xfrm>
+          <a:prstGeom prst="rect">
+            <a:avLst/>
+          </a:prstGeom>
+          <a:noFill/>
+        </p:spPr>
+        <p:txBody>
+          <a:bodyPr wrap="square">
+            <a:spAutoFit/>
+          </a:bodyPr>
+          <a:lstStyle/>
+          <a:p>
+            <a:pPr algn="l"/>
+            <a:r>
+              <a:rPr sz="1100" b="1">
+                <a:solidFill>
+                  <a:srgbClr val="3F4444"/>
+                </a:solidFill>
+                <a:latin typeface="Calibri"/>
+              </a:rPr>
+              <a:t>Inner split:</a:t>
+            </a:r>
+          </a:p>
+        </p:txBody>
+      </p:sp>
+      <p:sp>
+        <p:nvSpPr>
+          <p:cNvPr id="17" name="TextBox 16"/>
+          <p:cNvSpPr txBox="1"/>
+          <p:nvPr/>
+        </p:nvSpPr>
+        <p:spPr>
+          <a:xfrm>
+            <a:off x="502920" y="3749040"/>
+            <a:ext cx="3319272" cy="493776"/>
+          </a:xfrm>
+          <a:prstGeom prst="rect">
+            <a:avLst/>
+          </a:prstGeom>
+          <a:noFill/>
+        </p:spPr>
+        <p:txBody>
+          <a:bodyPr wrap="square">
+            <a:spAutoFit/>
+          </a:bodyPr>
+          <a:lstStyle/>
+          <a:p>
+            <a:pPr algn="l"/>
+            <a:r>
+              <a:rPr sz="1100" b="0">
+                <a:solidFill>
+                  <a:srgbClr val="3F4444"/>
+                </a:solidFill>
+                <a:latin typeface="Calibri"/>
+              </a:rPr>
+              <a:t>Sequence rotating k-fold (k=5)</a:t>
+            </a:r>
+          </a:p>
+        </p:txBody>
+      </p:sp>
+      <p:sp>
+        <p:nvSpPr>
+          <p:cNvPr id="18" name="TextBox 17"/>
+          <p:cNvSpPr txBox="1"/>
+          <p:nvPr/>
+        </p:nvSpPr>
+        <p:spPr>
+          <a:xfrm>
+            <a:off x="429768" y="4242816"/>
+            <a:ext cx="3392424" cy="237744"/>
+          </a:xfrm>
+          <a:prstGeom prst="rect">
+            <a:avLst/>
+          </a:prstGeom>
+          <a:noFill/>
+        </p:spPr>
+        <p:txBody>
+          <a:bodyPr wrap="square">
+            <a:spAutoFit/>
+          </a:bodyPr>
+          <a:lstStyle/>
+          <a:p>
+            <a:pPr algn="l"/>
+            <a:r>
+              <a:rPr sz="1100" b="1">
+                <a:solidFill>
+                  <a:srgbClr val="3F4444"/>
+                </a:solidFill>
+                <a:latin typeface="Calibri"/>
+              </a:rPr>
+              <a:t>Train/val disjoint:</a:t>
+            </a:r>
+          </a:p>
+        </p:txBody>
+      </p:sp>
+      <p:sp>
+        <p:nvSpPr>
+          <p:cNvPr id="19" name="TextBox 18"/>
+          <p:cNvSpPr txBox="1"/>
+          <p:nvPr/>
+        </p:nvSpPr>
+        <p:spPr>
+          <a:xfrm>
+            <a:off x="502920" y="4480560"/>
+            <a:ext cx="3319272" cy="493776"/>
+          </a:xfrm>
+          <a:prstGeom prst="rect">
+            <a:avLst/>
+          </a:prstGeom>
+          <a:noFill/>
+        </p:spPr>
+        <p:txBody>
+          <a:bodyPr wrap="square">
+            <a:spAutoFit/>
+          </a:bodyPr>
+          <a:lstStyle/>
+          <a:p>
+            <a:pPr algn="l"/>
+            <a:r>
+              <a:rPr sz="1100" b="0">
+                <a:solidFill>
+                  <a:srgbClr val="3F4444"/>
+                </a:solidFill>
+                <a:latin typeface="Calibri"/>
+              </a:rPr>
+              <a:t>No</a:t>
+            </a:r>
+          </a:p>
+        </p:txBody>
+      </p:sp>
+      <p:sp>
+        <p:nvSpPr>
+          <p:cNvPr id="20" name="TextBox 19"/>
+          <p:cNvSpPr txBox="1"/>
+          <p:nvPr/>
+        </p:nvSpPr>
+        <p:spPr>
+          <a:xfrm>
+            <a:off x="429768" y="4974336"/>
+            <a:ext cx="3392424" cy="237744"/>
+          </a:xfrm>
+          <a:prstGeom prst="rect">
+            <a:avLst/>
+          </a:prstGeom>
+          <a:noFill/>
+        </p:spPr>
+        <p:txBody>
+          <a:bodyPr wrap="square">
+            <a:spAutoFit/>
+          </a:bodyPr>
+          <a:lstStyle/>
+          <a:p>
+            <a:pPr algn="l"/>
+            <a:r>
+              <a:rPr sz="1100" b="1">
+                <a:solidFill>
+                  <a:srgbClr val="3F4444"/>
+                </a:solidFill>
+                <a:latin typeface="Calibri"/>
+              </a:rPr>
+              <a:t>Train/test disjoint:</a:t>
+            </a:r>
+          </a:p>
+        </p:txBody>
+      </p:sp>
+      <p:sp>
+        <p:nvSpPr>
+          <p:cNvPr id="21" name="TextBox 20"/>
+          <p:cNvSpPr txBox="1"/>
+          <p:nvPr/>
+        </p:nvSpPr>
+        <p:spPr>
+          <a:xfrm>
+            <a:off x="502920" y="5212080"/>
+            <a:ext cx="3319272" cy="493776"/>
+          </a:xfrm>
+          <a:prstGeom prst="rect">
+            <a:avLst/>
+          </a:prstGeom>
+          <a:noFill/>
+        </p:spPr>
+        <p:txBody>
+          <a:bodyPr wrap="square">
+            <a:spAutoFit/>
+          </a:bodyPr>
+          <a:lstStyle/>
+          <a:p>
+            <a:pPr algn="l"/>
+            <a:r>
+              <a:rPr sz="1100" b="0">
+                <a:solidFill>
+                  <a:srgbClr val="3F4444"/>
+                </a:solidFill>
+                <a:latin typeface="Calibri"/>
+              </a:rPr>
+              <a:t>No</a:t>
+            </a:r>
+          </a:p>
+        </p:txBody>
+      </p:sp>
+      <p:sp>
+        <p:nvSpPr>
+          <p:cNvPr id="22" name="TextBox 21"/>
+          <p:cNvSpPr txBox="1"/>
+          <p:nvPr/>
+        </p:nvSpPr>
+        <p:spPr>
+          <a:xfrm>
+            <a:off x="429768" y="5705856"/>
+            <a:ext cx="3392424" cy="237744"/>
+          </a:xfrm>
+          <a:prstGeom prst="rect">
+            <a:avLst/>
+          </a:prstGeom>
+          <a:noFill/>
+        </p:spPr>
+        <p:txBody>
+          <a:bodyPr wrap="square">
+            <a:spAutoFit/>
+          </a:bodyPr>
+          <a:lstStyle/>
+          <a:p>
+            <a:pPr algn="l"/>
+            <a:r>
+              <a:rPr sz="1100" b="1">
+                <a:solidFill>
+                  <a:srgbClr val="3F4444"/>
+                </a:solidFill>
+                <a:latin typeface="Calibri"/>
+              </a:rPr>
+              <a:t>Purpose:</a:t>
+            </a:r>
+          </a:p>
+        </p:txBody>
+      </p:sp>
+      <p:sp>
+        <p:nvSpPr>
+          <p:cNvPr id="23" name="TextBox 22"/>
+          <p:cNvSpPr txBox="1"/>
+          <p:nvPr/>
+        </p:nvSpPr>
+        <p:spPr>
+          <a:xfrm>
+            <a:off x="502920" y="5943600"/>
+            <a:ext cx="3319272" cy="493776"/>
+          </a:xfrm>
+          <a:prstGeom prst="rect">
+            <a:avLst/>
+          </a:prstGeom>
+          <a:noFill/>
+        </p:spPr>
+        <p:txBody>
+          <a:bodyPr wrap="square">
+            <a:spAutoFit/>
+          </a:bodyPr>
+          <a:lstStyle/>
+          <a:p>
+            <a:pPr algn="l"/>
+            <a:r>
+              <a:rPr sz="1100" b="0">
+                <a:solidFill>
+                  <a:srgbClr val="3F4444"/>
+                </a:solidFill>
+                <a:latin typeface="Calibri"/>
+              </a:rPr>
+              <a:t>Confirm labels carry learnable
+signal; identify mislabels</a:t>
+            </a:r>
+          </a:p>
+        </p:txBody>
+      </p:sp>
+      <p:sp>
+        <p:nvSpPr>
+          <p:cNvPr id="24" name="Rectangle 23"/>
+          <p:cNvSpPr/>
+          <p:nvPr/>
+        </p:nvSpPr>
+        <p:spPr>
+          <a:xfrm>
+            <a:off x="4069080" y="1298448"/>
+            <a:ext cx="3611880" cy="4206240"/>
+          </a:xfrm>
+          <a:prstGeom prst="rect">
+            <a:avLst/>
+          </a:prstGeom>
+          <a:solidFill>
+            <a:srgbClr val="E8FFF0"/>
+          </a:solidFill>
+          <a:ln>
+            <a:noFill/>
+          </a:ln>
+        </p:spPr>
+        <p:style>
+          <a:lnRef idx="1">
+            <a:schemeClr val="accent1"/>
+          </a:lnRef>
+          <a:fillRef idx="3">
+            <a:schemeClr val="accent1"/>
+          </a:fillRef>
+          <a:effectRef idx="2">
+            <a:schemeClr val="accent1"/>
+          </a:effectRef>
+          <a:fontRef idx="minor">
+            <a:schemeClr val="lt1"/>
+          </a:fontRef>
+        </p:style>
+        <p:txBody>
+          <a:bodyPr rtlCol="0" anchor="ctr"/>
+          <a:lstStyle/>
+          <a:p>
+            <a:pPr algn="ctr"/>
+            <a:endParaRPr/>
+          </a:p>
+        </p:txBody>
+      </p:sp>
+      <p:sp>
+        <p:nvSpPr>
+          <p:cNvPr id="25" name="TextBox 24"/>
+          <p:cNvSpPr txBox="1"/>
+          <p:nvPr/>
+        </p:nvSpPr>
+        <p:spPr>
+          <a:xfrm>
+            <a:off x="4178808" y="1371600"/>
+            <a:ext cx="3392424" cy="548640"/>
+          </a:xfrm>
+          <a:prstGeom prst="rect">
+            <a:avLst/>
+          </a:prstGeom>
+          <a:noFill/>
+        </p:spPr>
+        <p:txBody>
+          <a:bodyPr wrap="square">
+            <a:spAutoFit/>
+          </a:bodyPr>
+          <a:lstStyle/>
+          <a:p>
+            <a:pPr algn="ctr"/>
+            <a:r>
+              <a:rPr sz="1400" b="1">
+                <a:solidFill>
+                  <a:srgbClr val="003865"/>
+                </a:solidFill>
+                <a:latin typeface="Calibri"/>
+              </a:rPr>
+              <a:t>Stage 2
+Species-Disjoint Outer</a:t>
+            </a:r>
+          </a:p>
+        </p:txBody>
+      </p:sp>
+      <p:sp>
+        <p:nvSpPr>
+          <p:cNvPr id="26" name="Rectangle 25"/>
+          <p:cNvSpPr/>
+          <p:nvPr/>
+        </p:nvSpPr>
+        <p:spPr>
+          <a:xfrm>
+            <a:off x="4069080" y="1938528"/>
+            <a:ext cx="3611880" cy="27432"/>
+          </a:xfrm>
+          <a:prstGeom prst="rect">
+            <a:avLst/>
+          </a:prstGeom>
+          <a:solidFill>
+            <a:srgbClr val="003865"/>
+          </a:solidFill>
+          <a:ln>
+            <a:noFill/>
+          </a:ln>
+        </p:spPr>
+        <p:style>
+          <a:lnRef idx="1">
+            <a:schemeClr val="accent1"/>
+          </a:lnRef>
+          <a:fillRef idx="3">
+            <a:schemeClr val="accent1"/>
+          </a:fillRef>
+          <a:effectRef idx="2">
+            <a:schemeClr val="accent1"/>
+          </a:effectRef>
+          <a:fontRef idx="minor">
+            <a:schemeClr val="lt1"/>
+          </a:fontRef>
+        </p:style>
+        <p:txBody>
+          <a:bodyPr rtlCol="0" anchor="ctr"/>
+          <a:lstStyle/>
+          <a:p>
+            <a:pPr algn="ctr"/>
+            <a:endParaRPr/>
+          </a:p>
+        </p:txBody>
+      </p:sp>
+      <p:sp>
+        <p:nvSpPr>
+          <p:cNvPr id="27" name="TextBox 26"/>
+          <p:cNvSpPr txBox="1"/>
+          <p:nvPr/>
+        </p:nvSpPr>
+        <p:spPr>
+          <a:xfrm>
+            <a:off x="4178808" y="2048256"/>
+            <a:ext cx="3392424" cy="237744"/>
+          </a:xfrm>
+          <a:prstGeom prst="rect">
+            <a:avLst/>
+          </a:prstGeom>
+          <a:noFill/>
+        </p:spPr>
+        <p:txBody>
+          <a:bodyPr wrap="square">
+            <a:spAutoFit/>
+          </a:bodyPr>
+          <a:lstStyle/>
+          <a:p>
+            <a:pPr algn="l"/>
+            <a:r>
+              <a:rPr sz="1100" b="1">
+                <a:solidFill>
+                  <a:srgbClr val="3F4444"/>
+                </a:solidFill>
+                <a:latin typeface="Calibri"/>
+              </a:rPr>
+              <a:t>Models:</a:t>
+            </a:r>
+          </a:p>
+        </p:txBody>
+      </p:sp>
+      <p:sp>
+        <p:nvSpPr>
+          <p:cNvPr id="28" name="TextBox 27"/>
+          <p:cNvSpPr txBox="1"/>
+          <p:nvPr/>
+        </p:nvSpPr>
+        <p:spPr>
+          <a:xfrm>
+            <a:off x="4251960" y="2286000"/>
+            <a:ext cx="3319272" cy="493776"/>
+          </a:xfrm>
+          <a:prstGeom prst="rect">
+            <a:avLst/>
+          </a:prstGeom>
+          <a:noFill/>
+        </p:spPr>
+        <p:txBody>
+          <a:bodyPr wrap="square">
+            <a:spAutoFit/>
+          </a:bodyPr>
+          <a:lstStyle/>
+          <a:p>
+            <a:pPr algn="l"/>
+            <a:r>
+              <a:rPr sz="1100" b="0">
+                <a:solidFill>
+                  <a:srgbClr val="3F4444"/>
+                </a:solidFill>
+                <a:latin typeface="Calibri"/>
+              </a:rPr>
+              <a:t>v4.2, v4.3</a:t>
+            </a:r>
+          </a:p>
+        </p:txBody>
+      </p:sp>
+      <p:sp>
+        <p:nvSpPr>
+          <p:cNvPr id="29" name="TextBox 28"/>
+          <p:cNvSpPr txBox="1"/>
+          <p:nvPr/>
+        </p:nvSpPr>
+        <p:spPr>
+          <a:xfrm>
+            <a:off x="4178808" y="2779776"/>
+            <a:ext cx="3392424" cy="237744"/>
+          </a:xfrm>
+          <a:prstGeom prst="rect">
+            <a:avLst/>
+          </a:prstGeom>
+          <a:noFill/>
+        </p:spPr>
+        <p:txBody>
+          <a:bodyPr wrap="square">
+            <a:spAutoFit/>
+          </a:bodyPr>
+          <a:lstStyle/>
+          <a:p>
+            <a:pPr algn="l"/>
+            <a:r>
+              <a:rPr sz="1100" b="1">
+                <a:solidFill>
+                  <a:srgbClr val="3F4444"/>
+                </a:solidFill>
+                <a:latin typeface="Calibri"/>
+              </a:rPr>
+              <a:t>Outer split:</a:t>
+            </a:r>
+          </a:p>
+        </p:txBody>
+      </p:sp>
+      <p:sp>
+        <p:nvSpPr>
+          <p:cNvPr id="30" name="TextBox 29"/>
+          <p:cNvSpPr txBox="1"/>
+          <p:nvPr/>
+        </p:nvSpPr>
+        <p:spPr>
+          <a:xfrm>
+            <a:off x="4251960" y="3017520"/>
+            <a:ext cx="3319272" cy="493776"/>
+          </a:xfrm>
+          <a:prstGeom prst="rect">
+            <a:avLst/>
+          </a:prstGeom>
+          <a:noFill/>
+        </p:spPr>
+        <p:txBody>
+          <a:bodyPr wrap="square">
+            <a:spAutoFit/>
+          </a:bodyPr>
+          <a:lstStyle/>
+          <a:p>
+            <a:pPr algn="l"/>
+            <a:r>
+              <a:rPr sz="1100" b="0">
+                <a:solidFill>
+                  <a:srgbClr val="3F4444"/>
+                </a:solidFill>
+                <a:latin typeface="Calibri"/>
+              </a:rPr>
+              <a:t>Species-level shuffle
++ mini-benchmark excised</a:t>
+            </a:r>
+          </a:p>
+        </p:txBody>
+      </p:sp>
+      <p:sp>
+        <p:nvSpPr>
+          <p:cNvPr id="31" name="TextBox 30"/>
+          <p:cNvSpPr txBox="1"/>
+          <p:nvPr/>
+        </p:nvSpPr>
+        <p:spPr>
+          <a:xfrm>
+            <a:off x="4178808" y="3511296"/>
+            <a:ext cx="3392424" cy="237744"/>
+          </a:xfrm>
+          <a:prstGeom prst="rect">
+            <a:avLst/>
+          </a:prstGeom>
+          <a:noFill/>
+        </p:spPr>
+        <p:txBody>
+          <a:bodyPr wrap="square">
+            <a:spAutoFit/>
+          </a:bodyPr>
+          <a:lstStyle/>
+          <a:p>
+            <a:pPr algn="l"/>
+            <a:r>
+              <a:rPr sz="1100" b="1">
+                <a:solidFill>
+                  <a:srgbClr val="3F4444"/>
+                </a:solidFill>
+                <a:latin typeface="Calibri"/>
+              </a:rPr>
+              <a:t>Inner split:</a:t>
+            </a:r>
+          </a:p>
+        </p:txBody>
+      </p:sp>
+      <p:sp>
+        <p:nvSpPr>
+          <p:cNvPr id="32" name="TextBox 31"/>
+          <p:cNvSpPr txBox="1"/>
+          <p:nvPr/>
+        </p:nvSpPr>
+        <p:spPr>
+          <a:xfrm>
+            <a:off x="4251960" y="3749040"/>
+            <a:ext cx="3319272" cy="493776"/>
+          </a:xfrm>
+          <a:prstGeom prst="rect">
+            <a:avLst/>
+          </a:prstGeom>
+          <a:noFill/>
+        </p:spPr>
+        <p:txBody>
+          <a:bodyPr wrap="square">
+            <a:spAutoFit/>
+          </a:bodyPr>
+          <a:lstStyle/>
+          <a:p>
+            <a:pPr algn="l"/>
+            <a:r>
+              <a:rPr sz="1100" b="0">
+                <a:solidFill>
+                  <a:srgbClr val="3F4444"/>
+                </a:solidFill>
+                <a:latin typeface="Calibri"/>
+              </a:rPr>
+              <a:t>Species rotating k-fold
+(val species recycle → inflated!)</a:t>
+            </a:r>
+          </a:p>
+        </p:txBody>
+      </p:sp>
+      <p:sp>
+        <p:nvSpPr>
+          <p:cNvPr id="33" name="TextBox 32"/>
+          <p:cNvSpPr txBox="1"/>
+          <p:nvPr/>
+        </p:nvSpPr>
+        <p:spPr>
+          <a:xfrm>
+            <a:off x="4178808" y="4242816"/>
+            <a:ext cx="3392424" cy="237744"/>
+          </a:xfrm>
+          <a:prstGeom prst="rect">
+            <a:avLst/>
+          </a:prstGeom>
+          <a:noFill/>
+        </p:spPr>
+        <p:txBody>
+          <a:bodyPr wrap="square">
+            <a:spAutoFit/>
+          </a:bodyPr>
+          <a:lstStyle/>
+          <a:p>
+            <a:pPr algn="l"/>
+            <a:r>
+              <a:rPr sz="1100" b="1">
+                <a:solidFill>
+                  <a:srgbClr val="3F4444"/>
+                </a:solidFill>
+                <a:latin typeface="Calibri"/>
+              </a:rPr>
+              <a:t>Train/val disjoint:</a:t>
+            </a:r>
+          </a:p>
+        </p:txBody>
+      </p:sp>
+      <p:sp>
+        <p:nvSpPr>
+          <p:cNvPr id="34" name="TextBox 33"/>
+          <p:cNvSpPr txBox="1"/>
+          <p:nvPr/>
+        </p:nvSpPr>
+        <p:spPr>
+          <a:xfrm>
+            <a:off x="4251960" y="4480560"/>
+            <a:ext cx="3319272" cy="493776"/>
+          </a:xfrm>
+          <a:prstGeom prst="rect">
+            <a:avLst/>
+          </a:prstGeom>
+          <a:noFill/>
+        </p:spPr>
+        <p:txBody>
+          <a:bodyPr wrap="square">
+            <a:spAutoFit/>
+          </a:bodyPr>
+          <a:lstStyle/>
+          <a:p>
+            <a:pPr algn="l"/>
+            <a:r>
+              <a:rPr sz="1100" b="0">
+                <a:solidFill>
+                  <a:srgbClr val="3F4444"/>
+                </a:solidFill>
+                <a:latin typeface="Calibri"/>
+              </a:rPr>
+              <a:t>No (per epoch only)</a:t>
+            </a:r>
+          </a:p>
+        </p:txBody>
+      </p:sp>
+      <p:sp>
+        <p:nvSpPr>
+          <p:cNvPr id="35" name="TextBox 34"/>
+          <p:cNvSpPr txBox="1"/>
+          <p:nvPr/>
+        </p:nvSpPr>
+        <p:spPr>
+          <a:xfrm>
+            <a:off x="4178808" y="4974336"/>
+            <a:ext cx="3392424" cy="237744"/>
+          </a:xfrm>
+          <a:prstGeom prst="rect">
+            <a:avLst/>
+          </a:prstGeom>
+          <a:noFill/>
+        </p:spPr>
+        <p:txBody>
+          <a:bodyPr wrap="square">
+            <a:spAutoFit/>
+          </a:bodyPr>
+          <a:lstStyle/>
+          <a:p>
+            <a:pPr algn="l"/>
+            <a:r>
+              <a:rPr sz="1100" b="1">
+                <a:solidFill>
+                  <a:srgbClr val="3F4444"/>
+                </a:solidFill>
+                <a:latin typeface="Calibri"/>
+              </a:rPr>
+              <a:t>Train/test disjoint:</a:t>
+            </a:r>
+          </a:p>
+        </p:txBody>
+      </p:sp>
+      <p:sp>
+        <p:nvSpPr>
+          <p:cNvPr id="36" name="TextBox 35"/>
+          <p:cNvSpPr txBox="1"/>
+          <p:nvPr/>
+        </p:nvSpPr>
+        <p:spPr>
+          <a:xfrm>
+            <a:off x="4251960" y="5212080"/>
+            <a:ext cx="3319272" cy="493776"/>
+          </a:xfrm>
+          <a:prstGeom prst="rect">
+            <a:avLst/>
+          </a:prstGeom>
+          <a:noFill/>
+        </p:spPr>
+        <p:txBody>
+          <a:bodyPr wrap="square">
+            <a:spAutoFit/>
+          </a:bodyPr>
+          <a:lstStyle/>
+          <a:p>
+            <a:pPr algn="l"/>
+            <a:r>
+              <a:rPr sz="1100" b="0">
+                <a:solidFill>
+                  <a:srgbClr val="3F4444"/>
+                </a:solidFill>
+                <a:latin typeface="Calibri"/>
+              </a:rPr>
+              <a:t>Yes</a:t>
+            </a:r>
+          </a:p>
+        </p:txBody>
+      </p:sp>
+      <p:sp>
+        <p:nvSpPr>
+          <p:cNvPr id="37" name="TextBox 36"/>
+          <p:cNvSpPr txBox="1"/>
+          <p:nvPr/>
+        </p:nvSpPr>
+        <p:spPr>
+          <a:xfrm>
+            <a:off x="4178808" y="5705856"/>
+            <a:ext cx="3392424" cy="237744"/>
+          </a:xfrm>
+          <a:prstGeom prst="rect">
+            <a:avLst/>
+          </a:prstGeom>
+          <a:noFill/>
+        </p:spPr>
+        <p:txBody>
+          <a:bodyPr wrap="square">
+            <a:spAutoFit/>
+          </a:bodyPr>
+          <a:lstStyle/>
+          <a:p>
+            <a:pPr algn="l"/>
+            <a:r>
+              <a:rPr sz="1100" b="1">
+                <a:solidFill>
+                  <a:srgbClr val="3F4444"/>
+                </a:solidFill>
+                <a:latin typeface="Calibri"/>
+              </a:rPr>
+              <a:t>Purpose:</a:t>
+            </a:r>
+          </a:p>
+        </p:txBody>
+      </p:sp>
+      <p:sp>
+        <p:nvSpPr>
+          <p:cNvPr id="38" name="TextBox 37"/>
+          <p:cNvSpPr txBox="1"/>
+          <p:nvPr/>
+        </p:nvSpPr>
+        <p:spPr>
+          <a:xfrm>
+            <a:off x="4251960" y="5943600"/>
+            <a:ext cx="3319272" cy="493776"/>
+          </a:xfrm>
+          <a:prstGeom prst="rect">
+            <a:avLst/>
+          </a:prstGeom>
+          <a:noFill/>
+        </p:spPr>
+        <p:txBody>
+          <a:bodyPr wrap="square">
+            <a:spAutoFit/>
+          </a:bodyPr>
+          <a:lstStyle/>
+          <a:p>
+            <a:pPr algn="l"/>
+            <a:r>
+              <a:rPr sz="1100" b="0">
+                <a:solidFill>
+                  <a:srgbClr val="3F4444"/>
+                </a:solidFill>
+                <a:latin typeface="Calibri"/>
+              </a:rPr>
+              <a:t>Measure cross-species
+generalisation; expose val leak</a:t>
+            </a:r>
+          </a:p>
+        </p:txBody>
+      </p:sp>
+      <p:sp>
+        <p:nvSpPr>
+          <p:cNvPr id="39" name="Rectangle 38"/>
+          <p:cNvSpPr/>
+          <p:nvPr/>
+        </p:nvSpPr>
+        <p:spPr>
+          <a:xfrm>
+            <a:off x="7818120" y="1298448"/>
+            <a:ext cx="3611880" cy="4206240"/>
+          </a:xfrm>
+          <a:prstGeom prst="rect">
+            <a:avLst/>
+          </a:prstGeom>
+          <a:solidFill>
+            <a:srgbClr val="FFF5E8"/>
+          </a:solidFill>
+          <a:ln>
+            <a:noFill/>
+          </a:ln>
+        </p:spPr>
+        <p:style>
+          <a:lnRef idx="1">
+            <a:schemeClr val="accent1"/>
+          </a:lnRef>
+          <a:fillRef idx="3">
+            <a:schemeClr val="accent1"/>
+          </a:fillRef>
+          <a:effectRef idx="2">
+            <a:schemeClr val="accent1"/>
+          </a:effectRef>
+          <a:fontRef idx="minor">
+            <a:schemeClr val="lt1"/>
+          </a:fontRef>
+        </p:style>
+        <p:txBody>
+          <a:bodyPr rtlCol="0" anchor="ctr"/>
+          <a:lstStyle/>
+          <a:p>
+            <a:pPr algn="ctr"/>
+            <a:endParaRPr/>
+          </a:p>
+        </p:txBody>
+      </p:sp>
+      <p:sp>
+        <p:nvSpPr>
+          <p:cNvPr id="40" name="TextBox 39"/>
+          <p:cNvSpPr txBox="1"/>
+          <p:nvPr/>
+        </p:nvSpPr>
+        <p:spPr>
+          <a:xfrm>
+            <a:off x="7927848" y="1371600"/>
+            <a:ext cx="3392424" cy="548640"/>
+          </a:xfrm>
+          <a:prstGeom prst="rect">
+            <a:avLst/>
+          </a:prstGeom>
+          <a:noFill/>
+        </p:spPr>
+        <p:txBody>
+          <a:bodyPr wrap="square">
+            <a:spAutoFit/>
+          </a:bodyPr>
+          <a:lstStyle/>
+          <a:p>
+            <a:pPr algn="ctr"/>
+            <a:r>
+              <a:rPr sz="1400" b="1">
+                <a:solidFill>
+                  <a:srgbClr val="003865"/>
+                </a:solidFill>
+                <a:latin typeface="Calibri"/>
+              </a:rPr>
+              <a:t>Stage 3
+Single-Fold Inner</a:t>
+            </a:r>
+          </a:p>
+        </p:txBody>
+      </p:sp>
+      <p:sp>
+        <p:nvSpPr>
+          <p:cNvPr id="41" name="Rectangle 40"/>
+          <p:cNvSpPr/>
+          <p:nvPr/>
+        </p:nvSpPr>
+        <p:spPr>
+          <a:xfrm>
+            <a:off x="7818120" y="1938528"/>
+            <a:ext cx="3611880" cy="27432"/>
+          </a:xfrm>
+          <a:prstGeom prst="rect">
+            <a:avLst/>
+          </a:prstGeom>
+          <a:solidFill>
+            <a:srgbClr val="003865"/>
+          </a:solidFill>
+          <a:ln>
+            <a:noFill/>
+          </a:ln>
+        </p:spPr>
+        <p:style>
+          <a:lnRef idx="1">
+            <a:schemeClr val="accent1"/>
+          </a:lnRef>
+          <a:fillRef idx="3">
+            <a:schemeClr val="accent1"/>
+          </a:fillRef>
+          <a:effectRef idx="2">
+            <a:schemeClr val="accent1"/>
+          </a:effectRef>
+          <a:fontRef idx="minor">
+            <a:schemeClr val="lt1"/>
+          </a:fontRef>
+        </p:style>
+        <p:txBody>
+          <a:bodyPr rtlCol="0" anchor="ctr"/>
+          <a:lstStyle/>
+          <a:p>
+            <a:pPr algn="ctr"/>
+            <a:endParaRPr/>
+          </a:p>
+        </p:txBody>
+      </p:sp>
+      <p:sp>
+        <p:nvSpPr>
+          <p:cNvPr id="42" name="TextBox 41"/>
+          <p:cNvSpPr txBox="1"/>
+          <p:nvPr/>
+        </p:nvSpPr>
+        <p:spPr>
+          <a:xfrm>
+            <a:off x="7927848" y="2048256"/>
+            <a:ext cx="3392424" cy="237744"/>
+          </a:xfrm>
+          <a:prstGeom prst="rect">
+            <a:avLst/>
+          </a:prstGeom>
+          <a:noFill/>
+        </p:spPr>
+        <p:txBody>
+          <a:bodyPr wrap="square">
+            <a:spAutoFit/>
+          </a:bodyPr>
+          <a:lstStyle/>
+          <a:p>
+            <a:pPr algn="l"/>
+            <a:r>
+              <a:rPr sz="1100" b="1">
+                <a:solidFill>
+                  <a:srgbClr val="3F4444"/>
+                </a:solidFill>
+                <a:latin typeface="Calibri"/>
+              </a:rPr>
+              <a:t>Models:</a:t>
+            </a:r>
+          </a:p>
+        </p:txBody>
+      </p:sp>
+      <p:sp>
+        <p:nvSpPr>
+          <p:cNvPr id="43" name="TextBox 42"/>
+          <p:cNvSpPr txBox="1"/>
+          <p:nvPr/>
+        </p:nvSpPr>
+        <p:spPr>
+          <a:xfrm>
+            <a:off x="8001000" y="2286000"/>
+            <a:ext cx="3319272" cy="493776"/>
+          </a:xfrm>
+          <a:prstGeom prst="rect">
+            <a:avLst/>
+          </a:prstGeom>
+          <a:noFill/>
+        </p:spPr>
+        <p:txBody>
+          <a:bodyPr wrap="square">
+            <a:spAutoFit/>
+          </a:bodyPr>
+          <a:lstStyle/>
+          <a:p>
+            <a:pPr algn="l"/>
+            <a:r>
+              <a:rPr sz="1100" b="0">
+                <a:solidFill>
+                  <a:srgbClr val="3F4444"/>
+                </a:solidFill>
+                <a:latin typeface="Calibri"/>
+              </a:rPr>
+              <a:t>v4.3-singlefold</a:t>
+            </a:r>
+          </a:p>
+        </p:txBody>
+      </p:sp>
+      <p:sp>
+        <p:nvSpPr>
+          <p:cNvPr id="44" name="TextBox 43"/>
+          <p:cNvSpPr txBox="1"/>
+          <p:nvPr/>
+        </p:nvSpPr>
+        <p:spPr>
+          <a:xfrm>
+            <a:off x="7927848" y="2779776"/>
+            <a:ext cx="3392424" cy="237744"/>
+          </a:xfrm>
+          <a:prstGeom prst="rect">
+            <a:avLst/>
+          </a:prstGeom>
+          <a:noFill/>
+        </p:spPr>
+        <p:txBody>
+          <a:bodyPr wrap="square">
+            <a:spAutoFit/>
+          </a:bodyPr>
+          <a:lstStyle/>
+          <a:p>
+            <a:pPr algn="l"/>
+            <a:r>
+              <a:rPr sz="1100" b="1">
+                <a:solidFill>
+                  <a:srgbClr val="3F4444"/>
+                </a:solidFill>
+                <a:latin typeface="Calibri"/>
+              </a:rPr>
+              <a:t>Outer split:</a:t>
+            </a:r>
+          </a:p>
+        </p:txBody>
+      </p:sp>
+      <p:sp>
+        <p:nvSpPr>
+          <p:cNvPr id="45" name="TextBox 44"/>
+          <p:cNvSpPr txBox="1"/>
+          <p:nvPr/>
+        </p:nvSpPr>
+        <p:spPr>
+          <a:xfrm>
+            <a:off x="8001000" y="3017520"/>
+            <a:ext cx="3319272" cy="493776"/>
+          </a:xfrm>
+          <a:prstGeom prst="rect">
+            <a:avLst/>
+          </a:prstGeom>
+          <a:noFill/>
+        </p:spPr>
+        <p:txBody>
+          <a:bodyPr wrap="square">
+            <a:spAutoFit/>
+          </a:bodyPr>
+          <a:lstStyle/>
+          <a:p>
+            <a:pPr algn="l"/>
+            <a:r>
+              <a:rPr sz="1100" b="0">
+                <a:solidFill>
+                  <a:srgbClr val="3F4444"/>
+                </a:solidFill>
+                <a:latin typeface="Calibri"/>
+              </a:rPr>
+              <a:t>Same as Stage 2</a:t>
+            </a:r>
+          </a:p>
+        </p:txBody>
+      </p:sp>
+      <p:sp>
+        <p:nvSpPr>
+          <p:cNvPr id="46" name="TextBox 45"/>
+          <p:cNvSpPr txBox="1"/>
+          <p:nvPr/>
+        </p:nvSpPr>
+        <p:spPr>
+          <a:xfrm>
+            <a:off x="7927848" y="3511296"/>
+            <a:ext cx="3392424" cy="237744"/>
+          </a:xfrm>
+          <a:prstGeom prst="rect">
+            <a:avLst/>
+          </a:prstGeom>
+          <a:noFill/>
+        </p:spPr>
+        <p:txBody>
+          <a:bodyPr wrap="square">
+            <a:spAutoFit/>
+          </a:bodyPr>
+          <a:lstStyle/>
+          <a:p>
+            <a:pPr algn="l"/>
+            <a:r>
+              <a:rPr sz="1100" b="1">
+                <a:solidFill>
+                  <a:srgbClr val="3F4444"/>
+                </a:solidFill>
+                <a:latin typeface="Calibri"/>
+              </a:rPr>
+              <a:t>Inner split:</a:t>
+            </a:r>
+          </a:p>
+        </p:txBody>
+      </p:sp>
+      <p:sp>
+        <p:nvSpPr>
+          <p:cNvPr id="47" name="TextBox 46"/>
+          <p:cNvSpPr txBox="1"/>
+          <p:nvPr/>
+        </p:nvSpPr>
+        <p:spPr>
+          <a:xfrm>
+            <a:off x="8001000" y="3749040"/>
+            <a:ext cx="3319272" cy="493776"/>
+          </a:xfrm>
+          <a:prstGeom prst="rect">
+            <a:avLst/>
+          </a:prstGeom>
+          <a:noFill/>
+        </p:spPr>
+        <p:txBody>
+          <a:bodyPr wrap="square">
+            <a:spAutoFit/>
+          </a:bodyPr>
+          <a:lstStyle/>
+          <a:p>
+            <a:pPr algn="l"/>
+            <a:r>
+              <a:rPr sz="1100" b="0">
+                <a:solidFill>
+                  <a:srgbClr val="3F4444"/>
+                </a:solidFill>
+                <a:latin typeface="Calibri"/>
+              </a:rPr>
+              <a:t>Single fixed species shuffle
+(fully disjoint throughout)</a:t>
+            </a:r>
+          </a:p>
+        </p:txBody>
+      </p:sp>
+      <p:sp>
+        <p:nvSpPr>
+          <p:cNvPr id="48" name="TextBox 47"/>
+          <p:cNvSpPr txBox="1"/>
+          <p:nvPr/>
+        </p:nvSpPr>
+        <p:spPr>
+          <a:xfrm>
+            <a:off x="7927848" y="4242816"/>
+            <a:ext cx="3392424" cy="237744"/>
+          </a:xfrm>
+          <a:prstGeom prst="rect">
+            <a:avLst/>
+          </a:prstGeom>
+          <a:noFill/>
+        </p:spPr>
+        <p:txBody>
+          <a:bodyPr wrap="square">
+            <a:spAutoFit/>
+          </a:bodyPr>
+          <a:lstStyle/>
+          <a:p>
+            <a:pPr algn="l"/>
+            <a:r>
+              <a:rPr sz="1100" b="1">
+                <a:solidFill>
+                  <a:srgbClr val="3F4444"/>
+                </a:solidFill>
+                <a:latin typeface="Calibri"/>
+              </a:rPr>
+              <a:t>Train/val disjoint:</a:t>
+            </a:r>
+          </a:p>
+        </p:txBody>
+      </p:sp>
+      <p:sp>
+        <p:nvSpPr>
+          <p:cNvPr id="49" name="TextBox 48"/>
+          <p:cNvSpPr txBox="1"/>
+          <p:nvPr/>
+        </p:nvSpPr>
+        <p:spPr>
+          <a:xfrm>
+            <a:off x="8001000" y="4480560"/>
+            <a:ext cx="3319272" cy="493776"/>
+          </a:xfrm>
+          <a:prstGeom prst="rect">
+            <a:avLst/>
+          </a:prstGeom>
+          <a:noFill/>
+        </p:spPr>
+        <p:txBody>
+          <a:bodyPr wrap="square">
+            <a:spAutoFit/>
+          </a:bodyPr>
+          <a:lstStyle/>
+          <a:p>
+            <a:pPr algn="l"/>
+            <a:r>
+              <a:rPr sz="1100" b="0">
+                <a:solidFill>
+                  <a:srgbClr val="3F4444"/>
+                </a:solidFill>
+                <a:latin typeface="Calibri"/>
+              </a:rPr>
+              <a:t>Yes ✓</a:t>
+            </a:r>
+          </a:p>
+        </p:txBody>
+      </p:sp>
+      <p:sp>
+        <p:nvSpPr>
+          <p:cNvPr id="50" name="TextBox 49"/>
+          <p:cNvSpPr txBox="1"/>
+          <p:nvPr/>
+        </p:nvSpPr>
+        <p:spPr>
+          <a:xfrm>
+            <a:off x="7927848" y="4974336"/>
+            <a:ext cx="3392424" cy="237744"/>
+          </a:xfrm>
+          <a:prstGeom prst="rect">
+            <a:avLst/>
+          </a:prstGeom>
+          <a:noFill/>
+        </p:spPr>
+        <p:txBody>
+          <a:bodyPr wrap="square">
+            <a:spAutoFit/>
+          </a:bodyPr>
+          <a:lstStyle/>
+          <a:p>
+            <a:pPr algn="l"/>
+            <a:r>
+              <a:rPr sz="1100" b="1">
+                <a:solidFill>
+                  <a:srgbClr val="3F4444"/>
+                </a:solidFill>
+                <a:latin typeface="Calibri"/>
+              </a:rPr>
+              <a:t>Train/test disjoint:</a:t>
+            </a:r>
+          </a:p>
+        </p:txBody>
+      </p:sp>
+      <p:sp>
+        <p:nvSpPr>
+          <p:cNvPr id="51" name="TextBox 50"/>
+          <p:cNvSpPr txBox="1"/>
+          <p:nvPr/>
+        </p:nvSpPr>
+        <p:spPr>
+          <a:xfrm>
+            <a:off x="8001000" y="5212080"/>
+            <a:ext cx="3319272" cy="493776"/>
+          </a:xfrm>
+          <a:prstGeom prst="rect">
+            <a:avLst/>
+          </a:prstGeom>
+          <a:noFill/>
+        </p:spPr>
+        <p:txBody>
+          <a:bodyPr wrap="square">
+            <a:spAutoFit/>
+          </a:bodyPr>
+          <a:lstStyle/>
+          <a:p>
+            <a:pPr algn="l"/>
+            <a:r>
+              <a:rPr sz="1100" b="0">
+                <a:solidFill>
+                  <a:srgbClr val="3F4444"/>
+                </a:solidFill>
+                <a:latin typeface="Calibri"/>
+              </a:rPr>
+              <a:t>Yes ✓</a:t>
+            </a:r>
+          </a:p>
+        </p:txBody>
+      </p:sp>
+      <p:sp>
+        <p:nvSpPr>
+          <p:cNvPr id="52" name="TextBox 51"/>
+          <p:cNvSpPr txBox="1"/>
+          <p:nvPr/>
+        </p:nvSpPr>
+        <p:spPr>
+          <a:xfrm>
+            <a:off x="7927848" y="5705856"/>
+            <a:ext cx="3392424" cy="237744"/>
+          </a:xfrm>
+          <a:prstGeom prst="rect">
+            <a:avLst/>
+          </a:prstGeom>
+          <a:noFill/>
+        </p:spPr>
+        <p:txBody>
+          <a:bodyPr wrap="square">
+            <a:spAutoFit/>
+          </a:bodyPr>
+          <a:lstStyle/>
+          <a:p>
+            <a:pPr algn="l"/>
+            <a:r>
+              <a:rPr sz="1100" b="1">
+                <a:solidFill>
+                  <a:srgbClr val="3F4444"/>
+                </a:solidFill>
+                <a:latin typeface="Calibri"/>
+              </a:rPr>
+              <a:t>Purpose:</a:t>
+            </a:r>
+          </a:p>
+        </p:txBody>
+      </p:sp>
+      <p:sp>
+        <p:nvSpPr>
+          <p:cNvPr id="53" name="TextBox 52"/>
+          <p:cNvSpPr txBox="1"/>
+          <p:nvPr/>
+        </p:nvSpPr>
+        <p:spPr>
+          <a:xfrm>
+            <a:off x="8001000" y="5943600"/>
+            <a:ext cx="3319272" cy="493776"/>
+          </a:xfrm>
+          <a:prstGeom prst="rect">
+            <a:avLst/>
+          </a:prstGeom>
+          <a:noFill/>
+        </p:spPr>
+        <p:txBody>
+          <a:bodyPr wrap="square">
+            <a:spAutoFit/>
+          </a:bodyPr>
+          <a:lstStyle/>
+          <a:p>
+            <a:pPr algn="l"/>
+            <a:r>
+              <a:rPr sz="1100" b="0">
+                <a:solidFill>
+                  <a:srgbClr val="3F4444"/>
+                </a:solidFill>
+                <a:latin typeface="Calibri"/>
+              </a:rPr>
+              <a:t>Most conservative estimate;
+val/test metrics aligned</a:t>
+            </a:r>
+          </a:p>
+        </p:txBody>
+      </p:sp>
+      <p:sp>
+        <p:nvSpPr>
+          <p:cNvPr id="54" name="TextBox 53"/>
+          <p:cNvSpPr txBox="1"/>
+          <p:nvPr/>
+        </p:nvSpPr>
+        <p:spPr>
+          <a:xfrm>
+            <a:off x="3941064" y="3218688"/>
+            <a:ext cx="182880" cy="365760"/>
+          </a:xfrm>
+          <a:prstGeom prst="rect">
+            <a:avLst/>
+          </a:prstGeom>
+          <a:noFill/>
+        </p:spPr>
+        <p:txBody>
+          <a:bodyPr wrap="square">
+            <a:spAutoFit/>
+          </a:bodyPr>
+          <a:lstStyle/>
+          <a:p>
+            <a:pPr algn="ctr"/>
+            <a:r>
+              <a:rPr sz="2200" b="1">
+                <a:solidFill>
+                  <a:srgbClr val="003865"/>
+                </a:solidFill>
+                <a:latin typeface="Calibri"/>
+              </a:rPr>
+              <a:t>→</a:t>
+            </a:r>
+          </a:p>
+        </p:txBody>
+      </p:sp>
+      <p:sp>
+        <p:nvSpPr>
+          <p:cNvPr id="55" name="TextBox 54"/>
+          <p:cNvSpPr txBox="1"/>
+          <p:nvPr/>
+        </p:nvSpPr>
+        <p:spPr>
+          <a:xfrm>
+            <a:off x="7690104" y="3218688"/>
+            <a:ext cx="182880" cy="365760"/>
+          </a:xfrm>
+          <a:prstGeom prst="rect">
+            <a:avLst/>
+          </a:prstGeom>
+          <a:noFill/>
+        </p:spPr>
+        <p:txBody>
+          <a:bodyPr wrap="square">
+            <a:spAutoFit/>
+          </a:bodyPr>
+          <a:lstStyle/>
+          <a:p>
+            <a:pPr algn="ctr"/>
+            <a:r>
+              <a:rPr sz="2200" b="1">
+                <a:solidFill>
+                  <a:srgbClr val="003865"/>
+                </a:solidFill>
+                <a:latin typeface="Calibri"/>
+              </a:rPr>
+              <a:t>→</a:t>
             </a:r>
           </a:p>
         </p:txBody>
@@ -16851,7 +18792,7 @@
 </file>
 
 <file path=ppt/slides/slide6.xml><?xml version="1.0" encoding="utf-8"?>
-<p:sld xmlns:a="http://schemas.openxmlformats.org/drawingml/2006/main" xmlns:p="http://schemas.openxmlformats.org/presentationml/2006/main" xmlns:r="http://schemas.openxmlformats.org/officeDocument/2006/relationships">
+<p:sld xmlns:a="http://schemas.openxmlformats.org/drawingml/2006/main" xmlns:r="http://schemas.openxmlformats.org/officeDocument/2006/relationships" xmlns:p="http://schemas.openxmlformats.org/presentationml/2006/main" show="0">
   <p:cSld>
     <p:spTree>
       <p:nvGrpSpPr>
@@ -16859,7 +18800,14 @@
         <p:cNvGrpSpPr/>
         <p:nvPr/>
       </p:nvGrpSpPr>
-      <p:grpSpPr/>
+      <p:grpSpPr>
+        <a:xfrm>
+          <a:off x="0" y="0"/>
+          <a:ext cx="0" cy="0"/>
+          <a:chOff x="0" y="0"/>
+          <a:chExt cx="0" cy="0"/>
+        </a:xfrm>
+      </p:grpSpPr>
       <p:sp>
         <p:nvSpPr>
           <p:cNvPr id="2" name="Rectangle 1"/>
@@ -16900,6 +18848,7 @@
           <a:lstStyle/>
           <a:p>
             <a:pPr algn="ctr"/>
+            <a:endParaRPr/>
           </a:p>
         </p:txBody>
       </p:sp>
@@ -16933,49 +18882,14 @@
                 </a:solidFill>
                 <a:latin typeface="Calibri"/>
               </a:rPr>
-              <a:t>Model Architecture: CNN + GNN Hybrid (v4)</a:t>
-            </a:r>
-          </a:p>
-        </p:txBody>
-      </p:sp>
-      <p:sp>
-        <p:nvSpPr>
-          <p:cNvPr id="4" name="TextBox 3"/>
-          <p:cNvSpPr txBox="1"/>
-          <p:nvPr/>
-        </p:nvSpPr>
-        <p:spPr>
-          <a:xfrm>
-            <a:off x="320040" y="804672"/>
-            <a:ext cx="11430000" cy="329184"/>
-          </a:xfrm>
-          <a:prstGeom prst="rect">
-            <a:avLst/>
-          </a:prstGeom>
-          <a:noFill/>
-        </p:spPr>
-        <p:txBody>
-          <a:bodyPr wrap="square">
-            <a:spAutoFit/>
-          </a:bodyPr>
-          <a:lstStyle/>
-          <a:p>
-            <a:pPr algn="l"/>
-            <a:r>
-              <a:rPr sz="1300" b="0">
-                <a:solidFill>
-                  <a:srgbClr val="68D2DF"/>
-                </a:solidFill>
-                <a:latin typeface="Calibri"/>
-              </a:rPr>
-              <a:t>Dual-branch encoder with attention gating and hierarchical classification heads</a:t>
-            </a:r>
-          </a:p>
-        </p:txBody>
-      </p:sp>
-      <p:sp>
-        <p:nvSpPr>
-          <p:cNvPr id="5" name="Rectangle 4"/>
+              <a:t>Project Goals</a:t>
+            </a:r>
+          </a:p>
+        </p:txBody>
+      </p:sp>
+      <p:sp>
+        <p:nvSpPr>
+          <p:cNvPr id="4" name="Rectangle 3"/>
           <p:cNvSpPr/>
           <p:nvPr/>
         </p:nvSpPr>
@@ -17013,12 +18927,13 @@
           <a:lstStyle/>
           <a:p>
             <a:pPr algn="ctr"/>
-          </a:p>
-        </p:txBody>
-      </p:sp>
-      <p:sp>
-        <p:nvSpPr>
-          <p:cNvPr id="6" name="Rectangle 5"/>
+            <a:endParaRPr/>
+          </a:p>
+        </p:txBody>
+      </p:sp>
+      <p:sp>
+        <p:nvSpPr>
+          <p:cNvPr id="5" name="Rectangle 4"/>
           <p:cNvSpPr/>
           <p:nvPr/>
         </p:nvSpPr>
@@ -17056,47 +18971,63 @@
           <a:lstStyle/>
           <a:p>
             <a:pPr algn="ctr"/>
+            <a:endParaRPr/>
+          </a:p>
+        </p:txBody>
+      </p:sp>
+      <p:sp>
+        <p:nvSpPr>
+          <p:cNvPr id="6" name="TextBox 5"/>
+          <p:cNvSpPr txBox="1"/>
+          <p:nvPr/>
+        </p:nvSpPr>
+        <p:spPr>
+          <a:xfrm>
+            <a:off x="228600" y="6510528"/>
+            <a:ext cx="10515600" cy="230832"/>
+          </a:xfrm>
+          <a:prstGeom prst="rect">
+            <a:avLst/>
+          </a:prstGeom>
+          <a:noFill/>
+        </p:spPr>
+        <p:txBody>
+          <a:bodyPr wrap="square">
+            <a:spAutoFit/>
+          </a:bodyPr>
+          <a:lstStyle/>
+          <a:p>
+            <a:pPr algn="l"/>
+            <a:r>
+              <a:rPr sz="900" b="0" dirty="0">
+                <a:solidFill>
+                  <a:srgbClr val="FFFFFF"/>
+                </a:solidFill>
+                <a:latin typeface="Calibri"/>
+              </a:rPr>
+              <a:t>Machine Learning a TE Classifier  |  Yingrui Yang  |  Cambridge Genetics </a:t>
+            </a:r>
+            <a:r>
+              <a:rPr lang="en-GB" sz="900" b="0" dirty="0">
+                <a:solidFill>
+                  <a:srgbClr val="FFFFFF"/>
+                </a:solidFill>
+                <a:latin typeface="Calibri"/>
+              </a:rPr>
+              <a:t>2026</a:t>
+            </a:r>
+            <a:endParaRPr sz="900" b="0" dirty="0">
+              <a:solidFill>
+                <a:srgbClr val="FFFFFF"/>
+              </a:solidFill>
+              <a:latin typeface="Calibri"/>
+            </a:endParaRPr>
           </a:p>
         </p:txBody>
       </p:sp>
       <p:sp>
         <p:nvSpPr>
           <p:cNvPr id="7" name="TextBox 6"/>
-          <p:cNvSpPr txBox="1"/>
-          <p:nvPr/>
-        </p:nvSpPr>
-        <p:spPr>
-          <a:xfrm>
-            <a:off x="228600" y="6510528"/>
-            <a:ext cx="10515600" cy="310896"/>
-          </a:xfrm>
-          <a:prstGeom prst="rect">
-            <a:avLst/>
-          </a:prstGeom>
-          <a:noFill/>
-        </p:spPr>
-        <p:txBody>
-          <a:bodyPr wrap="square">
-            <a:spAutoFit/>
-          </a:bodyPr>
-          <a:lstStyle/>
-          <a:p>
-            <a:pPr algn="l"/>
-            <a:r>
-              <a:rPr sz="900" b="0">
-                <a:solidFill>
-                  <a:srgbClr val="FFFFFF"/>
-                </a:solidFill>
-                <a:latin typeface="Calibri"/>
-              </a:rPr>
-              <a:t>Machine Learning a TE Classifier  |  Yingrui Yang  |  Cambridge Genetics 2025</a:t>
-            </a:r>
-          </a:p>
-        </p:txBody>
-      </p:sp>
-      <p:sp>
-        <p:nvSpPr>
-          <p:cNvPr id="8" name="TextBox 7"/>
           <p:cNvSpPr txBox="1"/>
           <p:nvPr/>
         </p:nvSpPr>
@@ -17124,21 +19055,21 @@
                 </a:solidFill>
                 <a:latin typeface="Calibri"/>
               </a:rPr>
-              <a:t>6</a:t>
-            </a:r>
-          </a:p>
-        </p:txBody>
-      </p:sp>
-      <p:sp>
-        <p:nvSpPr>
-          <p:cNvPr id="9" name="TextBox 8"/>
-          <p:cNvSpPr txBox="1"/>
-          <p:nvPr/>
-        </p:nvSpPr>
-        <p:spPr>
-          <a:xfrm>
-            <a:off x="320040" y="1298448"/>
-            <a:ext cx="7589520" cy="4389120"/>
+              <a:t>5</a:t>
+            </a:r>
+          </a:p>
+        </p:txBody>
+      </p:sp>
+      <p:sp>
+        <p:nvSpPr>
+          <p:cNvPr id="8" name="TextBox 7"/>
+          <p:cNvSpPr txBox="1"/>
+          <p:nvPr/>
+        </p:nvSpPr>
+        <p:spPr>
+          <a:xfrm>
+            <a:off x="320040" y="1389888"/>
+            <a:ext cx="11548872" cy="4023360"/>
           </a:xfrm>
           <a:prstGeom prst="rect">
             <a:avLst/>
@@ -17153,135 +19084,154 @@
           <a:p>
             <a:pPr algn="l">
               <a:lnSpc>
-                <a:spcPct val="125000"/>
+                <a:spcPct val="140000"/>
               </a:lnSpc>
               <a:spcBef>
-                <a:spcPts val="90"/>
+                <a:spcPts val="100"/>
               </a:spcBef>
             </a:pPr>
             <a:r>
-              <a:rPr sz="1400">
+              <a:rPr sz="1800">
                 <a:solidFill>
                   <a:srgbClr val="3F4444"/>
                 </a:solidFill>
                 <a:latin typeface="Calibri"/>
               </a:rPr>
-              <a:t>▪ CNN Tower: 3 parallel branches (kernels 7/15/21 bp, 128 maps) → 4 dilated blocks (dilation 1–8, GELU, BN, dropout 0.15, residual) → masked global-avg pool → 128-dim embedding</a:t>
+              <a:t>▪ Build machine learning models to classify TE sequences collected by Pantera</a:t>
             </a:r>
           </a:p>
           <a:p>
             <a:pPr algn="l">
               <a:lnSpc>
-                <a:spcPct val="125000"/>
+                <a:spcPct val="140000"/>
               </a:lnSpc>
               <a:spcBef>
-                <a:spcPts val="90"/>
+                <a:spcPts val="100"/>
               </a:spcBef>
             </a:pPr>
             <a:r>
-              <a:rPr sz="1400">
+              <a:rPr sz="1800">
                 <a:solidFill>
                   <a:srgbClr val="3F4444"/>
                 </a:solidFill>
                 <a:latin typeface="Calibri"/>
               </a:rPr>
-              <a:t>▪ GNN Branch: 512 bp windows (50% overlap) → canonical 7-mer histogram (2048-dim hash) → chain graph → 3-layer GraphSAGE → scatter-mean pool → 128-dim embedding</a:t>
+              <a:t>▪ Implement CNN to capture local sequence motifs (TIR signals, internal repeats) via one-hot encoding</a:t>
             </a:r>
           </a:p>
           <a:p>
             <a:pPr algn="l">
               <a:lnSpc>
-                <a:spcPct val="125000"/>
+                <a:spcPct val="140000"/>
               </a:lnSpc>
               <a:spcBef>
-                <a:spcPts val="90"/>
+                <a:spcPts val="100"/>
               </a:spcBef>
             </a:pPr>
             <a:r>
-              <a:rPr sz="1400">
+              <a:rPr sz="1800">
                 <a:solidFill>
                   <a:srgbClr val="3F4444"/>
                 </a:solidFill>
                 <a:latin typeface="Calibri"/>
               </a:rPr>
-              <a:t>▪ Attention Gate: per-input 2-element softmax over CNN vs. GNN branches (convex combination, learned per sequence)</a:t>
+              <a:t>▪ Implement k-mer GNN to exploit global compositional patterns across the sequence</a:t>
             </a:r>
           </a:p>
           <a:p>
             <a:pPr algn="l">
               <a:lnSpc>
-                <a:spcPct val="125000"/>
+                <a:spcPct val="140000"/>
               </a:lnSpc>
               <a:spcBef>
-                <a:spcPts val="90"/>
+                <a:spcPts val="100"/>
               </a:spcBef>
             </a:pPr>
             <a:r>
-              <a:rPr sz="1400">
+              <a:rPr sz="1800">
                 <a:solidFill>
                   <a:srgbClr val="3F4444"/>
                 </a:solidFill>
                 <a:latin typeface="Calibri"/>
               </a:rPr>
-              <a:t>▪ RC Invariance: forward + reverse-complement views averaged before heads — no extra parameters</a:t>
+              <a:t>▪ Incorporate attention-based fusion to balance both modalities adaptively per input</a:t>
             </a:r>
           </a:p>
           <a:p>
             <a:pPr algn="l">
               <a:lnSpc>
-                <a:spcPct val="125000"/>
+                <a:spcPct val="140000"/>
               </a:lnSpc>
               <a:spcBef>
-                <a:spcPts val="90"/>
+                <a:spcPts val="100"/>
               </a:spcBef>
             </a:pPr>
             <a:r>
-              <a:rPr sz="1400">
+              <a:rPr sz="1800">
                 <a:solidFill>
                   <a:srgbClr val="3F4444"/>
                 </a:solidFill>
                 <a:latin typeface="Calibri"/>
               </a:rPr>
-              <a:t>▪ Hierarchical Heads: top-level (binary or 3-class DNA/LTR/LINE) + superfamily head (7 or 23 classes, masked loss)</a:t>
+              <a:t>▪ Design hierarchical classification heads (top-level class + superfamily) mirroring TE biology</a:t>
             </a:r>
           </a:p>
           <a:p>
             <a:pPr algn="l">
               <a:lnSpc>
-                <a:spcPct val="125000"/>
+                <a:spcPct val="140000"/>
               </a:lnSpc>
               <a:spcBef>
-                <a:spcPts val="90"/>
+                <a:spcPts val="100"/>
               </a:spcBef>
             </a:pPr>
             <a:r>
-              <a:rPr sz="1400">
+              <a:rPr sz="1800">
                 <a:solidFill>
                   <a:srgbClr val="3F4444"/>
                 </a:solidFill>
                 <a:latin typeface="Calibri"/>
               </a:rPr>
-              <a:t>▪ Boundary Regression: auxiliary MLP predicts normalised start/end/length on canvas (MSE, weight 0.1)</a:t>
-            </a:r>
-          </a:p>
-        </p:txBody>
-      </p:sp>
-      <p:sp>
-        <p:nvSpPr>
-          <p:cNvPr id="10" name="Rectangle 9"/>
+              <a:t>▪ Evaluate cross-species generalisation with a species-disjoint mini-benchmark (3 amniote genomes)</a:t>
+            </a:r>
+          </a:p>
+          <a:p>
+            <a:pPr algn="l">
+              <a:lnSpc>
+                <a:spcPct val="140000"/>
+              </a:lnSpc>
+              <a:spcBef>
+                <a:spcPts val="100"/>
+              </a:spcBef>
+            </a:pPr>
+            <a:r>
+              <a:rPr sz="1800">
+                <a:solidFill>
+                  <a:srgbClr val="3F4444"/>
+                </a:solidFill>
+                <a:latin typeface="Calibri"/>
+              </a:rPr>
+              <a:t>▪ Use interpretability tools (saliency, contrastive clustering) to probe learned representations</a:t>
+            </a:r>
+          </a:p>
+        </p:txBody>
+      </p:sp>
+      <p:sp>
+        <p:nvSpPr>
+          <p:cNvPr id="9" name="Rectangle 8"/>
           <p:cNvSpPr/>
           <p:nvPr/>
         </p:nvSpPr>
         <p:spPr>
           <a:xfrm>
-            <a:off x="8046720" y="1298448"/>
-            <a:ext cx="3840480" cy="4389120"/>
+            <a:off x="0" y="5852160"/>
+            <a:ext cx="12188952" cy="621792"/>
           </a:xfrm>
           <a:prstGeom prst="rect">
             <a:avLst/>
           </a:prstGeom>
           <a:solidFill>
-            <a:srgbClr val="E8F4FF"/>
+            <a:srgbClr val="FFF5E0"/>
           </a:solidFill>
           <a:ln>
             <a:noFill/>
@@ -17306,19 +19256,20 @@
           <a:lstStyle/>
           <a:p>
             <a:pPr algn="ctr"/>
-          </a:p>
-        </p:txBody>
-      </p:sp>
-      <p:sp>
-        <p:nvSpPr>
-          <p:cNvPr id="11" name="TextBox 10"/>
-          <p:cNvSpPr txBox="1"/>
-          <p:nvPr/>
-        </p:nvSpPr>
-        <p:spPr>
-          <a:xfrm>
-            <a:off x="8183879" y="1408176"/>
-            <a:ext cx="3566160" cy="347472"/>
+            <a:endParaRPr/>
+          </a:p>
+        </p:txBody>
+      </p:sp>
+      <p:sp>
+        <p:nvSpPr>
+          <p:cNvPr id="10" name="TextBox 9"/>
+          <p:cNvSpPr txBox="1"/>
+          <p:nvPr/>
+        </p:nvSpPr>
+        <p:spPr>
+          <a:xfrm>
+            <a:off x="320040" y="5925312"/>
+            <a:ext cx="11548872" cy="512064"/>
           </a:xfrm>
           <a:prstGeom prst="rect">
             <a:avLst/>
@@ -17333,169 +19284,13 @@
           <a:p>
             <a:pPr algn="l"/>
             <a:r>
-              <a:rPr sz="1400" b="1">
-                <a:solidFill>
-                  <a:srgbClr val="003865"/>
-                </a:solidFill>
-                <a:latin typeface="Calibri"/>
-              </a:rPr>
-              <a:t>Training Setup</a:t>
-            </a:r>
-          </a:p>
-        </p:txBody>
-      </p:sp>
-      <p:sp>
-        <p:nvSpPr>
-          <p:cNvPr id="12" name="TextBox 11"/>
-          <p:cNvSpPr txBox="1"/>
-          <p:nvPr/>
-        </p:nvSpPr>
-        <p:spPr>
-          <a:xfrm>
-            <a:off x="8183879" y="1792224"/>
-            <a:ext cx="3566160" cy="3657600"/>
-          </a:xfrm>
-          <a:prstGeom prst="rect">
-            <a:avLst/>
-          </a:prstGeom>
-          <a:noFill/>
-        </p:spPr>
-        <p:txBody>
-          <a:bodyPr wrap="square">
-            <a:spAutoFit/>
-          </a:bodyPr>
-          <a:lstStyle/>
-          <a:p>
-            <a:pPr algn="l">
-              <a:lnSpc>
-                <a:spcPct val="118000"/>
-              </a:lnSpc>
-              <a:spcBef>
-                <a:spcPts val="70"/>
-              </a:spcBef>
-            </a:pPr>
-            <a:r>
-              <a:rPr sz="1300">
+              <a:rPr sz="1400" b="0">
                 <a:solidFill>
                   <a:srgbClr val="3F4444"/>
                 </a:solidFill>
                 <a:latin typeface="Calibri"/>
               </a:rPr>
-              <a:t>• AdamW, lr = 1e-3, cosine annealing</a:t>
-            </a:r>
-          </a:p>
-          <a:p>
-            <a:pPr algn="l">
-              <a:lnSpc>
-                <a:spcPct val="118000"/>
-              </a:lnSpc>
-              <a:spcBef>
-                <a:spcPts val="70"/>
-              </a:spcBef>
-            </a:pPr>
-            <a:r>
-              <a:rPr sz="1300">
-                <a:solidFill>
-                  <a:srgbClr val="3F4444"/>
-                </a:solidFill>
-                <a:latin typeface="Calibri"/>
-              </a:rPr>
-              <a:t>• Batch: 16 (hybrid), 32 (CNN-only)</a:t>
-            </a:r>
-          </a:p>
-          <a:p>
-            <a:pPr algn="l">
-              <a:lnSpc>
-                <a:spcPct val="118000"/>
-              </a:lnSpc>
-              <a:spcBef>
-                <a:spcPts val="70"/>
-              </a:spcBef>
-            </a:pPr>
-            <a:r>
-              <a:rPr sz="1300">
-                <a:solidFill>
-                  <a:srgbClr val="3F4444"/>
-                </a:solidFill>
-                <a:latin typeface="Calibri"/>
-              </a:rPr>
-              <a:t>• Canvas: 40 kb, random placement</a:t>
-            </a:r>
-          </a:p>
-          <a:p>
-            <a:pPr algn="l">
-              <a:lnSpc>
-                <a:spcPct val="118000"/>
-              </a:lnSpc>
-              <a:spcBef>
-                <a:spcPts val="70"/>
-              </a:spcBef>
-            </a:pPr>
-            <a:r>
-              <a:rPr sz="1300">
-                <a:solidFill>
-                  <a:srgbClr val="3F4444"/>
-                </a:solidFill>
-                <a:latin typeface="Calibri"/>
-              </a:rPr>
-              <a:t>• Dropout: 0.15, label smooth: 0.1</a:t>
-            </a:r>
-          </a:p>
-          <a:p>
-            <a:pPr algn="l">
-              <a:lnSpc>
-                <a:spcPct val="118000"/>
-              </a:lnSpc>
-              <a:spcBef>
-                <a:spcPts val="70"/>
-              </a:spcBef>
-            </a:pPr>
-            <a:r>
-              <a:rPr sz="1300">
-                <a:solidFill>
-                  <a:srgbClr val="3F4444"/>
-                </a:solidFill>
-                <a:latin typeface="Calibri"/>
-              </a:rPr>
-              <a:t>• Early stop: patience 10, cap 40 ep</a:t>
-            </a:r>
-          </a:p>
-          <a:p>
-            <a:pPr algn="l">
-              <a:lnSpc>
-                <a:spcPct val="118000"/>
-              </a:lnSpc>
-              <a:spcBef>
-                <a:spcPts val="70"/>
-              </a:spcBef>
-            </a:pPr>
-            <a:r>
-              <a:rPr sz="1300">
-                <a:solidFill>
-                  <a:srgbClr val="3F4444"/>
-                </a:solidFill>
-                <a:latin typeface="Calibri"/>
-              </a:rPr>
-              <a:t>• Hardware: Apple MPS / NVIDIA A100</a:t>
-            </a:r>
-          </a:p>
-          <a:p>
-            <a:pPr algn="l">
-              <a:lnSpc>
-                <a:spcPct val="118000"/>
-              </a:lnSpc>
-              <a:spcBef>
-                <a:spcPts val="70"/>
-              </a:spcBef>
-            </a:pPr>
-            <a:r>
-              <a:rPr sz="1300">
-                <a:solidFill>
-                  <a:srgbClr val="3F4444"/>
-                </a:solidFill>
-                <a:latin typeface="Calibri"/>
-              </a:rPr>
-              <a:t>• Framework: PyTorch 2.0+</a:t>
+              <a:t>Stretch: apply unsupervised / generative models to discover novel TE families and link non-autonomous elements to drivers.</a:t>
             </a:r>
           </a:p>
         </p:txBody>
@@ -17509,7 +19304,7 @@
 </file>
 
 <file path=ppt/slides/slide7.xml><?xml version="1.0" encoding="utf-8"?>
-<p:sld xmlns:a="http://schemas.openxmlformats.org/drawingml/2006/main" xmlns:p="http://schemas.openxmlformats.org/presentationml/2006/main" xmlns:r="http://schemas.openxmlformats.org/officeDocument/2006/relationships">
+<p:sld xmlns:a="http://schemas.openxmlformats.org/drawingml/2006/main" xmlns:r="http://schemas.openxmlformats.org/officeDocument/2006/relationships" xmlns:p="http://schemas.openxmlformats.org/presentationml/2006/main">
   <p:cSld>
     <p:spTree>
       <p:nvGrpSpPr>
@@ -17517,7 +19312,14 @@
         <p:cNvGrpSpPr/>
         <p:nvPr/>
       </p:nvGrpSpPr>
-      <p:grpSpPr/>
+      <p:grpSpPr>
+        <a:xfrm>
+          <a:off x="0" y="0"/>
+          <a:ext cx="0" cy="0"/>
+          <a:chOff x="0" y="0"/>
+          <a:chExt cx="0" cy="0"/>
+        </a:xfrm>
+      </p:grpSpPr>
       <p:sp>
         <p:nvSpPr>
           <p:cNvPr id="2" name="Rectangle 1"/>
@@ -17558,6 +19360,7 @@
           <a:lstStyle/>
           <a:p>
             <a:pPr algn="ctr"/>
+            <a:endParaRPr/>
           </a:p>
         </p:txBody>
       </p:sp>
@@ -17591,7 +19394,7 @@
                 </a:solidFill>
                 <a:latin typeface="Calibri"/>
               </a:rPr>
-              <a:t>Three-Stage Evaluation Protocol</a:t>
+              <a:t>Model Architecture: CNN + GNN Hybrid (v4)</a:t>
             </a:r>
           </a:p>
         </p:txBody>
@@ -17626,7 +19429,7 @@
                 </a:solidFill>
                 <a:latin typeface="Calibri"/>
               </a:rPr>
-              <a:t>Progressively stricter data splits — separating architecture effects from evaluation artefacts</a:t>
+              <a:t>Dual-branch encoder with attention gating and hierarchical classification heads</a:t>
             </a:r>
           </a:p>
         </p:txBody>
@@ -17671,6 +19474,7 @@
           <a:lstStyle/>
           <a:p>
             <a:pPr algn="ctr"/>
+            <a:endParaRPr/>
           </a:p>
         </p:txBody>
       </p:sp>
@@ -17714,6 +19518,7 @@
           <a:lstStyle/>
           <a:p>
             <a:pPr algn="ctr"/>
+            <a:endParaRPr/>
           </a:p>
         </p:txBody>
       </p:sp>
@@ -17726,7 +19531,7 @@
         <p:spPr>
           <a:xfrm>
             <a:off x="228600" y="6510528"/>
-            <a:ext cx="10515600" cy="310896"/>
+            <a:ext cx="10515600" cy="230832"/>
           </a:xfrm>
           <a:prstGeom prst="rect">
             <a:avLst/>
@@ -17741,14 +19546,29 @@
           <a:p>
             <a:pPr algn="l"/>
             <a:r>
-              <a:rPr sz="900" b="0">
+              <a:rPr sz="900" b="0" dirty="0">
                 <a:solidFill>
                   <a:srgbClr val="FFFFFF"/>
                 </a:solidFill>
                 <a:latin typeface="Calibri"/>
               </a:rPr>
-              <a:t>Machine Learning a TE Classifier  |  Yingrui Yang  |  Cambridge Genetics 2025</a:t>
-            </a:r>
+              <a:t>Machine Learning a TE Classifier  |  Yingrui Yang  |  Cambridge Genetics </a:t>
+            </a:r>
+            <a:r>
+              <a:rPr lang="en-GB" sz="900" b="0" dirty="0">
+                <a:solidFill>
+                  <a:srgbClr val="FFFFFF"/>
+                </a:solidFill>
+                <a:latin typeface="Calibri"/>
+              </a:rPr>
+              <a:t>2026</a:t>
+            </a:r>
+            <a:endParaRPr sz="900" b="0" dirty="0">
+              <a:solidFill>
+                <a:srgbClr val="FFFFFF"/>
+              </a:solidFill>
+              <a:latin typeface="Calibri"/>
+            </a:endParaRPr>
           </a:p>
         </p:txBody>
       </p:sp>
@@ -17782,21 +19602,158 @@
                 </a:solidFill>
                 <a:latin typeface="Calibri"/>
               </a:rPr>
-              <a:t>7</a:t>
-            </a:r>
-          </a:p>
-        </p:txBody>
-      </p:sp>
-      <p:sp>
-        <p:nvSpPr>
-          <p:cNvPr id="9" name="Rectangle 8"/>
+              <a:t>6</a:t>
+            </a:r>
+          </a:p>
+        </p:txBody>
+      </p:sp>
+      <p:sp>
+        <p:nvSpPr>
+          <p:cNvPr id="9" name="TextBox 8"/>
+          <p:cNvSpPr txBox="1"/>
+          <p:nvPr/>
+        </p:nvSpPr>
+        <p:spPr>
+          <a:xfrm>
+            <a:off x="320040" y="1298448"/>
+            <a:ext cx="7589520" cy="4389120"/>
+          </a:xfrm>
+          <a:prstGeom prst="rect">
+            <a:avLst/>
+          </a:prstGeom>
+          <a:noFill/>
+        </p:spPr>
+        <p:txBody>
+          <a:bodyPr wrap="square">
+            <a:spAutoFit/>
+          </a:bodyPr>
+          <a:lstStyle/>
+          <a:p>
+            <a:pPr algn="l">
+              <a:lnSpc>
+                <a:spcPct val="125000"/>
+              </a:lnSpc>
+              <a:spcBef>
+                <a:spcPts val="90"/>
+              </a:spcBef>
+            </a:pPr>
+            <a:r>
+              <a:rPr sz="1400">
+                <a:solidFill>
+                  <a:srgbClr val="3F4444"/>
+                </a:solidFill>
+                <a:latin typeface="Calibri"/>
+              </a:rPr>
+              <a:t>▪ CNN Tower: 3 parallel branches (kernels 7/15/21 bp, 128 maps) → 4 dilated blocks (dilation 1–8, GELU, BN, dropout 0.15, residual) → masked global-avg pool → 128-dim embedding</a:t>
+            </a:r>
+          </a:p>
+          <a:p>
+            <a:pPr algn="l">
+              <a:lnSpc>
+                <a:spcPct val="125000"/>
+              </a:lnSpc>
+              <a:spcBef>
+                <a:spcPts val="90"/>
+              </a:spcBef>
+            </a:pPr>
+            <a:r>
+              <a:rPr sz="1400">
+                <a:solidFill>
+                  <a:srgbClr val="3F4444"/>
+                </a:solidFill>
+                <a:latin typeface="Calibri"/>
+              </a:rPr>
+              <a:t>▪ GNN Branch: 512 bp windows (50% overlap) → canonical 7-mer histogram (2048-dim hash) → chain graph → 3-layer GraphSAGE → scatter-mean pool → 128-dim embedding</a:t>
+            </a:r>
+          </a:p>
+          <a:p>
+            <a:pPr algn="l">
+              <a:lnSpc>
+                <a:spcPct val="125000"/>
+              </a:lnSpc>
+              <a:spcBef>
+                <a:spcPts val="90"/>
+              </a:spcBef>
+            </a:pPr>
+            <a:r>
+              <a:rPr sz="1400">
+                <a:solidFill>
+                  <a:srgbClr val="3F4444"/>
+                </a:solidFill>
+                <a:latin typeface="Calibri"/>
+              </a:rPr>
+              <a:t>▪ Attention Gate: per-input 2-element softmax over CNN vs. GNN branches (convex combination, learned per sequence)</a:t>
+            </a:r>
+          </a:p>
+          <a:p>
+            <a:pPr algn="l">
+              <a:lnSpc>
+                <a:spcPct val="125000"/>
+              </a:lnSpc>
+              <a:spcBef>
+                <a:spcPts val="90"/>
+              </a:spcBef>
+            </a:pPr>
+            <a:r>
+              <a:rPr sz="1400">
+                <a:solidFill>
+                  <a:srgbClr val="3F4444"/>
+                </a:solidFill>
+                <a:latin typeface="Calibri"/>
+              </a:rPr>
+              <a:t>▪ RC Invariance: forward + reverse-complement views averaged before heads — no extra parameters</a:t>
+            </a:r>
+          </a:p>
+          <a:p>
+            <a:pPr algn="l">
+              <a:lnSpc>
+                <a:spcPct val="125000"/>
+              </a:lnSpc>
+              <a:spcBef>
+                <a:spcPts val="90"/>
+              </a:spcBef>
+            </a:pPr>
+            <a:r>
+              <a:rPr sz="1400">
+                <a:solidFill>
+                  <a:srgbClr val="3F4444"/>
+                </a:solidFill>
+                <a:latin typeface="Calibri"/>
+              </a:rPr>
+              <a:t>▪ Hierarchical Heads: top-level (binary or 3-class DNA/LTR/LINE) + superfamily head (7 or 23 classes, masked loss)</a:t>
+            </a:r>
+          </a:p>
+          <a:p>
+            <a:pPr algn="l">
+              <a:lnSpc>
+                <a:spcPct val="125000"/>
+              </a:lnSpc>
+              <a:spcBef>
+                <a:spcPts val="90"/>
+              </a:spcBef>
+            </a:pPr>
+            <a:r>
+              <a:rPr sz="1400">
+                <a:solidFill>
+                  <a:srgbClr val="3F4444"/>
+                </a:solidFill>
+                <a:latin typeface="Calibri"/>
+              </a:rPr>
+              <a:t>▪ Boundary Regression: auxiliary MLP predicts normalised start/end/length on canvas (MSE, weight 0.1)</a:t>
+            </a:r>
+          </a:p>
+        </p:txBody>
+      </p:sp>
+      <p:sp>
+        <p:nvSpPr>
+          <p:cNvPr id="10" name="Rectangle 9"/>
           <p:cNvSpPr/>
           <p:nvPr/>
         </p:nvSpPr>
         <p:spPr>
           <a:xfrm>
-            <a:off x="320040" y="1298448"/>
-            <a:ext cx="3611880" cy="4206240"/>
+            <a:off x="8046720" y="1298448"/>
+            <a:ext cx="3840480" cy="4389120"/>
           </a:xfrm>
           <a:prstGeom prst="rect">
             <a:avLst/>
@@ -17827,32 +19784,33 @@
           <a:lstStyle/>
           <a:p>
             <a:pPr algn="ctr"/>
-          </a:p>
-        </p:txBody>
-      </p:sp>
-      <p:sp>
-        <p:nvSpPr>
-          <p:cNvPr id="10" name="TextBox 9"/>
-          <p:cNvSpPr txBox="1"/>
-          <p:nvPr/>
-        </p:nvSpPr>
-        <p:spPr>
-          <a:xfrm>
-            <a:off x="429768" y="1371600"/>
-            <a:ext cx="3392424" cy="548640"/>
-          </a:xfrm>
-          <a:prstGeom prst="rect">
-            <a:avLst/>
-          </a:prstGeom>
-          <a:noFill/>
-        </p:spPr>
-        <p:txBody>
-          <a:bodyPr wrap="square">
-            <a:spAutoFit/>
-          </a:bodyPr>
-          <a:lstStyle/>
-          <a:p>
-            <a:pPr algn="ctr"/>
+            <a:endParaRPr/>
+          </a:p>
+        </p:txBody>
+      </p:sp>
+      <p:sp>
+        <p:nvSpPr>
+          <p:cNvPr id="11" name="TextBox 10"/>
+          <p:cNvSpPr txBox="1"/>
+          <p:nvPr/>
+        </p:nvSpPr>
+        <p:spPr>
+          <a:xfrm>
+            <a:off x="8183879" y="1408176"/>
+            <a:ext cx="3566160" cy="347472"/>
+          </a:xfrm>
+          <a:prstGeom prst="rect">
+            <a:avLst/>
+          </a:prstGeom>
+          <a:noFill/>
+        </p:spPr>
+        <p:txBody>
+          <a:bodyPr wrap="square">
+            <a:spAutoFit/>
+          </a:bodyPr>
+          <a:lstStyle/>
+          <a:p>
+            <a:pPr algn="l"/>
             <a:r>
               <a:rPr sz="1400" b="1">
                 <a:solidFill>
@@ -17860,52 +19818,8 @@
                 </a:solidFill>
                 <a:latin typeface="Calibri"/>
               </a:rPr>
-              <a:t>Stage 1
-Label Validation</a:t>
-            </a:r>
-          </a:p>
-        </p:txBody>
-      </p:sp>
-      <p:sp>
-        <p:nvSpPr>
-          <p:cNvPr id="11" name="Rectangle 10"/>
-          <p:cNvSpPr/>
-          <p:nvPr/>
-        </p:nvSpPr>
-        <p:spPr>
-          <a:xfrm>
-            <a:off x="320040" y="1938528"/>
-            <a:ext cx="3611880" cy="27432"/>
-          </a:xfrm>
-          <a:prstGeom prst="rect">
-            <a:avLst/>
-          </a:prstGeom>
-          <a:solidFill>
-            <a:srgbClr val="003865"/>
-          </a:solidFill>
-          <a:ln>
-            <a:noFill/>
-          </a:ln>
-        </p:spPr>
-        <p:style>
-          <a:lnRef idx="1">
-            <a:schemeClr val="accent1"/>
-          </a:lnRef>
-          <a:fillRef idx="3">
-            <a:schemeClr val="accent1"/>
-          </a:fillRef>
-          <a:effectRef idx="2">
-            <a:schemeClr val="accent1"/>
-          </a:effectRef>
-          <a:fontRef idx="minor">
-            <a:schemeClr val="lt1"/>
-          </a:fontRef>
-        </p:style>
-        <p:txBody>
-          <a:bodyPr rtlCol="0" anchor="ctr"/>
-          <a:lstStyle/>
-          <a:p>
-            <a:pPr algn="ctr"/>
+              <a:t>Training Setup</a:t>
+            </a:r>
           </a:p>
         </p:txBody>
       </p:sp>
@@ -17917,1575 +19831,150 @@
         </p:nvSpPr>
         <p:spPr>
           <a:xfrm>
-            <a:off x="429768" y="2048256"/>
-            <a:ext cx="3392424" cy="237744"/>
-          </a:xfrm>
-          <a:prstGeom prst="rect">
-            <a:avLst/>
-          </a:prstGeom>
-          <a:noFill/>
-        </p:spPr>
-        <p:txBody>
-          <a:bodyPr wrap="square">
-            <a:spAutoFit/>
-          </a:bodyPr>
-          <a:lstStyle/>
-          <a:p>
-            <a:pPr algn="l"/>
-            <a:r>
-              <a:rPr sz="1100" b="1">
+            <a:off x="8183879" y="1792224"/>
+            <a:ext cx="3566160" cy="3657600"/>
+          </a:xfrm>
+          <a:prstGeom prst="rect">
+            <a:avLst/>
+          </a:prstGeom>
+          <a:noFill/>
+        </p:spPr>
+        <p:txBody>
+          <a:bodyPr wrap="square">
+            <a:spAutoFit/>
+          </a:bodyPr>
+          <a:lstStyle/>
+          <a:p>
+            <a:pPr algn="l">
+              <a:lnSpc>
+                <a:spcPct val="118000"/>
+              </a:lnSpc>
+              <a:spcBef>
+                <a:spcPts val="70"/>
+              </a:spcBef>
+            </a:pPr>
+            <a:r>
+              <a:rPr sz="1300">
                 <a:solidFill>
                   <a:srgbClr val="3F4444"/>
                 </a:solidFill>
                 <a:latin typeface="Calibri"/>
               </a:rPr>
-              <a:t>Models:</a:t>
-            </a:r>
-          </a:p>
-        </p:txBody>
-      </p:sp>
-      <p:sp>
-        <p:nvSpPr>
-          <p:cNvPr id="13" name="TextBox 12"/>
-          <p:cNvSpPr txBox="1"/>
-          <p:nvPr/>
-        </p:nvSpPr>
-        <p:spPr>
-          <a:xfrm>
-            <a:off x="502920" y="2286000"/>
-            <a:ext cx="3319272" cy="493776"/>
-          </a:xfrm>
-          <a:prstGeom prst="rect">
-            <a:avLst/>
-          </a:prstGeom>
-          <a:noFill/>
-        </p:spPr>
-        <p:txBody>
-          <a:bodyPr wrap="square">
-            <a:spAutoFit/>
-          </a:bodyPr>
-          <a:lstStyle/>
-          <a:p>
-            <a:pPr algn="l"/>
-            <a:r>
-              <a:rPr sz="1100" b="0">
+              <a:t>• AdamW, lr = 1e-3, cosine annealing</a:t>
+            </a:r>
+          </a:p>
+          <a:p>
+            <a:pPr algn="l">
+              <a:lnSpc>
+                <a:spcPct val="118000"/>
+              </a:lnSpc>
+              <a:spcBef>
+                <a:spcPts val="70"/>
+              </a:spcBef>
+            </a:pPr>
+            <a:r>
+              <a:rPr sz="1300">
                 <a:solidFill>
                   <a:srgbClr val="3F4444"/>
                 </a:solidFill>
                 <a:latin typeface="Calibri"/>
               </a:rPr>
-              <a:t>v3, v4, v4.1</a:t>
-            </a:r>
-          </a:p>
-        </p:txBody>
-      </p:sp>
-      <p:sp>
-        <p:nvSpPr>
-          <p:cNvPr id="14" name="TextBox 13"/>
-          <p:cNvSpPr txBox="1"/>
-          <p:nvPr/>
-        </p:nvSpPr>
-        <p:spPr>
-          <a:xfrm>
-            <a:off x="429768" y="2779776"/>
-            <a:ext cx="3392424" cy="237744"/>
-          </a:xfrm>
-          <a:prstGeom prst="rect">
-            <a:avLst/>
-          </a:prstGeom>
-          <a:noFill/>
-        </p:spPr>
-        <p:txBody>
-          <a:bodyPr wrap="square">
-            <a:spAutoFit/>
-          </a:bodyPr>
-          <a:lstStyle/>
-          <a:p>
-            <a:pPr algn="l"/>
-            <a:r>
-              <a:rPr sz="1100" b="1">
+              <a:t>• Batch: 16 (hybrid), 32 (CNN-only)</a:t>
+            </a:r>
+          </a:p>
+          <a:p>
+            <a:pPr algn="l">
+              <a:lnSpc>
+                <a:spcPct val="118000"/>
+              </a:lnSpc>
+              <a:spcBef>
+                <a:spcPts val="70"/>
+              </a:spcBef>
+            </a:pPr>
+            <a:r>
+              <a:rPr sz="1300">
                 <a:solidFill>
                   <a:srgbClr val="3F4444"/>
                 </a:solidFill>
                 <a:latin typeface="Calibri"/>
               </a:rPr>
-              <a:t>Outer split:</a:t>
-            </a:r>
-          </a:p>
-        </p:txBody>
-      </p:sp>
-      <p:sp>
-        <p:nvSpPr>
-          <p:cNvPr id="15" name="TextBox 14"/>
-          <p:cNvSpPr txBox="1"/>
-          <p:nvPr/>
-        </p:nvSpPr>
-        <p:spPr>
-          <a:xfrm>
-            <a:off x="502920" y="3017520"/>
-            <a:ext cx="3319272" cy="493776"/>
-          </a:xfrm>
-          <a:prstGeom prst="rect">
-            <a:avLst/>
-          </a:prstGeom>
-          <a:noFill/>
-        </p:spPr>
-        <p:txBody>
-          <a:bodyPr wrap="square">
-            <a:spAutoFit/>
-          </a:bodyPr>
-          <a:lstStyle/>
-          <a:p>
-            <a:pPr algn="l"/>
-            <a:r>
-              <a:rPr sz="1100" b="0">
+              <a:t>• Canvas: 40 kb, random placement</a:t>
+            </a:r>
+          </a:p>
+          <a:p>
+            <a:pPr algn="l">
+              <a:lnSpc>
+                <a:spcPct val="118000"/>
+              </a:lnSpc>
+              <a:spcBef>
+                <a:spcPts val="70"/>
+              </a:spcBef>
+            </a:pPr>
+            <a:r>
+              <a:rPr sz="1300">
                 <a:solidFill>
                   <a:srgbClr val="3F4444"/>
                 </a:solidFill>
                 <a:latin typeface="Calibri"/>
               </a:rPr>
-              <a:t>Sequence-level shuffle
-80/20 ratio</a:t>
-            </a:r>
-          </a:p>
-        </p:txBody>
-      </p:sp>
-      <p:sp>
-        <p:nvSpPr>
-          <p:cNvPr id="16" name="TextBox 15"/>
-          <p:cNvSpPr txBox="1"/>
-          <p:nvPr/>
-        </p:nvSpPr>
-        <p:spPr>
-          <a:xfrm>
-            <a:off x="429768" y="3511296"/>
-            <a:ext cx="3392424" cy="237744"/>
-          </a:xfrm>
-          <a:prstGeom prst="rect">
-            <a:avLst/>
-          </a:prstGeom>
-          <a:noFill/>
-        </p:spPr>
-        <p:txBody>
-          <a:bodyPr wrap="square">
-            <a:spAutoFit/>
-          </a:bodyPr>
-          <a:lstStyle/>
-          <a:p>
-            <a:pPr algn="l"/>
-            <a:r>
-              <a:rPr sz="1100" b="1">
+              <a:t>• Dropout: 0.15, label smooth: 0.1</a:t>
+            </a:r>
+          </a:p>
+          <a:p>
+            <a:pPr algn="l">
+              <a:lnSpc>
+                <a:spcPct val="118000"/>
+              </a:lnSpc>
+              <a:spcBef>
+                <a:spcPts val="70"/>
+              </a:spcBef>
+            </a:pPr>
+            <a:r>
+              <a:rPr sz="1300">
                 <a:solidFill>
                   <a:srgbClr val="3F4444"/>
                 </a:solidFill>
                 <a:latin typeface="Calibri"/>
               </a:rPr>
-              <a:t>Inner split:</a:t>
-            </a:r>
-          </a:p>
-        </p:txBody>
-      </p:sp>
-      <p:sp>
-        <p:nvSpPr>
-          <p:cNvPr id="17" name="TextBox 16"/>
-          <p:cNvSpPr txBox="1"/>
-          <p:nvPr/>
-        </p:nvSpPr>
-        <p:spPr>
-          <a:xfrm>
-            <a:off x="502920" y="3749040"/>
-            <a:ext cx="3319272" cy="493776"/>
-          </a:xfrm>
-          <a:prstGeom prst="rect">
-            <a:avLst/>
-          </a:prstGeom>
-          <a:noFill/>
-        </p:spPr>
-        <p:txBody>
-          <a:bodyPr wrap="square">
-            <a:spAutoFit/>
-          </a:bodyPr>
-          <a:lstStyle/>
-          <a:p>
-            <a:pPr algn="l"/>
-            <a:r>
-              <a:rPr sz="1100" b="0">
+              <a:t>• Early stop: patience 10, cap 40 ep</a:t>
+            </a:r>
+          </a:p>
+          <a:p>
+            <a:pPr algn="l">
+              <a:lnSpc>
+                <a:spcPct val="118000"/>
+              </a:lnSpc>
+              <a:spcBef>
+                <a:spcPts val="70"/>
+              </a:spcBef>
+            </a:pPr>
+            <a:r>
+              <a:rPr sz="1300">
                 <a:solidFill>
                   <a:srgbClr val="3F4444"/>
                 </a:solidFill>
                 <a:latin typeface="Calibri"/>
               </a:rPr>
-              <a:t>Sequence rotating k-fold (k=5)</a:t>
-            </a:r>
-          </a:p>
-        </p:txBody>
-      </p:sp>
-      <p:sp>
-        <p:nvSpPr>
-          <p:cNvPr id="18" name="TextBox 17"/>
-          <p:cNvSpPr txBox="1"/>
-          <p:nvPr/>
-        </p:nvSpPr>
-        <p:spPr>
-          <a:xfrm>
-            <a:off x="429768" y="4242816"/>
-            <a:ext cx="3392424" cy="237744"/>
-          </a:xfrm>
-          <a:prstGeom prst="rect">
-            <a:avLst/>
-          </a:prstGeom>
-          <a:noFill/>
-        </p:spPr>
-        <p:txBody>
-          <a:bodyPr wrap="square">
-            <a:spAutoFit/>
-          </a:bodyPr>
-          <a:lstStyle/>
-          <a:p>
-            <a:pPr algn="l"/>
-            <a:r>
-              <a:rPr sz="1100" b="1">
+              <a:t>• Hardware: Apple MPS / NVIDIA A100</a:t>
+            </a:r>
+          </a:p>
+          <a:p>
+            <a:pPr algn="l">
+              <a:lnSpc>
+                <a:spcPct val="118000"/>
+              </a:lnSpc>
+              <a:spcBef>
+                <a:spcPts val="70"/>
+              </a:spcBef>
+            </a:pPr>
+            <a:r>
+              <a:rPr sz="1300">
                 <a:solidFill>
                   <a:srgbClr val="3F4444"/>
                 </a:solidFill>
                 <a:latin typeface="Calibri"/>
               </a:rPr>
-              <a:t>Train/val disjoint:</a:t>
-            </a:r>
-          </a:p>
-        </p:txBody>
-      </p:sp>
-      <p:sp>
-        <p:nvSpPr>
-          <p:cNvPr id="19" name="TextBox 18"/>
-          <p:cNvSpPr txBox="1"/>
-          <p:nvPr/>
-        </p:nvSpPr>
-        <p:spPr>
-          <a:xfrm>
-            <a:off x="502920" y="4480560"/>
-            <a:ext cx="3319272" cy="493776"/>
-          </a:xfrm>
-          <a:prstGeom prst="rect">
-            <a:avLst/>
-          </a:prstGeom>
-          <a:noFill/>
-        </p:spPr>
-        <p:txBody>
-          <a:bodyPr wrap="square">
-            <a:spAutoFit/>
-          </a:bodyPr>
-          <a:lstStyle/>
-          <a:p>
-            <a:pPr algn="l"/>
-            <a:r>
-              <a:rPr sz="1100" b="0">
-                <a:solidFill>
-                  <a:srgbClr val="3F4444"/>
-                </a:solidFill>
-                <a:latin typeface="Calibri"/>
-              </a:rPr>
-              <a:t>No</a:t>
-            </a:r>
-          </a:p>
-        </p:txBody>
-      </p:sp>
-      <p:sp>
-        <p:nvSpPr>
-          <p:cNvPr id="20" name="TextBox 19"/>
-          <p:cNvSpPr txBox="1"/>
-          <p:nvPr/>
-        </p:nvSpPr>
-        <p:spPr>
-          <a:xfrm>
-            <a:off x="429768" y="4974336"/>
-            <a:ext cx="3392424" cy="237744"/>
-          </a:xfrm>
-          <a:prstGeom prst="rect">
-            <a:avLst/>
-          </a:prstGeom>
-          <a:noFill/>
-        </p:spPr>
-        <p:txBody>
-          <a:bodyPr wrap="square">
-            <a:spAutoFit/>
-          </a:bodyPr>
-          <a:lstStyle/>
-          <a:p>
-            <a:pPr algn="l"/>
-            <a:r>
-              <a:rPr sz="1100" b="1">
-                <a:solidFill>
-                  <a:srgbClr val="3F4444"/>
-                </a:solidFill>
-                <a:latin typeface="Calibri"/>
-              </a:rPr>
-              <a:t>Train/test disjoint:</a:t>
-            </a:r>
-          </a:p>
-        </p:txBody>
-      </p:sp>
-      <p:sp>
-        <p:nvSpPr>
-          <p:cNvPr id="21" name="TextBox 20"/>
-          <p:cNvSpPr txBox="1"/>
-          <p:nvPr/>
-        </p:nvSpPr>
-        <p:spPr>
-          <a:xfrm>
-            <a:off x="502920" y="5212080"/>
-            <a:ext cx="3319272" cy="493776"/>
-          </a:xfrm>
-          <a:prstGeom prst="rect">
-            <a:avLst/>
-          </a:prstGeom>
-          <a:noFill/>
-        </p:spPr>
-        <p:txBody>
-          <a:bodyPr wrap="square">
-            <a:spAutoFit/>
-          </a:bodyPr>
-          <a:lstStyle/>
-          <a:p>
-            <a:pPr algn="l"/>
-            <a:r>
-              <a:rPr sz="1100" b="0">
-                <a:solidFill>
-                  <a:srgbClr val="3F4444"/>
-                </a:solidFill>
-                <a:latin typeface="Calibri"/>
-              </a:rPr>
-              <a:t>No</a:t>
-            </a:r>
-          </a:p>
-        </p:txBody>
-      </p:sp>
-      <p:sp>
-        <p:nvSpPr>
-          <p:cNvPr id="22" name="TextBox 21"/>
-          <p:cNvSpPr txBox="1"/>
-          <p:nvPr/>
-        </p:nvSpPr>
-        <p:spPr>
-          <a:xfrm>
-            <a:off x="429768" y="5705856"/>
-            <a:ext cx="3392424" cy="237744"/>
-          </a:xfrm>
-          <a:prstGeom prst="rect">
-            <a:avLst/>
-          </a:prstGeom>
-          <a:noFill/>
-        </p:spPr>
-        <p:txBody>
-          <a:bodyPr wrap="square">
-            <a:spAutoFit/>
-          </a:bodyPr>
-          <a:lstStyle/>
-          <a:p>
-            <a:pPr algn="l"/>
-            <a:r>
-              <a:rPr sz="1100" b="1">
-                <a:solidFill>
-                  <a:srgbClr val="3F4444"/>
-                </a:solidFill>
-                <a:latin typeface="Calibri"/>
-              </a:rPr>
-              <a:t>Purpose:</a:t>
-            </a:r>
-          </a:p>
-        </p:txBody>
-      </p:sp>
-      <p:sp>
-        <p:nvSpPr>
-          <p:cNvPr id="23" name="TextBox 22"/>
-          <p:cNvSpPr txBox="1"/>
-          <p:nvPr/>
-        </p:nvSpPr>
-        <p:spPr>
-          <a:xfrm>
-            <a:off x="502920" y="5943600"/>
-            <a:ext cx="3319272" cy="493776"/>
-          </a:xfrm>
-          <a:prstGeom prst="rect">
-            <a:avLst/>
-          </a:prstGeom>
-          <a:noFill/>
-        </p:spPr>
-        <p:txBody>
-          <a:bodyPr wrap="square">
-            <a:spAutoFit/>
-          </a:bodyPr>
-          <a:lstStyle/>
-          <a:p>
-            <a:pPr algn="l"/>
-            <a:r>
-              <a:rPr sz="1100" b="0">
-                <a:solidFill>
-                  <a:srgbClr val="3F4444"/>
-                </a:solidFill>
-                <a:latin typeface="Calibri"/>
-              </a:rPr>
-              <a:t>Confirm labels carry learnable
-signal; identify mislabels</a:t>
-            </a:r>
-          </a:p>
-        </p:txBody>
-      </p:sp>
-      <p:sp>
-        <p:nvSpPr>
-          <p:cNvPr id="24" name="Rectangle 23"/>
-          <p:cNvSpPr/>
-          <p:nvPr/>
-        </p:nvSpPr>
-        <p:spPr>
-          <a:xfrm>
-            <a:off x="4069080" y="1298448"/>
-            <a:ext cx="3611880" cy="4206240"/>
-          </a:xfrm>
-          <a:prstGeom prst="rect">
-            <a:avLst/>
-          </a:prstGeom>
-          <a:solidFill>
-            <a:srgbClr val="E8FFF0"/>
-          </a:solidFill>
-          <a:ln>
-            <a:noFill/>
-          </a:ln>
-        </p:spPr>
-        <p:style>
-          <a:lnRef idx="1">
-            <a:schemeClr val="accent1"/>
-          </a:lnRef>
-          <a:fillRef idx="3">
-            <a:schemeClr val="accent1"/>
-          </a:fillRef>
-          <a:effectRef idx="2">
-            <a:schemeClr val="accent1"/>
-          </a:effectRef>
-          <a:fontRef idx="minor">
-            <a:schemeClr val="lt1"/>
-          </a:fontRef>
-        </p:style>
-        <p:txBody>
-          <a:bodyPr rtlCol="0" anchor="ctr"/>
-          <a:lstStyle/>
-          <a:p>
-            <a:pPr algn="ctr"/>
-          </a:p>
-        </p:txBody>
-      </p:sp>
-      <p:sp>
-        <p:nvSpPr>
-          <p:cNvPr id="25" name="TextBox 24"/>
-          <p:cNvSpPr txBox="1"/>
-          <p:nvPr/>
-        </p:nvSpPr>
-        <p:spPr>
-          <a:xfrm>
-            <a:off x="4178808" y="1371600"/>
-            <a:ext cx="3392424" cy="548640"/>
-          </a:xfrm>
-          <a:prstGeom prst="rect">
-            <a:avLst/>
-          </a:prstGeom>
-          <a:noFill/>
-        </p:spPr>
-        <p:txBody>
-          <a:bodyPr wrap="square">
-            <a:spAutoFit/>
-          </a:bodyPr>
-          <a:lstStyle/>
-          <a:p>
-            <a:pPr algn="ctr"/>
-            <a:r>
-              <a:rPr sz="1400" b="1">
-                <a:solidFill>
-                  <a:srgbClr val="003865"/>
-                </a:solidFill>
-                <a:latin typeface="Calibri"/>
-              </a:rPr>
-              <a:t>Stage 2
-Species-Disjoint Outer</a:t>
-            </a:r>
-          </a:p>
-        </p:txBody>
-      </p:sp>
-      <p:sp>
-        <p:nvSpPr>
-          <p:cNvPr id="26" name="Rectangle 25"/>
-          <p:cNvSpPr/>
-          <p:nvPr/>
-        </p:nvSpPr>
-        <p:spPr>
-          <a:xfrm>
-            <a:off x="4069080" y="1938528"/>
-            <a:ext cx="3611880" cy="27432"/>
-          </a:xfrm>
-          <a:prstGeom prst="rect">
-            <a:avLst/>
-          </a:prstGeom>
-          <a:solidFill>
-            <a:srgbClr val="003865"/>
-          </a:solidFill>
-          <a:ln>
-            <a:noFill/>
-          </a:ln>
-        </p:spPr>
-        <p:style>
-          <a:lnRef idx="1">
-            <a:schemeClr val="accent1"/>
-          </a:lnRef>
-          <a:fillRef idx="3">
-            <a:schemeClr val="accent1"/>
-          </a:fillRef>
-          <a:effectRef idx="2">
-            <a:schemeClr val="accent1"/>
-          </a:effectRef>
-          <a:fontRef idx="minor">
-            <a:schemeClr val="lt1"/>
-          </a:fontRef>
-        </p:style>
-        <p:txBody>
-          <a:bodyPr rtlCol="0" anchor="ctr"/>
-          <a:lstStyle/>
-          <a:p>
-            <a:pPr algn="ctr"/>
-          </a:p>
-        </p:txBody>
-      </p:sp>
-      <p:sp>
-        <p:nvSpPr>
-          <p:cNvPr id="27" name="TextBox 26"/>
-          <p:cNvSpPr txBox="1"/>
-          <p:nvPr/>
-        </p:nvSpPr>
-        <p:spPr>
-          <a:xfrm>
-            <a:off x="4178808" y="2048256"/>
-            <a:ext cx="3392424" cy="237744"/>
-          </a:xfrm>
-          <a:prstGeom prst="rect">
-            <a:avLst/>
-          </a:prstGeom>
-          <a:noFill/>
-        </p:spPr>
-        <p:txBody>
-          <a:bodyPr wrap="square">
-            <a:spAutoFit/>
-          </a:bodyPr>
-          <a:lstStyle/>
-          <a:p>
-            <a:pPr algn="l"/>
-            <a:r>
-              <a:rPr sz="1100" b="1">
-                <a:solidFill>
-                  <a:srgbClr val="3F4444"/>
-                </a:solidFill>
-                <a:latin typeface="Calibri"/>
-              </a:rPr>
-              <a:t>Models:</a:t>
-            </a:r>
-          </a:p>
-        </p:txBody>
-      </p:sp>
-      <p:sp>
-        <p:nvSpPr>
-          <p:cNvPr id="28" name="TextBox 27"/>
-          <p:cNvSpPr txBox="1"/>
-          <p:nvPr/>
-        </p:nvSpPr>
-        <p:spPr>
-          <a:xfrm>
-            <a:off x="4251960" y="2286000"/>
-            <a:ext cx="3319272" cy="493776"/>
-          </a:xfrm>
-          <a:prstGeom prst="rect">
-            <a:avLst/>
-          </a:prstGeom>
-          <a:noFill/>
-        </p:spPr>
-        <p:txBody>
-          <a:bodyPr wrap="square">
-            <a:spAutoFit/>
-          </a:bodyPr>
-          <a:lstStyle/>
-          <a:p>
-            <a:pPr algn="l"/>
-            <a:r>
-              <a:rPr sz="1100" b="0">
-                <a:solidFill>
-                  <a:srgbClr val="3F4444"/>
-                </a:solidFill>
-                <a:latin typeface="Calibri"/>
-              </a:rPr>
-              <a:t>v4.2, v4.3</a:t>
-            </a:r>
-          </a:p>
-        </p:txBody>
-      </p:sp>
-      <p:sp>
-        <p:nvSpPr>
-          <p:cNvPr id="29" name="TextBox 28"/>
-          <p:cNvSpPr txBox="1"/>
-          <p:nvPr/>
-        </p:nvSpPr>
-        <p:spPr>
-          <a:xfrm>
-            <a:off x="4178808" y="2779776"/>
-            <a:ext cx="3392424" cy="237744"/>
-          </a:xfrm>
-          <a:prstGeom prst="rect">
-            <a:avLst/>
-          </a:prstGeom>
-          <a:noFill/>
-        </p:spPr>
-        <p:txBody>
-          <a:bodyPr wrap="square">
-            <a:spAutoFit/>
-          </a:bodyPr>
-          <a:lstStyle/>
-          <a:p>
-            <a:pPr algn="l"/>
-            <a:r>
-              <a:rPr sz="1100" b="1">
-                <a:solidFill>
-                  <a:srgbClr val="3F4444"/>
-                </a:solidFill>
-                <a:latin typeface="Calibri"/>
-              </a:rPr>
-              <a:t>Outer split:</a:t>
-            </a:r>
-          </a:p>
-        </p:txBody>
-      </p:sp>
-      <p:sp>
-        <p:nvSpPr>
-          <p:cNvPr id="30" name="TextBox 29"/>
-          <p:cNvSpPr txBox="1"/>
-          <p:nvPr/>
-        </p:nvSpPr>
-        <p:spPr>
-          <a:xfrm>
-            <a:off x="4251960" y="3017520"/>
-            <a:ext cx="3319272" cy="493776"/>
-          </a:xfrm>
-          <a:prstGeom prst="rect">
-            <a:avLst/>
-          </a:prstGeom>
-          <a:noFill/>
-        </p:spPr>
-        <p:txBody>
-          <a:bodyPr wrap="square">
-            <a:spAutoFit/>
-          </a:bodyPr>
-          <a:lstStyle/>
-          <a:p>
-            <a:pPr algn="l"/>
-            <a:r>
-              <a:rPr sz="1100" b="0">
-                <a:solidFill>
-                  <a:srgbClr val="3F4444"/>
-                </a:solidFill>
-                <a:latin typeface="Calibri"/>
-              </a:rPr>
-              <a:t>Species-level shuffle
-+ mini-benchmark excised</a:t>
-            </a:r>
-          </a:p>
-        </p:txBody>
-      </p:sp>
-      <p:sp>
-        <p:nvSpPr>
-          <p:cNvPr id="31" name="TextBox 30"/>
-          <p:cNvSpPr txBox="1"/>
-          <p:nvPr/>
-        </p:nvSpPr>
-        <p:spPr>
-          <a:xfrm>
-            <a:off x="4178808" y="3511296"/>
-            <a:ext cx="3392424" cy="237744"/>
-          </a:xfrm>
-          <a:prstGeom prst="rect">
-            <a:avLst/>
-          </a:prstGeom>
-          <a:noFill/>
-        </p:spPr>
-        <p:txBody>
-          <a:bodyPr wrap="square">
-            <a:spAutoFit/>
-          </a:bodyPr>
-          <a:lstStyle/>
-          <a:p>
-            <a:pPr algn="l"/>
-            <a:r>
-              <a:rPr sz="1100" b="1">
-                <a:solidFill>
-                  <a:srgbClr val="3F4444"/>
-                </a:solidFill>
-                <a:latin typeface="Calibri"/>
-              </a:rPr>
-              <a:t>Inner split:</a:t>
-            </a:r>
-          </a:p>
-        </p:txBody>
-      </p:sp>
-      <p:sp>
-        <p:nvSpPr>
-          <p:cNvPr id="32" name="TextBox 31"/>
-          <p:cNvSpPr txBox="1"/>
-          <p:nvPr/>
-        </p:nvSpPr>
-        <p:spPr>
-          <a:xfrm>
-            <a:off x="4251960" y="3749040"/>
-            <a:ext cx="3319272" cy="493776"/>
-          </a:xfrm>
-          <a:prstGeom prst="rect">
-            <a:avLst/>
-          </a:prstGeom>
-          <a:noFill/>
-        </p:spPr>
-        <p:txBody>
-          <a:bodyPr wrap="square">
-            <a:spAutoFit/>
-          </a:bodyPr>
-          <a:lstStyle/>
-          <a:p>
-            <a:pPr algn="l"/>
-            <a:r>
-              <a:rPr sz="1100" b="0">
-                <a:solidFill>
-                  <a:srgbClr val="3F4444"/>
-                </a:solidFill>
-                <a:latin typeface="Calibri"/>
-              </a:rPr>
-              <a:t>Species rotating k-fold
-(val species recycle → inflated!)</a:t>
-            </a:r>
-          </a:p>
-        </p:txBody>
-      </p:sp>
-      <p:sp>
-        <p:nvSpPr>
-          <p:cNvPr id="33" name="TextBox 32"/>
-          <p:cNvSpPr txBox="1"/>
-          <p:nvPr/>
-        </p:nvSpPr>
-        <p:spPr>
-          <a:xfrm>
-            <a:off x="4178808" y="4242816"/>
-            <a:ext cx="3392424" cy="237744"/>
-          </a:xfrm>
-          <a:prstGeom prst="rect">
-            <a:avLst/>
-          </a:prstGeom>
-          <a:noFill/>
-        </p:spPr>
-        <p:txBody>
-          <a:bodyPr wrap="square">
-            <a:spAutoFit/>
-          </a:bodyPr>
-          <a:lstStyle/>
-          <a:p>
-            <a:pPr algn="l"/>
-            <a:r>
-              <a:rPr sz="1100" b="1">
-                <a:solidFill>
-                  <a:srgbClr val="3F4444"/>
-                </a:solidFill>
-                <a:latin typeface="Calibri"/>
-              </a:rPr>
-              <a:t>Train/val disjoint:</a:t>
-            </a:r>
-          </a:p>
-        </p:txBody>
-      </p:sp>
-      <p:sp>
-        <p:nvSpPr>
-          <p:cNvPr id="34" name="TextBox 33"/>
-          <p:cNvSpPr txBox="1"/>
-          <p:nvPr/>
-        </p:nvSpPr>
-        <p:spPr>
-          <a:xfrm>
-            <a:off x="4251960" y="4480560"/>
-            <a:ext cx="3319272" cy="493776"/>
-          </a:xfrm>
-          <a:prstGeom prst="rect">
-            <a:avLst/>
-          </a:prstGeom>
-          <a:noFill/>
-        </p:spPr>
-        <p:txBody>
-          <a:bodyPr wrap="square">
-            <a:spAutoFit/>
-          </a:bodyPr>
-          <a:lstStyle/>
-          <a:p>
-            <a:pPr algn="l"/>
-            <a:r>
-              <a:rPr sz="1100" b="0">
-                <a:solidFill>
-                  <a:srgbClr val="3F4444"/>
-                </a:solidFill>
-                <a:latin typeface="Calibri"/>
-              </a:rPr>
-              <a:t>No (per epoch only)</a:t>
-            </a:r>
-          </a:p>
-        </p:txBody>
-      </p:sp>
-      <p:sp>
-        <p:nvSpPr>
-          <p:cNvPr id="35" name="TextBox 34"/>
-          <p:cNvSpPr txBox="1"/>
-          <p:nvPr/>
-        </p:nvSpPr>
-        <p:spPr>
-          <a:xfrm>
-            <a:off x="4178808" y="4974336"/>
-            <a:ext cx="3392424" cy="237744"/>
-          </a:xfrm>
-          <a:prstGeom prst="rect">
-            <a:avLst/>
-          </a:prstGeom>
-          <a:noFill/>
-        </p:spPr>
-        <p:txBody>
-          <a:bodyPr wrap="square">
-            <a:spAutoFit/>
-          </a:bodyPr>
-          <a:lstStyle/>
-          <a:p>
-            <a:pPr algn="l"/>
-            <a:r>
-              <a:rPr sz="1100" b="1">
-                <a:solidFill>
-                  <a:srgbClr val="3F4444"/>
-                </a:solidFill>
-                <a:latin typeface="Calibri"/>
-              </a:rPr>
-              <a:t>Train/test disjoint:</a:t>
-            </a:r>
-          </a:p>
-        </p:txBody>
-      </p:sp>
-      <p:sp>
-        <p:nvSpPr>
-          <p:cNvPr id="36" name="TextBox 35"/>
-          <p:cNvSpPr txBox="1"/>
-          <p:nvPr/>
-        </p:nvSpPr>
-        <p:spPr>
-          <a:xfrm>
-            <a:off x="4251960" y="5212080"/>
-            <a:ext cx="3319272" cy="493776"/>
-          </a:xfrm>
-          <a:prstGeom prst="rect">
-            <a:avLst/>
-          </a:prstGeom>
-          <a:noFill/>
-        </p:spPr>
-        <p:txBody>
-          <a:bodyPr wrap="square">
-            <a:spAutoFit/>
-          </a:bodyPr>
-          <a:lstStyle/>
-          <a:p>
-            <a:pPr algn="l"/>
-            <a:r>
-              <a:rPr sz="1100" b="0">
-                <a:solidFill>
-                  <a:srgbClr val="3F4444"/>
-                </a:solidFill>
-                <a:latin typeface="Calibri"/>
-              </a:rPr>
-              <a:t>Yes</a:t>
-            </a:r>
-          </a:p>
-        </p:txBody>
-      </p:sp>
-      <p:sp>
-        <p:nvSpPr>
-          <p:cNvPr id="37" name="TextBox 36"/>
-          <p:cNvSpPr txBox="1"/>
-          <p:nvPr/>
-        </p:nvSpPr>
-        <p:spPr>
-          <a:xfrm>
-            <a:off x="4178808" y="5705856"/>
-            <a:ext cx="3392424" cy="237744"/>
-          </a:xfrm>
-          <a:prstGeom prst="rect">
-            <a:avLst/>
-          </a:prstGeom>
-          <a:noFill/>
-        </p:spPr>
-        <p:txBody>
-          <a:bodyPr wrap="square">
-            <a:spAutoFit/>
-          </a:bodyPr>
-          <a:lstStyle/>
-          <a:p>
-            <a:pPr algn="l"/>
-            <a:r>
-              <a:rPr sz="1100" b="1">
-                <a:solidFill>
-                  <a:srgbClr val="3F4444"/>
-                </a:solidFill>
-                <a:latin typeface="Calibri"/>
-              </a:rPr>
-              <a:t>Purpose:</a:t>
-            </a:r>
-          </a:p>
-        </p:txBody>
-      </p:sp>
-      <p:sp>
-        <p:nvSpPr>
-          <p:cNvPr id="38" name="TextBox 37"/>
-          <p:cNvSpPr txBox="1"/>
-          <p:nvPr/>
-        </p:nvSpPr>
-        <p:spPr>
-          <a:xfrm>
-            <a:off x="4251960" y="5943600"/>
-            <a:ext cx="3319272" cy="493776"/>
-          </a:xfrm>
-          <a:prstGeom prst="rect">
-            <a:avLst/>
-          </a:prstGeom>
-          <a:noFill/>
-        </p:spPr>
-        <p:txBody>
-          <a:bodyPr wrap="square">
-            <a:spAutoFit/>
-          </a:bodyPr>
-          <a:lstStyle/>
-          <a:p>
-            <a:pPr algn="l"/>
-            <a:r>
-              <a:rPr sz="1100" b="0">
-                <a:solidFill>
-                  <a:srgbClr val="3F4444"/>
-                </a:solidFill>
-                <a:latin typeface="Calibri"/>
-              </a:rPr>
-              <a:t>Measure cross-species
-generalisation; expose val leak</a:t>
-            </a:r>
-          </a:p>
-        </p:txBody>
-      </p:sp>
-      <p:sp>
-        <p:nvSpPr>
-          <p:cNvPr id="39" name="Rectangle 38"/>
-          <p:cNvSpPr/>
-          <p:nvPr/>
-        </p:nvSpPr>
-        <p:spPr>
-          <a:xfrm>
-            <a:off x="7818120" y="1298448"/>
-            <a:ext cx="3611880" cy="4206240"/>
-          </a:xfrm>
-          <a:prstGeom prst="rect">
-            <a:avLst/>
-          </a:prstGeom>
-          <a:solidFill>
-            <a:srgbClr val="FFF5E8"/>
-          </a:solidFill>
-          <a:ln>
-            <a:noFill/>
-          </a:ln>
-        </p:spPr>
-        <p:style>
-          <a:lnRef idx="1">
-            <a:schemeClr val="accent1"/>
-          </a:lnRef>
-          <a:fillRef idx="3">
-            <a:schemeClr val="accent1"/>
-          </a:fillRef>
-          <a:effectRef idx="2">
-            <a:schemeClr val="accent1"/>
-          </a:effectRef>
-          <a:fontRef idx="minor">
-            <a:schemeClr val="lt1"/>
-          </a:fontRef>
-        </p:style>
-        <p:txBody>
-          <a:bodyPr rtlCol="0" anchor="ctr"/>
-          <a:lstStyle/>
-          <a:p>
-            <a:pPr algn="ctr"/>
-          </a:p>
-        </p:txBody>
-      </p:sp>
-      <p:sp>
-        <p:nvSpPr>
-          <p:cNvPr id="40" name="TextBox 39"/>
-          <p:cNvSpPr txBox="1"/>
-          <p:nvPr/>
-        </p:nvSpPr>
-        <p:spPr>
-          <a:xfrm>
-            <a:off x="7927848" y="1371600"/>
-            <a:ext cx="3392424" cy="548640"/>
-          </a:xfrm>
-          <a:prstGeom prst="rect">
-            <a:avLst/>
-          </a:prstGeom>
-          <a:noFill/>
-        </p:spPr>
-        <p:txBody>
-          <a:bodyPr wrap="square">
-            <a:spAutoFit/>
-          </a:bodyPr>
-          <a:lstStyle/>
-          <a:p>
-            <a:pPr algn="ctr"/>
-            <a:r>
-              <a:rPr sz="1400" b="1">
-                <a:solidFill>
-                  <a:srgbClr val="003865"/>
-                </a:solidFill>
-                <a:latin typeface="Calibri"/>
-              </a:rPr>
-              <a:t>Stage 3
-Single-Fold Inner</a:t>
-            </a:r>
-          </a:p>
-        </p:txBody>
-      </p:sp>
-      <p:sp>
-        <p:nvSpPr>
-          <p:cNvPr id="41" name="Rectangle 40"/>
-          <p:cNvSpPr/>
-          <p:nvPr/>
-        </p:nvSpPr>
-        <p:spPr>
-          <a:xfrm>
-            <a:off x="7818120" y="1938528"/>
-            <a:ext cx="3611880" cy="27432"/>
-          </a:xfrm>
-          <a:prstGeom prst="rect">
-            <a:avLst/>
-          </a:prstGeom>
-          <a:solidFill>
-            <a:srgbClr val="003865"/>
-          </a:solidFill>
-          <a:ln>
-            <a:noFill/>
-          </a:ln>
-        </p:spPr>
-        <p:style>
-          <a:lnRef idx="1">
-            <a:schemeClr val="accent1"/>
-          </a:lnRef>
-          <a:fillRef idx="3">
-            <a:schemeClr val="accent1"/>
-          </a:fillRef>
-          <a:effectRef idx="2">
-            <a:schemeClr val="accent1"/>
-          </a:effectRef>
-          <a:fontRef idx="minor">
-            <a:schemeClr val="lt1"/>
-          </a:fontRef>
-        </p:style>
-        <p:txBody>
-          <a:bodyPr rtlCol="0" anchor="ctr"/>
-          <a:lstStyle/>
-          <a:p>
-            <a:pPr algn="ctr"/>
-          </a:p>
-        </p:txBody>
-      </p:sp>
-      <p:sp>
-        <p:nvSpPr>
-          <p:cNvPr id="42" name="TextBox 41"/>
-          <p:cNvSpPr txBox="1"/>
-          <p:nvPr/>
-        </p:nvSpPr>
-        <p:spPr>
-          <a:xfrm>
-            <a:off x="7927848" y="2048256"/>
-            <a:ext cx="3392424" cy="237744"/>
-          </a:xfrm>
-          <a:prstGeom prst="rect">
-            <a:avLst/>
-          </a:prstGeom>
-          <a:noFill/>
-        </p:spPr>
-        <p:txBody>
-          <a:bodyPr wrap="square">
-            <a:spAutoFit/>
-          </a:bodyPr>
-          <a:lstStyle/>
-          <a:p>
-            <a:pPr algn="l"/>
-            <a:r>
-              <a:rPr sz="1100" b="1">
-                <a:solidFill>
-                  <a:srgbClr val="3F4444"/>
-                </a:solidFill>
-                <a:latin typeface="Calibri"/>
-              </a:rPr>
-              <a:t>Models:</a:t>
-            </a:r>
-          </a:p>
-        </p:txBody>
-      </p:sp>
-      <p:sp>
-        <p:nvSpPr>
-          <p:cNvPr id="43" name="TextBox 42"/>
-          <p:cNvSpPr txBox="1"/>
-          <p:nvPr/>
-        </p:nvSpPr>
-        <p:spPr>
-          <a:xfrm>
-            <a:off x="8001000" y="2286000"/>
-            <a:ext cx="3319272" cy="493776"/>
-          </a:xfrm>
-          <a:prstGeom prst="rect">
-            <a:avLst/>
-          </a:prstGeom>
-          <a:noFill/>
-        </p:spPr>
-        <p:txBody>
-          <a:bodyPr wrap="square">
-            <a:spAutoFit/>
-          </a:bodyPr>
-          <a:lstStyle/>
-          <a:p>
-            <a:pPr algn="l"/>
-            <a:r>
-              <a:rPr sz="1100" b="0">
-                <a:solidFill>
-                  <a:srgbClr val="3F4444"/>
-                </a:solidFill>
-                <a:latin typeface="Calibri"/>
-              </a:rPr>
-              <a:t>v4.3-singlefold</a:t>
-            </a:r>
-          </a:p>
-        </p:txBody>
-      </p:sp>
-      <p:sp>
-        <p:nvSpPr>
-          <p:cNvPr id="44" name="TextBox 43"/>
-          <p:cNvSpPr txBox="1"/>
-          <p:nvPr/>
-        </p:nvSpPr>
-        <p:spPr>
-          <a:xfrm>
-            <a:off x="7927848" y="2779776"/>
-            <a:ext cx="3392424" cy="237744"/>
-          </a:xfrm>
-          <a:prstGeom prst="rect">
-            <a:avLst/>
-          </a:prstGeom>
-          <a:noFill/>
-        </p:spPr>
-        <p:txBody>
-          <a:bodyPr wrap="square">
-            <a:spAutoFit/>
-          </a:bodyPr>
-          <a:lstStyle/>
-          <a:p>
-            <a:pPr algn="l"/>
-            <a:r>
-              <a:rPr sz="1100" b="1">
-                <a:solidFill>
-                  <a:srgbClr val="3F4444"/>
-                </a:solidFill>
-                <a:latin typeface="Calibri"/>
-              </a:rPr>
-              <a:t>Outer split:</a:t>
-            </a:r>
-          </a:p>
-        </p:txBody>
-      </p:sp>
-      <p:sp>
-        <p:nvSpPr>
-          <p:cNvPr id="45" name="TextBox 44"/>
-          <p:cNvSpPr txBox="1"/>
-          <p:nvPr/>
-        </p:nvSpPr>
-        <p:spPr>
-          <a:xfrm>
-            <a:off x="8001000" y="3017520"/>
-            <a:ext cx="3319272" cy="493776"/>
-          </a:xfrm>
-          <a:prstGeom prst="rect">
-            <a:avLst/>
-          </a:prstGeom>
-          <a:noFill/>
-        </p:spPr>
-        <p:txBody>
-          <a:bodyPr wrap="square">
-            <a:spAutoFit/>
-          </a:bodyPr>
-          <a:lstStyle/>
-          <a:p>
-            <a:pPr algn="l"/>
-            <a:r>
-              <a:rPr sz="1100" b="0">
-                <a:solidFill>
-                  <a:srgbClr val="3F4444"/>
-                </a:solidFill>
-                <a:latin typeface="Calibri"/>
-              </a:rPr>
-              <a:t>Same as Stage 2</a:t>
-            </a:r>
-          </a:p>
-        </p:txBody>
-      </p:sp>
-      <p:sp>
-        <p:nvSpPr>
-          <p:cNvPr id="46" name="TextBox 45"/>
-          <p:cNvSpPr txBox="1"/>
-          <p:nvPr/>
-        </p:nvSpPr>
-        <p:spPr>
-          <a:xfrm>
-            <a:off x="7927848" y="3511296"/>
-            <a:ext cx="3392424" cy="237744"/>
-          </a:xfrm>
-          <a:prstGeom prst="rect">
-            <a:avLst/>
-          </a:prstGeom>
-          <a:noFill/>
-        </p:spPr>
-        <p:txBody>
-          <a:bodyPr wrap="square">
-            <a:spAutoFit/>
-          </a:bodyPr>
-          <a:lstStyle/>
-          <a:p>
-            <a:pPr algn="l"/>
-            <a:r>
-              <a:rPr sz="1100" b="1">
-                <a:solidFill>
-                  <a:srgbClr val="3F4444"/>
-                </a:solidFill>
-                <a:latin typeface="Calibri"/>
-              </a:rPr>
-              <a:t>Inner split:</a:t>
-            </a:r>
-          </a:p>
-        </p:txBody>
-      </p:sp>
-      <p:sp>
-        <p:nvSpPr>
-          <p:cNvPr id="47" name="TextBox 46"/>
-          <p:cNvSpPr txBox="1"/>
-          <p:nvPr/>
-        </p:nvSpPr>
-        <p:spPr>
-          <a:xfrm>
-            <a:off x="8001000" y="3749040"/>
-            <a:ext cx="3319272" cy="493776"/>
-          </a:xfrm>
-          <a:prstGeom prst="rect">
-            <a:avLst/>
-          </a:prstGeom>
-          <a:noFill/>
-        </p:spPr>
-        <p:txBody>
-          <a:bodyPr wrap="square">
-            <a:spAutoFit/>
-          </a:bodyPr>
-          <a:lstStyle/>
-          <a:p>
-            <a:pPr algn="l"/>
-            <a:r>
-              <a:rPr sz="1100" b="0">
-                <a:solidFill>
-                  <a:srgbClr val="3F4444"/>
-                </a:solidFill>
-                <a:latin typeface="Calibri"/>
-              </a:rPr>
-              <a:t>Single fixed species shuffle
-(fully disjoint throughout)</a:t>
-            </a:r>
-          </a:p>
-        </p:txBody>
-      </p:sp>
-      <p:sp>
-        <p:nvSpPr>
-          <p:cNvPr id="48" name="TextBox 47"/>
-          <p:cNvSpPr txBox="1"/>
-          <p:nvPr/>
-        </p:nvSpPr>
-        <p:spPr>
-          <a:xfrm>
-            <a:off x="7927848" y="4242816"/>
-            <a:ext cx="3392424" cy="237744"/>
-          </a:xfrm>
-          <a:prstGeom prst="rect">
-            <a:avLst/>
-          </a:prstGeom>
-          <a:noFill/>
-        </p:spPr>
-        <p:txBody>
-          <a:bodyPr wrap="square">
-            <a:spAutoFit/>
-          </a:bodyPr>
-          <a:lstStyle/>
-          <a:p>
-            <a:pPr algn="l"/>
-            <a:r>
-              <a:rPr sz="1100" b="1">
-                <a:solidFill>
-                  <a:srgbClr val="3F4444"/>
-                </a:solidFill>
-                <a:latin typeface="Calibri"/>
-              </a:rPr>
-              <a:t>Train/val disjoint:</a:t>
-            </a:r>
-          </a:p>
-        </p:txBody>
-      </p:sp>
-      <p:sp>
-        <p:nvSpPr>
-          <p:cNvPr id="49" name="TextBox 48"/>
-          <p:cNvSpPr txBox="1"/>
-          <p:nvPr/>
-        </p:nvSpPr>
-        <p:spPr>
-          <a:xfrm>
-            <a:off x="8001000" y="4480560"/>
-            <a:ext cx="3319272" cy="493776"/>
-          </a:xfrm>
-          <a:prstGeom prst="rect">
-            <a:avLst/>
-          </a:prstGeom>
-          <a:noFill/>
-        </p:spPr>
-        <p:txBody>
-          <a:bodyPr wrap="square">
-            <a:spAutoFit/>
-          </a:bodyPr>
-          <a:lstStyle/>
-          <a:p>
-            <a:pPr algn="l"/>
-            <a:r>
-              <a:rPr sz="1100" b="0">
-                <a:solidFill>
-                  <a:srgbClr val="3F4444"/>
-                </a:solidFill>
-                <a:latin typeface="Calibri"/>
-              </a:rPr>
-              <a:t>Yes ✓</a:t>
-            </a:r>
-          </a:p>
-        </p:txBody>
-      </p:sp>
-      <p:sp>
-        <p:nvSpPr>
-          <p:cNvPr id="50" name="TextBox 49"/>
-          <p:cNvSpPr txBox="1"/>
-          <p:nvPr/>
-        </p:nvSpPr>
-        <p:spPr>
-          <a:xfrm>
-            <a:off x="7927848" y="4974336"/>
-            <a:ext cx="3392424" cy="237744"/>
-          </a:xfrm>
-          <a:prstGeom prst="rect">
-            <a:avLst/>
-          </a:prstGeom>
-          <a:noFill/>
-        </p:spPr>
-        <p:txBody>
-          <a:bodyPr wrap="square">
-            <a:spAutoFit/>
-          </a:bodyPr>
-          <a:lstStyle/>
-          <a:p>
-            <a:pPr algn="l"/>
-            <a:r>
-              <a:rPr sz="1100" b="1">
-                <a:solidFill>
-                  <a:srgbClr val="3F4444"/>
-                </a:solidFill>
-                <a:latin typeface="Calibri"/>
-              </a:rPr>
-              <a:t>Train/test disjoint:</a:t>
-            </a:r>
-          </a:p>
-        </p:txBody>
-      </p:sp>
-      <p:sp>
-        <p:nvSpPr>
-          <p:cNvPr id="51" name="TextBox 50"/>
-          <p:cNvSpPr txBox="1"/>
-          <p:nvPr/>
-        </p:nvSpPr>
-        <p:spPr>
-          <a:xfrm>
-            <a:off x="8001000" y="5212080"/>
-            <a:ext cx="3319272" cy="493776"/>
-          </a:xfrm>
-          <a:prstGeom prst="rect">
-            <a:avLst/>
-          </a:prstGeom>
-          <a:noFill/>
-        </p:spPr>
-        <p:txBody>
-          <a:bodyPr wrap="square">
-            <a:spAutoFit/>
-          </a:bodyPr>
-          <a:lstStyle/>
-          <a:p>
-            <a:pPr algn="l"/>
-            <a:r>
-              <a:rPr sz="1100" b="0">
-                <a:solidFill>
-                  <a:srgbClr val="3F4444"/>
-                </a:solidFill>
-                <a:latin typeface="Calibri"/>
-              </a:rPr>
-              <a:t>Yes ✓</a:t>
-            </a:r>
-          </a:p>
-        </p:txBody>
-      </p:sp>
-      <p:sp>
-        <p:nvSpPr>
-          <p:cNvPr id="52" name="TextBox 51"/>
-          <p:cNvSpPr txBox="1"/>
-          <p:nvPr/>
-        </p:nvSpPr>
-        <p:spPr>
-          <a:xfrm>
-            <a:off x="7927848" y="5705856"/>
-            <a:ext cx="3392424" cy="237744"/>
-          </a:xfrm>
-          <a:prstGeom prst="rect">
-            <a:avLst/>
-          </a:prstGeom>
-          <a:noFill/>
-        </p:spPr>
-        <p:txBody>
-          <a:bodyPr wrap="square">
-            <a:spAutoFit/>
-          </a:bodyPr>
-          <a:lstStyle/>
-          <a:p>
-            <a:pPr algn="l"/>
-            <a:r>
-              <a:rPr sz="1100" b="1">
-                <a:solidFill>
-                  <a:srgbClr val="3F4444"/>
-                </a:solidFill>
-                <a:latin typeface="Calibri"/>
-              </a:rPr>
-              <a:t>Purpose:</a:t>
-            </a:r>
-          </a:p>
-        </p:txBody>
-      </p:sp>
-      <p:sp>
-        <p:nvSpPr>
-          <p:cNvPr id="53" name="TextBox 52"/>
-          <p:cNvSpPr txBox="1"/>
-          <p:nvPr/>
-        </p:nvSpPr>
-        <p:spPr>
-          <a:xfrm>
-            <a:off x="8001000" y="5943600"/>
-            <a:ext cx="3319272" cy="493776"/>
-          </a:xfrm>
-          <a:prstGeom prst="rect">
-            <a:avLst/>
-          </a:prstGeom>
-          <a:noFill/>
-        </p:spPr>
-        <p:txBody>
-          <a:bodyPr wrap="square">
-            <a:spAutoFit/>
-          </a:bodyPr>
-          <a:lstStyle/>
-          <a:p>
-            <a:pPr algn="l"/>
-            <a:r>
-              <a:rPr sz="1100" b="0">
-                <a:solidFill>
-                  <a:srgbClr val="3F4444"/>
-                </a:solidFill>
-                <a:latin typeface="Calibri"/>
-              </a:rPr>
-              <a:t>Most conservative estimate;
-val/test metrics aligned</a:t>
-            </a:r>
-          </a:p>
-        </p:txBody>
-      </p:sp>
-      <p:sp>
-        <p:nvSpPr>
-          <p:cNvPr id="54" name="TextBox 53"/>
-          <p:cNvSpPr txBox="1"/>
-          <p:nvPr/>
-        </p:nvSpPr>
-        <p:spPr>
-          <a:xfrm>
-            <a:off x="3941064" y="3218688"/>
-            <a:ext cx="182880" cy="365760"/>
-          </a:xfrm>
-          <a:prstGeom prst="rect">
-            <a:avLst/>
-          </a:prstGeom>
-          <a:noFill/>
-        </p:spPr>
-        <p:txBody>
-          <a:bodyPr wrap="square">
-            <a:spAutoFit/>
-          </a:bodyPr>
-          <a:lstStyle/>
-          <a:p>
-            <a:pPr algn="ctr"/>
-            <a:r>
-              <a:rPr sz="2200" b="1">
-                <a:solidFill>
-                  <a:srgbClr val="003865"/>
-                </a:solidFill>
-                <a:latin typeface="Calibri"/>
-              </a:rPr>
-              <a:t>→</a:t>
-            </a:r>
-          </a:p>
-        </p:txBody>
-      </p:sp>
-      <p:sp>
-        <p:nvSpPr>
-          <p:cNvPr id="55" name="TextBox 54"/>
-          <p:cNvSpPr txBox="1"/>
-          <p:nvPr/>
-        </p:nvSpPr>
-        <p:spPr>
-          <a:xfrm>
-            <a:off x="7690104" y="3218688"/>
-            <a:ext cx="182880" cy="365760"/>
-          </a:xfrm>
-          <a:prstGeom prst="rect">
-            <a:avLst/>
-          </a:prstGeom>
-          <a:noFill/>
-        </p:spPr>
-        <p:txBody>
-          <a:bodyPr wrap="square">
-            <a:spAutoFit/>
-          </a:bodyPr>
-          <a:lstStyle/>
-          <a:p>
-            <a:pPr algn="ctr"/>
-            <a:r>
-              <a:rPr sz="2200" b="1">
-                <a:solidFill>
-                  <a:srgbClr val="003865"/>
-                </a:solidFill>
-                <a:latin typeface="Calibri"/>
-              </a:rPr>
-              <a:t>→</a:t>
+              <a:t>• Framework: PyTorch 2.0+</a:t>
             </a:r>
           </a:p>
         </p:txBody>
@@ -19499,7 +19988,7 @@
 </file>
 
 <file path=ppt/slides/slide8.xml><?xml version="1.0" encoding="utf-8"?>
-<p:sld xmlns:a="http://schemas.openxmlformats.org/drawingml/2006/main" xmlns:p="http://schemas.openxmlformats.org/presentationml/2006/main" xmlns:r="http://schemas.openxmlformats.org/officeDocument/2006/relationships">
+<p:sld xmlns:a="http://schemas.openxmlformats.org/drawingml/2006/main" xmlns:r="http://schemas.openxmlformats.org/officeDocument/2006/relationships" xmlns:p="http://schemas.openxmlformats.org/presentationml/2006/main">
   <p:cSld>
     <p:spTree>
       <p:nvGrpSpPr>
@@ -19507,7 +19996,14 @@
         <p:cNvGrpSpPr/>
         <p:nvPr/>
       </p:nvGrpSpPr>
-      <p:grpSpPr/>
+      <p:grpSpPr>
+        <a:xfrm>
+          <a:off x="0" y="0"/>
+          <a:ext cx="0" cy="0"/>
+          <a:chOff x="0" y="0"/>
+          <a:chExt cx="0" cy="0"/>
+        </a:xfrm>
+      </p:grpSpPr>
       <p:sp>
         <p:nvSpPr>
           <p:cNvPr id="2" name="Rectangle 1"/>
@@ -19548,6 +20044,7 @@
           <a:lstStyle/>
           <a:p>
             <a:pPr algn="ctr"/>
+            <a:endParaRPr/>
           </a:p>
         </p:txBody>
       </p:sp>
@@ -19661,6 +20158,7 @@
           <a:lstStyle/>
           <a:p>
             <a:pPr algn="ctr"/>
+            <a:endParaRPr/>
           </a:p>
         </p:txBody>
       </p:sp>
@@ -19704,6 +20202,7 @@
           <a:lstStyle/>
           <a:p>
             <a:pPr algn="ctr"/>
+            <a:endParaRPr/>
           </a:p>
         </p:txBody>
       </p:sp>
@@ -19716,7 +20215,7 @@
         <p:spPr>
           <a:xfrm>
             <a:off x="228600" y="6510528"/>
-            <a:ext cx="10515600" cy="310896"/>
+            <a:ext cx="10515600" cy="230832"/>
           </a:xfrm>
           <a:prstGeom prst="rect">
             <a:avLst/>
@@ -19731,14 +20230,29 @@
           <a:p>
             <a:pPr algn="l"/>
             <a:r>
-              <a:rPr sz="900" b="0">
+              <a:rPr sz="900" b="0" dirty="0">
                 <a:solidFill>
                   <a:srgbClr val="FFFFFF"/>
                 </a:solidFill>
                 <a:latin typeface="Calibri"/>
               </a:rPr>
-              <a:t>Machine Learning a TE Classifier  |  Yingrui Yang  |  Cambridge Genetics 2025</a:t>
-            </a:r>
+              <a:t>Machine Learning a TE Classifier  |  Yingrui Yang  |  Cambridge Genetics </a:t>
+            </a:r>
+            <a:r>
+              <a:rPr lang="en-GB" sz="900" b="0" dirty="0">
+                <a:solidFill>
+                  <a:srgbClr val="FFFFFF"/>
+                </a:solidFill>
+                <a:latin typeface="Calibri"/>
+              </a:rPr>
+              <a:t>2026</a:t>
+            </a:r>
+            <a:endParaRPr sz="900" b="0" dirty="0">
+              <a:solidFill>
+                <a:srgbClr val="FFFFFF"/>
+              </a:solidFill>
+              <a:latin typeface="Calibri"/>
+            </a:endParaRPr>
           </a:p>
         </p:txBody>
       </p:sp>
@@ -19852,6 +20366,7 @@
           <a:lstStyle/>
           <a:p>
             <a:pPr algn="ctr"/>
+            <a:endParaRPr/>
           </a:p>
         </p:txBody>
       </p:sp>
@@ -19930,6 +20445,7 @@
           <a:lstStyle/>
           <a:p>
             <a:pPr algn="ctr"/>
+            <a:endParaRPr/>
           </a:p>
         </p:txBody>
       </p:sp>
@@ -20008,6 +20524,7 @@
           <a:lstStyle/>
           <a:p>
             <a:pPr algn="ctr"/>
+            <a:endParaRPr/>
           </a:p>
         </p:txBody>
       </p:sp>
@@ -20086,6 +20603,7 @@
           <a:lstStyle/>
           <a:p>
             <a:pPr algn="ctr"/>
+            <a:endParaRPr/>
           </a:p>
         </p:txBody>
       </p:sp>
@@ -20164,6 +20682,7 @@
           <a:lstStyle/>
           <a:p>
             <a:pPr algn="ctr"/>
+            <a:endParaRPr/>
           </a:p>
         </p:txBody>
       </p:sp>
@@ -20242,6 +20761,7 @@
           <a:lstStyle/>
           <a:p>
             <a:pPr algn="ctr"/>
+            <a:endParaRPr/>
           </a:p>
         </p:txBody>
       </p:sp>
@@ -20320,6 +20840,7 @@
           <a:lstStyle/>
           <a:p>
             <a:pPr algn="ctr"/>
+            <a:endParaRPr/>
           </a:p>
         </p:txBody>
       </p:sp>
@@ -20398,6 +20919,7 @@
           <a:lstStyle/>
           <a:p>
             <a:pPr algn="ctr"/>
+            <a:endParaRPr/>
           </a:p>
         </p:txBody>
       </p:sp>
@@ -20476,6 +20998,7 @@
           <a:lstStyle/>
           <a:p>
             <a:pPr algn="ctr"/>
+            <a:endParaRPr/>
           </a:p>
         </p:txBody>
       </p:sp>
@@ -20554,6 +21077,7 @@
           <a:lstStyle/>
           <a:p>
             <a:pPr algn="ctr"/>
+            <a:endParaRPr/>
           </a:p>
         </p:txBody>
       </p:sp>
@@ -20632,6 +21156,7 @@
           <a:lstStyle/>
           <a:p>
             <a:pPr algn="ctr"/>
+            <a:endParaRPr/>
           </a:p>
         </p:txBody>
       </p:sp>
@@ -20710,6 +21235,7 @@
           <a:lstStyle/>
           <a:p>
             <a:pPr algn="ctr"/>
+            <a:endParaRPr/>
           </a:p>
         </p:txBody>
       </p:sp>
@@ -20788,6 +21314,7 @@
           <a:lstStyle/>
           <a:p>
             <a:pPr algn="ctr"/>
+            <a:endParaRPr/>
           </a:p>
         </p:txBody>
       </p:sp>
@@ -20866,6 +21393,7 @@
           <a:lstStyle/>
           <a:p>
             <a:pPr algn="ctr"/>
+            <a:endParaRPr/>
           </a:p>
         </p:txBody>
       </p:sp>
@@ -20944,6 +21472,7 @@
           <a:lstStyle/>
           <a:p>
             <a:pPr algn="ctr"/>
+            <a:endParaRPr/>
           </a:p>
         </p:txBody>
       </p:sp>
@@ -21022,6 +21551,7 @@
           <a:lstStyle/>
           <a:p>
             <a:pPr algn="ctr"/>
+            <a:endParaRPr/>
           </a:p>
         </p:txBody>
       </p:sp>
@@ -21100,6 +21630,7 @@
           <a:lstStyle/>
           <a:p>
             <a:pPr algn="ctr"/>
+            <a:endParaRPr/>
           </a:p>
         </p:txBody>
       </p:sp>
@@ -21178,6 +21709,7 @@
           <a:lstStyle/>
           <a:p>
             <a:pPr algn="ctr"/>
+            <a:endParaRPr/>
           </a:p>
         </p:txBody>
       </p:sp>
@@ -21256,6 +21788,7 @@
           <a:lstStyle/>
           <a:p>
             <a:pPr algn="ctr"/>
+            <a:endParaRPr/>
           </a:p>
         </p:txBody>
       </p:sp>
@@ -21334,6 +21867,7 @@
           <a:lstStyle/>
           <a:p>
             <a:pPr algn="ctr"/>
+            <a:endParaRPr/>
           </a:p>
         </p:txBody>
       </p:sp>
@@ -21412,6 +21946,7 @@
           <a:lstStyle/>
           <a:p>
             <a:pPr algn="ctr"/>
+            <a:endParaRPr/>
           </a:p>
         </p:txBody>
       </p:sp>
@@ -21490,6 +22025,7 @@
           <a:lstStyle/>
           <a:p>
             <a:pPr algn="ctr"/>
+            <a:endParaRPr/>
           </a:p>
         </p:txBody>
       </p:sp>
@@ -21568,6 +22104,7 @@
           <a:lstStyle/>
           <a:p>
             <a:pPr algn="ctr"/>
+            <a:endParaRPr/>
           </a:p>
         </p:txBody>
       </p:sp>
@@ -21646,6 +22183,7 @@
           <a:lstStyle/>
           <a:p>
             <a:pPr algn="ctr"/>
+            <a:endParaRPr/>
           </a:p>
         </p:txBody>
       </p:sp>
@@ -21724,6 +22262,7 @@
           <a:lstStyle/>
           <a:p>
             <a:pPr algn="ctr"/>
+            <a:endParaRPr/>
           </a:p>
         </p:txBody>
       </p:sp>
@@ -21802,6 +22341,7 @@
           <a:lstStyle/>
           <a:p>
             <a:pPr algn="ctr"/>
+            <a:endParaRPr/>
           </a:p>
         </p:txBody>
       </p:sp>
@@ -21891,8 +22431,8 @@
         </p:blipFill>
         <p:spPr>
           <a:xfrm>
-            <a:off x="7360920" y="1298448"/>
-            <a:ext cx="4572000" cy="4846320"/>
+            <a:off x="7406640" y="2304288"/>
+            <a:ext cx="4572000" cy="2057400"/>
           </a:xfrm>
           <a:prstGeom prst="rect">
             <a:avLst/>
@@ -21908,7 +22448,7 @@
 </file>
 
 <file path=ppt/slides/slide9.xml><?xml version="1.0" encoding="utf-8"?>
-<p:sld xmlns:a="http://schemas.openxmlformats.org/drawingml/2006/main" xmlns:p="http://schemas.openxmlformats.org/presentationml/2006/main" xmlns:r="http://schemas.openxmlformats.org/officeDocument/2006/relationships">
+<p:sld xmlns:a="http://schemas.openxmlformats.org/drawingml/2006/main" xmlns:r="http://schemas.openxmlformats.org/officeDocument/2006/relationships" xmlns:p="http://schemas.openxmlformats.org/presentationml/2006/main">
   <p:cSld>
     <p:spTree>
       <p:nvGrpSpPr>
@@ -21916,7 +22456,14 @@
         <p:cNvGrpSpPr/>
         <p:nvPr/>
       </p:nvGrpSpPr>
-      <p:grpSpPr/>
+      <p:grpSpPr>
+        <a:xfrm>
+          <a:off x="0" y="0"/>
+          <a:ext cx="0" cy="0"/>
+          <a:chOff x="0" y="0"/>
+          <a:chExt cx="0" cy="0"/>
+        </a:xfrm>
+      </p:grpSpPr>
       <p:sp>
         <p:nvSpPr>
           <p:cNvPr id="2" name="Rectangle 1"/>
@@ -21957,6 +22504,7 @@
           <a:lstStyle/>
           <a:p>
             <a:pPr algn="ctr"/>
+            <a:endParaRPr/>
           </a:p>
         </p:txBody>
       </p:sp>
@@ -22070,6 +22618,7 @@
           <a:lstStyle/>
           <a:p>
             <a:pPr algn="ctr"/>
+            <a:endParaRPr/>
           </a:p>
         </p:txBody>
       </p:sp>
@@ -22113,6 +22662,7 @@
           <a:lstStyle/>
           <a:p>
             <a:pPr algn="ctr"/>
+            <a:endParaRPr/>
           </a:p>
         </p:txBody>
       </p:sp>
@@ -22125,7 +22675,7 @@
         <p:spPr>
           <a:xfrm>
             <a:off x="228600" y="6510528"/>
-            <a:ext cx="10515600" cy="310896"/>
+            <a:ext cx="10515600" cy="230832"/>
           </a:xfrm>
           <a:prstGeom prst="rect">
             <a:avLst/>
@@ -22140,14 +22690,29 @@
           <a:p>
             <a:pPr algn="l"/>
             <a:r>
-              <a:rPr sz="900" b="0">
+              <a:rPr sz="900" b="0" dirty="0">
                 <a:solidFill>
                   <a:srgbClr val="FFFFFF"/>
                 </a:solidFill>
                 <a:latin typeface="Calibri"/>
               </a:rPr>
-              <a:t>Machine Learning a TE Classifier  |  Yingrui Yang  |  Cambridge Genetics 2025</a:t>
-            </a:r>
+              <a:t>Machine Learning a TE Classifier  |  Yingrui Yang  |  Cambridge Genetics </a:t>
+            </a:r>
+            <a:r>
+              <a:rPr lang="en-GB" sz="900" b="0" dirty="0">
+                <a:solidFill>
+                  <a:srgbClr val="FFFFFF"/>
+                </a:solidFill>
+                <a:latin typeface="Calibri"/>
+              </a:rPr>
+              <a:t>2026</a:t>
+            </a:r>
+            <a:endParaRPr sz="900" b="0" dirty="0">
+              <a:solidFill>
+                <a:srgbClr val="FFFFFF"/>
+              </a:solidFill>
+              <a:latin typeface="Calibri"/>
+            </a:endParaRPr>
           </a:p>
         </p:txBody>
       </p:sp>
@@ -22261,6 +22826,7 @@
           <a:lstStyle/>
           <a:p>
             <a:pPr algn="ctr"/>
+            <a:endParaRPr/>
           </a:p>
         </p:txBody>
       </p:sp>
@@ -22339,6 +22905,7 @@
           <a:lstStyle/>
           <a:p>
             <a:pPr algn="ctr"/>
+            <a:endParaRPr/>
           </a:p>
         </p:txBody>
       </p:sp>
@@ -22417,6 +22984,7 @@
           <a:lstStyle/>
           <a:p>
             <a:pPr algn="ctr"/>
+            <a:endParaRPr/>
           </a:p>
         </p:txBody>
       </p:sp>
@@ -22495,6 +23063,7 @@
           <a:lstStyle/>
           <a:p>
             <a:pPr algn="ctr"/>
+            <a:endParaRPr/>
           </a:p>
         </p:txBody>
       </p:sp>
@@ -22573,6 +23142,7 @@
           <a:lstStyle/>
           <a:p>
             <a:pPr algn="ctr"/>
+            <a:endParaRPr/>
           </a:p>
         </p:txBody>
       </p:sp>
@@ -22651,6 +23221,7 @@
           <a:lstStyle/>
           <a:p>
             <a:pPr algn="ctr"/>
+            <a:endParaRPr/>
           </a:p>
         </p:txBody>
       </p:sp>
@@ -22729,6 +23300,7 @@
           <a:lstStyle/>
           <a:p>
             <a:pPr algn="ctr"/>
+            <a:endParaRPr/>
           </a:p>
         </p:txBody>
       </p:sp>
@@ -22807,6 +23379,7 @@
           <a:lstStyle/>
           <a:p>
             <a:pPr algn="ctr"/>
+            <a:endParaRPr/>
           </a:p>
         </p:txBody>
       </p:sp>
@@ -22885,6 +23458,7 @@
           <a:lstStyle/>
           <a:p>
             <a:pPr algn="ctr"/>
+            <a:endParaRPr/>
           </a:p>
         </p:txBody>
       </p:sp>
@@ -22963,6 +23537,7 @@
           <a:lstStyle/>
           <a:p>
             <a:pPr algn="ctr"/>
+            <a:endParaRPr/>
           </a:p>
         </p:txBody>
       </p:sp>
@@ -23122,8 +23697,8 @@
         </p:blipFill>
         <p:spPr>
           <a:xfrm>
-            <a:off x="6675120" y="1298448"/>
-            <a:ext cx="5212080" cy="4572000"/>
+            <a:off x="6775704" y="2377440"/>
+            <a:ext cx="5212080" cy="2267712"/>
           </a:xfrm>
           <a:prstGeom prst="rect">
             <a:avLst/>
